--- a/output/part4.pptx
+++ b/output/part4.pptx
@@ -17,8 +17,8 @@
   <p:notesMasterIdLst>
     <p:notesMasterId r:id="rId10"/>
   </p:notesMasterIdLst>
-  <p:sldSz cx="12192000" cy="6858000"/>
-  <p:notesSz cx="6858000" cy="12192000"/>
+  <p:sldSz cx="9144000" cy="5029200"/>
+  <p:notesSz cx="5029200" cy="9144000"/>
   <p:defaultTextStyle>
     <a:lvl1pPr marL="0" algn="l" defTabSz="914400" rtl="0" eaLnBrk="1" latinLnBrk="0" hangingPunct="1">
       <a:defRPr sz="1800" kern="1200">

--- a/output/part4.pptx
+++ b/output/part4.pptx
@@ -1480,7 +1480,7 @@
     <p:bg>
       <p:bgPr>
         <a:solidFill>
-          <a:srgbClr val="0D1117"/>
+          <a:srgbClr val="FFFDF8"/>
         </a:solidFill>
       </p:bgPr>
     </p:bg>
@@ -1513,11 +1513,11 @@
             <a:avLst/>
           </a:prstGeom>
           <a:solidFill>
-            <a:srgbClr val="161B22"/>
+            <a:srgbClr val="F5F1EB"/>
           </a:solidFill>
           <a:ln w="6350">
             <a:solidFill>
-              <a:srgbClr val="30363D"/>
+              <a:srgbClr val="D6CCBF"/>
             </a:solidFill>
             <a:prstDash val="solid"/>
           </a:ln>
@@ -1538,11 +1538,11 @@
             <a:avLst/>
           </a:prstGeom>
           <a:solidFill>
-            <a:srgbClr val="58A6FF"/>
+            <a:srgbClr val="4A7FB5"/>
           </a:solidFill>
           <a:ln w="12700">
             <a:solidFill>
-              <a:srgbClr val="58A6FF"/>
+              <a:srgbClr val="4A7FB5"/>
             </a:solidFill>
             <a:prstDash val="solid"/>
           </a:ln>
@@ -1575,13 +1575,13 @@
             <a:r>
               <a:rPr lang="en-US" sz="1600" b="1" dirty="0">
                 <a:solidFill>
-                  <a:srgbClr val="E6EDF3"/>
-                </a:solidFill>
-                <a:latin typeface="Calibri" pitchFamily="34" charset="0"/>
-                <a:ea typeface="Calibri" pitchFamily="34" charset="-122"/>
-                <a:cs typeface="Calibri" pitchFamily="34" charset="-120"/>
-              </a:rPr>
-              <a:t>12-Factor App：現代應用的設計原則</a:t>
+                  <a:srgbClr val="2D2926"/>
+                </a:solidFill>
+                <a:latin typeface="Calibri" pitchFamily="34" charset="0"/>
+                <a:ea typeface="Calibri" pitchFamily="34" charset="-122"/>
+                <a:cs typeface="Calibri" pitchFamily="34" charset="-120"/>
+              </a:rPr>
+              <a:t>12-Factor App: Modern Application Design Principles</a:t>
             </a:r>
             <a:endParaRPr lang="en-US" sz="1600" dirty="0"/>
           </a:p>
@@ -1614,13 +1614,13 @@
             <a:r>
               <a:rPr lang="en-US" sz="850" dirty="0">
                 <a:solidFill>
-                  <a:srgbClr val="8B949E"/>
-                </a:solidFill>
-                <a:latin typeface="Calibri" pitchFamily="34" charset="0"/>
-                <a:ea typeface="Calibri" pitchFamily="34" charset="-122"/>
-                <a:cs typeface="Calibri" pitchFamily="34" charset="-120"/>
-              </a:rPr>
-              <a:t>PART 4  ·  27 / 50</a:t>
+                  <a:srgbClr val="8A8078"/>
+                </a:solidFill>
+                <a:latin typeface="Calibri" pitchFamily="34" charset="0"/>
+                <a:ea typeface="Calibri" pitchFamily="34" charset="-122"/>
+                <a:cs typeface="Calibri" pitchFamily="34" charset="-120"/>
+              </a:rPr>
+              <a:t>PART 4</a:t>
             </a:r>
             <a:endParaRPr lang="en-US" sz="850" dirty="0"/>
           </a:p>
@@ -1653,13 +1653,13 @@
             <a:r>
               <a:rPr lang="en-US" sz="1500" b="1" dirty="0">
                 <a:solidFill>
-                  <a:srgbClr val="58A6FF"/>
-                </a:solidFill>
-                <a:latin typeface="Calibri" pitchFamily="34" charset="0"/>
-                <a:ea typeface="Calibri" pitchFamily="34" charset="-122"/>
-                <a:cs typeface="Calibri" pitchFamily="34" charset="-120"/>
-              </a:rPr>
-              <a:t>12-Factor App 是什麼？</a:t>
+                  <a:srgbClr val="4A7FB5"/>
+                </a:solidFill>
+                <a:latin typeface="Calibri" pitchFamily="34" charset="0"/>
+                <a:ea typeface="Calibri" pitchFamily="34" charset="-122"/>
+                <a:cs typeface="Calibri" pitchFamily="34" charset="-120"/>
+              </a:rPr>
+              <a:t>What is the 12-Factor App?</a:t>
             </a:r>
             <a:endParaRPr lang="en-US" sz="1500" dirty="0"/>
           </a:p>
@@ -1692,13 +1692,13 @@
             <a:r>
               <a:rPr lang="en-US" sz="1000" dirty="0">
                 <a:solidFill>
-                  <a:srgbClr val="8B949E"/>
-                </a:solidFill>
-                <a:latin typeface="Calibri" pitchFamily="34" charset="0"/>
-                <a:ea typeface="Calibri" pitchFamily="34" charset="-122"/>
-                <a:cs typeface="Calibri" pitchFamily="34" charset="-120"/>
-              </a:rPr>
-              <a:t>由 Heroku 工程師總結的 12 條準則，讓應用程式能在 Cloud Native 環境中良好運作</a:t>
+                  <a:srgbClr val="8A8078"/>
+                </a:solidFill>
+                <a:latin typeface="Calibri" pitchFamily="34" charset="0"/>
+                <a:ea typeface="Calibri" pitchFamily="34" charset="-122"/>
+                <a:cs typeface="Calibri" pitchFamily="34" charset="-120"/>
+              </a:rPr>
+              <a:t>12 principles distilled by Heroku engineers to help applications thrive in Cloud Native environments</a:t>
             </a:r>
             <a:endParaRPr lang="en-US" sz="1000" dirty="0"/>
           </a:p>
@@ -1721,11 +1721,11 @@
             </a:avLst>
           </a:prstGeom>
           <a:solidFill>
-            <a:srgbClr val="161B22"/>
+            <a:srgbClr val="F5F1EB"/>
           </a:solidFill>
           <a:ln w="15240">
             <a:solidFill>
-              <a:srgbClr val="58A6FF"/>
+              <a:srgbClr val="4A7FB5"/>
             </a:solidFill>
             <a:prstDash val="solid"/>
           </a:ln>
@@ -1758,7 +1758,7 @@
             <a:r>
               <a:rPr lang="en-US" sz="1100" b="1" dirty="0">
                 <a:solidFill>
-                  <a:srgbClr val="58A6FF"/>
+                  <a:srgbClr val="4A7FB5"/>
                 </a:solidFill>
                 <a:latin typeface="Calibri" pitchFamily="34" charset="0"/>
                 <a:ea typeface="Calibri" pitchFamily="34" charset="-122"/>
@@ -1797,7 +1797,7 @@
             <a:r>
               <a:rPr lang="en-US" sz="850" dirty="0">
                 <a:solidFill>
-                  <a:srgbClr val="8B949E"/>
+                  <a:srgbClr val="8A8078"/>
                 </a:solidFill>
                 <a:latin typeface="Calibri" pitchFamily="34" charset="0"/>
                 <a:ea typeface="Calibri" pitchFamily="34" charset="-122"/>
@@ -1826,11 +1826,11 @@
             </a:avLst>
           </a:prstGeom>
           <a:solidFill>
-            <a:srgbClr val="161B22"/>
+            <a:srgbClr val="F5F1EB"/>
           </a:solidFill>
           <a:ln w="15240">
             <a:solidFill>
-              <a:srgbClr val="58A6FF"/>
+              <a:srgbClr val="4A7FB5"/>
             </a:solidFill>
             <a:prstDash val="solid"/>
           </a:ln>
@@ -1863,7 +1863,7 @@
             <a:r>
               <a:rPr lang="en-US" sz="1100" b="1" dirty="0">
                 <a:solidFill>
-                  <a:srgbClr val="58A6FF"/>
+                  <a:srgbClr val="4A7FB5"/>
                 </a:solidFill>
                 <a:latin typeface="Calibri" pitchFamily="34" charset="0"/>
                 <a:ea typeface="Calibri" pitchFamily="34" charset="-122"/>
@@ -1902,7 +1902,7 @@
             <a:r>
               <a:rPr lang="en-US" sz="850" dirty="0">
                 <a:solidFill>
-                  <a:srgbClr val="8B949E"/>
+                  <a:srgbClr val="8A8078"/>
                 </a:solidFill>
                 <a:latin typeface="Calibri" pitchFamily="34" charset="0"/>
                 <a:ea typeface="Calibri" pitchFamily="34" charset="-122"/>
@@ -1931,11 +1931,11 @@
             </a:avLst>
           </a:prstGeom>
           <a:solidFill>
-            <a:srgbClr val="161B22"/>
+            <a:srgbClr val="F5F1EB"/>
           </a:solidFill>
           <a:ln w="15240">
             <a:solidFill>
-              <a:srgbClr val="58A6FF"/>
+              <a:srgbClr val="4A7FB5"/>
             </a:solidFill>
             <a:prstDash val="solid"/>
           </a:ln>
@@ -1968,7 +1968,7 @@
             <a:r>
               <a:rPr lang="en-US" sz="1100" b="1" dirty="0">
                 <a:solidFill>
-                  <a:srgbClr val="58A6FF"/>
+                  <a:srgbClr val="4A7FB5"/>
                 </a:solidFill>
                 <a:latin typeface="Calibri" pitchFamily="34" charset="0"/>
                 <a:ea typeface="Calibri" pitchFamily="34" charset="-122"/>
@@ -2007,7 +2007,7 @@
             <a:r>
               <a:rPr lang="en-US" sz="850" dirty="0">
                 <a:solidFill>
-                  <a:srgbClr val="8B949E"/>
+                  <a:srgbClr val="8A8078"/>
                 </a:solidFill>
                 <a:latin typeface="Calibri" pitchFamily="34" charset="0"/>
                 <a:ea typeface="Calibri" pitchFamily="34" charset="-122"/>
@@ -2036,11 +2036,11 @@
             </a:avLst>
           </a:prstGeom>
           <a:solidFill>
-            <a:srgbClr val="161B22"/>
+            <a:srgbClr val="F5F1EB"/>
           </a:solidFill>
           <a:ln w="15240">
             <a:solidFill>
-              <a:srgbClr val="6E40C9"/>
+              <a:srgbClr val="8B6AB5"/>
             </a:solidFill>
             <a:prstDash val="solid"/>
           </a:ln>
@@ -2073,7 +2073,7 @@
             <a:r>
               <a:rPr lang="en-US" sz="1100" b="1" dirty="0">
                 <a:solidFill>
-                  <a:srgbClr val="6E40C9"/>
+                  <a:srgbClr val="8B6AB5"/>
                 </a:solidFill>
                 <a:latin typeface="Calibri" pitchFamily="34" charset="0"/>
                 <a:ea typeface="Calibri" pitchFamily="34" charset="-122"/>
@@ -2112,7 +2112,7 @@
             <a:r>
               <a:rPr lang="en-US" sz="850" dirty="0">
                 <a:solidFill>
-                  <a:srgbClr val="8B949E"/>
+                  <a:srgbClr val="8A8078"/>
                 </a:solidFill>
                 <a:latin typeface="Calibri" pitchFamily="34" charset="0"/>
                 <a:ea typeface="Calibri" pitchFamily="34" charset="-122"/>
@@ -2141,11 +2141,11 @@
             </a:avLst>
           </a:prstGeom>
           <a:solidFill>
-            <a:srgbClr val="161B22"/>
+            <a:srgbClr val="F5F1EB"/>
           </a:solidFill>
           <a:ln w="15240">
             <a:solidFill>
-              <a:srgbClr val="6E40C9"/>
+              <a:srgbClr val="8B6AB5"/>
             </a:solidFill>
             <a:prstDash val="solid"/>
           </a:ln>
@@ -2178,7 +2178,7 @@
             <a:r>
               <a:rPr lang="en-US" sz="1100" b="1" dirty="0">
                 <a:solidFill>
-                  <a:srgbClr val="6E40C9"/>
+                  <a:srgbClr val="8B6AB5"/>
                 </a:solidFill>
                 <a:latin typeface="Calibri" pitchFamily="34" charset="0"/>
                 <a:ea typeface="Calibri" pitchFamily="34" charset="-122"/>
@@ -2217,7 +2217,7 @@
             <a:r>
               <a:rPr lang="en-US" sz="850" dirty="0">
                 <a:solidFill>
-                  <a:srgbClr val="8B949E"/>
+                  <a:srgbClr val="8A8078"/>
                 </a:solidFill>
                 <a:latin typeface="Calibri" pitchFamily="34" charset="0"/>
                 <a:ea typeface="Calibri" pitchFamily="34" charset="-122"/>
@@ -2246,11 +2246,11 @@
             </a:avLst>
           </a:prstGeom>
           <a:solidFill>
-            <a:srgbClr val="161B22"/>
+            <a:srgbClr val="F5F1EB"/>
           </a:solidFill>
           <a:ln w="15240">
             <a:solidFill>
-              <a:srgbClr val="6E40C9"/>
+              <a:srgbClr val="8B6AB5"/>
             </a:solidFill>
             <a:prstDash val="solid"/>
           </a:ln>
@@ -2283,7 +2283,7 @@
             <a:r>
               <a:rPr lang="en-US" sz="1100" b="1" dirty="0">
                 <a:solidFill>
-                  <a:srgbClr val="6E40C9"/>
+                  <a:srgbClr val="8B6AB5"/>
                 </a:solidFill>
                 <a:latin typeface="Calibri" pitchFamily="34" charset="0"/>
                 <a:ea typeface="Calibri" pitchFamily="34" charset="-122"/>
@@ -2322,7 +2322,7 @@
             <a:r>
               <a:rPr lang="en-US" sz="850" dirty="0">
                 <a:solidFill>
-                  <a:srgbClr val="8B949E"/>
+                  <a:srgbClr val="8A8078"/>
                 </a:solidFill>
                 <a:latin typeface="Calibri" pitchFamily="34" charset="0"/>
                 <a:ea typeface="Calibri" pitchFamily="34" charset="-122"/>
@@ -2351,11 +2351,11 @@
             </a:avLst>
           </a:prstGeom>
           <a:solidFill>
-            <a:srgbClr val="161B22"/>
+            <a:srgbClr val="F5F1EB"/>
           </a:solidFill>
           <a:ln w="15240">
             <a:solidFill>
-              <a:srgbClr val="3FB950"/>
+              <a:srgbClr val="4A9968"/>
             </a:solidFill>
             <a:prstDash val="solid"/>
           </a:ln>
@@ -2388,7 +2388,7 @@
             <a:r>
               <a:rPr lang="en-US" sz="1100" b="1" dirty="0">
                 <a:solidFill>
-                  <a:srgbClr val="3FB950"/>
+                  <a:srgbClr val="4A9968"/>
                 </a:solidFill>
                 <a:latin typeface="Calibri" pitchFamily="34" charset="0"/>
                 <a:ea typeface="Calibri" pitchFamily="34" charset="-122"/>
@@ -2427,7 +2427,7 @@
             <a:r>
               <a:rPr lang="en-US" sz="850" dirty="0">
                 <a:solidFill>
-                  <a:srgbClr val="8B949E"/>
+                  <a:srgbClr val="8A8078"/>
                 </a:solidFill>
                 <a:latin typeface="Calibri" pitchFamily="34" charset="0"/>
                 <a:ea typeface="Calibri" pitchFamily="34" charset="-122"/>
@@ -2456,11 +2456,11 @@
             </a:avLst>
           </a:prstGeom>
           <a:solidFill>
-            <a:srgbClr val="161B22"/>
+            <a:srgbClr val="F5F1EB"/>
           </a:solidFill>
           <a:ln w="15240">
             <a:solidFill>
-              <a:srgbClr val="3FB950"/>
+              <a:srgbClr val="4A9968"/>
             </a:solidFill>
             <a:prstDash val="solid"/>
           </a:ln>
@@ -2493,7 +2493,7 @@
             <a:r>
               <a:rPr lang="en-US" sz="1100" b="1" dirty="0">
                 <a:solidFill>
-                  <a:srgbClr val="3FB950"/>
+                  <a:srgbClr val="4A9968"/>
                 </a:solidFill>
                 <a:latin typeface="Calibri" pitchFamily="34" charset="0"/>
                 <a:ea typeface="Calibri" pitchFamily="34" charset="-122"/>
@@ -2532,7 +2532,7 @@
             <a:r>
               <a:rPr lang="en-US" sz="850" dirty="0">
                 <a:solidFill>
-                  <a:srgbClr val="8B949E"/>
+                  <a:srgbClr val="8A8078"/>
                 </a:solidFill>
                 <a:latin typeface="Calibri" pitchFamily="34" charset="0"/>
                 <a:ea typeface="Calibri" pitchFamily="34" charset="-122"/>
@@ -2561,11 +2561,11 @@
             </a:avLst>
           </a:prstGeom>
           <a:solidFill>
-            <a:srgbClr val="161B22"/>
+            <a:srgbClr val="F5F1EB"/>
           </a:solidFill>
           <a:ln w="15240">
             <a:solidFill>
-              <a:srgbClr val="3FB950"/>
+              <a:srgbClr val="4A9968"/>
             </a:solidFill>
             <a:prstDash val="solid"/>
           </a:ln>
@@ -2598,7 +2598,7 @@
             <a:r>
               <a:rPr lang="en-US" sz="1100" b="1" dirty="0">
                 <a:solidFill>
-                  <a:srgbClr val="3FB950"/>
+                  <a:srgbClr val="4A9968"/>
                 </a:solidFill>
                 <a:latin typeface="Calibri" pitchFamily="34" charset="0"/>
                 <a:ea typeface="Calibri" pitchFamily="34" charset="-122"/>
@@ -2637,7 +2637,7 @@
             <a:r>
               <a:rPr lang="en-US" sz="850" dirty="0">
                 <a:solidFill>
-                  <a:srgbClr val="8B949E"/>
+                  <a:srgbClr val="8A8078"/>
                 </a:solidFill>
                 <a:latin typeface="Calibri" pitchFamily="34" charset="0"/>
                 <a:ea typeface="Calibri" pitchFamily="34" charset="-122"/>
@@ -2666,11 +2666,11 @@
             </a:avLst>
           </a:prstGeom>
           <a:solidFill>
-            <a:srgbClr val="161B22"/>
+            <a:srgbClr val="F5F1EB"/>
           </a:solidFill>
           <a:ln w="15240">
             <a:solidFill>
-              <a:srgbClr val="D29922"/>
+              <a:srgbClr val="B8892C"/>
             </a:solidFill>
             <a:prstDash val="solid"/>
           </a:ln>
@@ -2703,7 +2703,7 @@
             <a:r>
               <a:rPr lang="en-US" sz="1100" b="1" dirty="0">
                 <a:solidFill>
-                  <a:srgbClr val="D29922"/>
+                  <a:srgbClr val="B8892C"/>
                 </a:solidFill>
                 <a:latin typeface="Calibri" pitchFamily="34" charset="0"/>
                 <a:ea typeface="Calibri" pitchFamily="34" charset="-122"/>
@@ -2742,7 +2742,7 @@
             <a:r>
               <a:rPr lang="en-US" sz="850" dirty="0">
                 <a:solidFill>
-                  <a:srgbClr val="8B949E"/>
+                  <a:srgbClr val="8A8078"/>
                 </a:solidFill>
                 <a:latin typeface="Calibri" pitchFamily="34" charset="0"/>
                 <a:ea typeface="Calibri" pitchFamily="34" charset="-122"/>
@@ -2771,11 +2771,11 @@
             </a:avLst>
           </a:prstGeom>
           <a:solidFill>
-            <a:srgbClr val="161B22"/>
+            <a:srgbClr val="F5F1EB"/>
           </a:solidFill>
           <a:ln w="15240">
             <a:solidFill>
-              <a:srgbClr val="D29922"/>
+              <a:srgbClr val="B8892C"/>
             </a:solidFill>
             <a:prstDash val="solid"/>
           </a:ln>
@@ -2808,7 +2808,7 @@
             <a:r>
               <a:rPr lang="en-US" sz="1100" b="1" dirty="0">
                 <a:solidFill>
-                  <a:srgbClr val="D29922"/>
+                  <a:srgbClr val="B8892C"/>
                 </a:solidFill>
                 <a:latin typeface="Calibri" pitchFamily="34" charset="0"/>
                 <a:ea typeface="Calibri" pitchFamily="34" charset="-122"/>
@@ -2847,7 +2847,7 @@
             <a:r>
               <a:rPr lang="en-US" sz="850" dirty="0">
                 <a:solidFill>
-                  <a:srgbClr val="8B949E"/>
+                  <a:srgbClr val="8A8078"/>
                 </a:solidFill>
                 <a:latin typeface="Calibri" pitchFamily="34" charset="0"/>
                 <a:ea typeface="Calibri" pitchFamily="34" charset="-122"/>
@@ -2876,11 +2876,11 @@
             </a:avLst>
           </a:prstGeom>
           <a:solidFill>
-            <a:srgbClr val="161B22"/>
+            <a:srgbClr val="F5F1EB"/>
           </a:solidFill>
           <a:ln w="15240">
             <a:solidFill>
-              <a:srgbClr val="D29922"/>
+              <a:srgbClr val="B8892C"/>
             </a:solidFill>
             <a:prstDash val="solid"/>
           </a:ln>
@@ -2913,7 +2913,7 @@
             <a:r>
               <a:rPr lang="en-US" sz="1100" b="1" dirty="0">
                 <a:solidFill>
-                  <a:srgbClr val="D29922"/>
+                  <a:srgbClr val="B8892C"/>
                 </a:solidFill>
                 <a:latin typeface="Calibri" pitchFamily="34" charset="0"/>
                 <a:ea typeface="Calibri" pitchFamily="34" charset="-122"/>
@@ -2952,7 +2952,7 @@
             <a:r>
               <a:rPr lang="en-US" sz="850" dirty="0">
                 <a:solidFill>
-                  <a:srgbClr val="8B949E"/>
+                  <a:srgbClr val="8A8078"/>
                 </a:solidFill>
                 <a:latin typeface="Calibri" pitchFamily="34" charset="0"/>
                 <a:ea typeface="Calibri" pitchFamily="34" charset="-122"/>
@@ -2981,11 +2981,11 @@
             </a:avLst>
           </a:prstGeom>
           <a:solidFill>
-            <a:srgbClr val="0A1929"/>
+            <a:srgbClr val="EAF0F7"/>
           </a:solidFill>
           <a:ln w="9525">
             <a:solidFill>
-              <a:srgbClr val="58A6FF"/>
+              <a:srgbClr val="4A7FB5"/>
             </a:solidFill>
             <a:prstDash val="solid"/>
           </a:ln>
@@ -3018,13 +3018,13 @@
             <a:r>
               <a:rPr lang="en-US" sz="1000" i="1" dirty="0">
                 <a:solidFill>
-                  <a:srgbClr val="8B949E"/>
-                </a:solidFill>
-                <a:latin typeface="Calibri" pitchFamily="34" charset="0"/>
-                <a:ea typeface="Calibri" pitchFamily="34" charset="-122"/>
-                <a:cs typeface="Calibri" pitchFamily="34" charset="-120"/>
-              </a:rPr>
-              <a:t>💡  這 12 條原則不是規定，是建議 — 但遵循它們能讓你的 App 在 Container/Cloud 環境中自然地運作</a:t>
+                  <a:srgbClr val="8A8078"/>
+                </a:solidFill>
+                <a:latin typeface="Calibri" pitchFamily="34" charset="0"/>
+                <a:ea typeface="Calibri" pitchFamily="34" charset="-122"/>
+                <a:cs typeface="Calibri" pitchFamily="34" charset="-120"/>
+              </a:rPr>
+              <a:t>💡  These 12 principles are guidelines, not rules — but following them lets your app run naturally in Container/Cloud environments</a:t>
             </a:r>
             <a:endParaRPr lang="en-US" sz="1000" dirty="0"/>
           </a:p>
@@ -3044,7 +3044,7 @@
     <p:bg>
       <p:bgPr>
         <a:solidFill>
-          <a:srgbClr val="0D1117"/>
+          <a:srgbClr val="FFFDF8"/>
         </a:solidFill>
       </p:bgPr>
     </p:bg>
@@ -3077,11 +3077,11 @@
             <a:avLst/>
           </a:prstGeom>
           <a:solidFill>
-            <a:srgbClr val="161B22"/>
+            <a:srgbClr val="F5F1EB"/>
           </a:solidFill>
           <a:ln w="6350">
             <a:solidFill>
-              <a:srgbClr val="30363D"/>
+              <a:srgbClr val="D6CCBF"/>
             </a:solidFill>
             <a:prstDash val="solid"/>
           </a:ln>
@@ -3102,11 +3102,11 @@
             <a:avLst/>
           </a:prstGeom>
           <a:solidFill>
-            <a:srgbClr val="58A6FF"/>
+            <a:srgbClr val="4A7FB5"/>
           </a:solidFill>
           <a:ln w="12700">
             <a:solidFill>
-              <a:srgbClr val="58A6FF"/>
+              <a:srgbClr val="4A7FB5"/>
             </a:solidFill>
             <a:prstDash val="solid"/>
           </a:ln>
@@ -3139,13 +3139,13 @@
             <a:r>
               <a:rPr lang="en-US" sz="1600" b="1" dirty="0">
                 <a:solidFill>
-                  <a:srgbClr val="E6EDF3"/>
-                </a:solidFill>
-                <a:latin typeface="Calibri" pitchFamily="34" charset="0"/>
-                <a:ea typeface="Calibri" pitchFamily="34" charset="-122"/>
-                <a:cs typeface="Calibri" pitchFamily="34" charset="-120"/>
-              </a:rPr>
-              <a:t>Factor 1-3：Codebase、Dependencies、Config</a:t>
+                  <a:srgbClr val="2D2926"/>
+                </a:solidFill>
+                <a:latin typeface="Calibri" pitchFamily="34" charset="0"/>
+                <a:ea typeface="Calibri" pitchFamily="34" charset="-122"/>
+                <a:cs typeface="Calibri" pitchFamily="34" charset="-120"/>
+              </a:rPr>
+              <a:t>Factor 1-3: Codebase, Dependencies, Config</a:t>
             </a:r>
             <a:endParaRPr lang="en-US" sz="1600" dirty="0"/>
           </a:p>
@@ -3178,13 +3178,13 @@
             <a:r>
               <a:rPr lang="en-US" sz="850" dirty="0">
                 <a:solidFill>
-                  <a:srgbClr val="8B949E"/>
-                </a:solidFill>
-                <a:latin typeface="Calibri" pitchFamily="34" charset="0"/>
-                <a:ea typeface="Calibri" pitchFamily="34" charset="-122"/>
-                <a:cs typeface="Calibri" pitchFamily="34" charset="-120"/>
-              </a:rPr>
-              <a:t>PART 4  ·  28 / 50</a:t>
+                  <a:srgbClr val="8A8078"/>
+                </a:solidFill>
+                <a:latin typeface="Calibri" pitchFamily="34" charset="0"/>
+                <a:ea typeface="Calibri" pitchFamily="34" charset="-122"/>
+                <a:cs typeface="Calibri" pitchFamily="34" charset="-120"/>
+              </a:rPr>
+              <a:t>PART 4</a:t>
             </a:r>
             <a:endParaRPr lang="en-US" sz="850" dirty="0"/>
           </a:p>
@@ -3207,11 +3207,11 @@
             </a:avLst>
           </a:prstGeom>
           <a:solidFill>
-            <a:srgbClr val="161B22"/>
+            <a:srgbClr val="F5F1EB"/>
           </a:solidFill>
           <a:ln w="15240">
             <a:solidFill>
-              <a:srgbClr val="58A6FF"/>
+              <a:srgbClr val="4A7FB5"/>
             </a:solidFill>
             <a:prstDash val="solid"/>
           </a:ln>
@@ -3232,11 +3232,11 @@
             <a:avLst/>
           </a:prstGeom>
           <a:solidFill>
-            <a:srgbClr val="1C2128"/>
+            <a:srgbClr val="ECE6DD"/>
           </a:solidFill>
           <a:ln w="12700">
             <a:solidFill>
-              <a:srgbClr val="30363D"/>
+              <a:srgbClr val="D6CCBF"/>
             </a:solidFill>
             <a:prstDash val="solid"/>
           </a:ln>
@@ -3305,7 +3305,7 @@
             <a:r>
               <a:rPr lang="en-US" sz="1200" b="1" dirty="0">
                 <a:solidFill>
-                  <a:srgbClr val="58A6FF"/>
+                  <a:srgbClr val="4A7FB5"/>
                 </a:solidFill>
                 <a:latin typeface="Calibri" pitchFamily="34" charset="0"/>
                 <a:ea typeface="Calibri" pitchFamily="34" charset="-122"/>
@@ -3332,11 +3332,11 @@
             <a:avLst/>
           </a:prstGeom>
           <a:solidFill>
-            <a:srgbClr val="58A6FF"/>
+            <a:srgbClr val="4A7FB5"/>
           </a:solidFill>
           <a:ln w="12700">
             <a:solidFill>
-              <a:srgbClr val="58A6FF"/>
+              <a:srgbClr val="4A7FB5"/>
             </a:solidFill>
             <a:prstDash val="solid"/>
           </a:ln>
@@ -3369,13 +3369,13 @@
             <a:r>
               <a:rPr lang="en-US" sz="1050" b="1" dirty="0">
                 <a:solidFill>
-                  <a:srgbClr val="E6EDF3"/>
-                </a:solidFill>
-                <a:latin typeface="Calibri" pitchFamily="34" charset="0"/>
-                <a:ea typeface="Calibri" pitchFamily="34" charset="-122"/>
-                <a:cs typeface="Calibri" pitchFamily="34" charset="-120"/>
-              </a:rPr>
-              <a:t>一個 Repo = 一個應用</a:t>
+                  <a:srgbClr val="2D2926"/>
+                </a:solidFill>
+                <a:latin typeface="Calibri" pitchFamily="34" charset="0"/>
+                <a:ea typeface="Calibri" pitchFamily="34" charset="-122"/>
+                <a:cs typeface="Calibri" pitchFamily="34" charset="-120"/>
+              </a:rPr>
+              <a:t>One repo = One application</a:t>
             </a:r>
             <a:endParaRPr lang="en-US" sz="1050" dirty="0"/>
           </a:p>
@@ -3408,13 +3408,13 @@
             <a:r>
               <a:rPr lang="en-US" sz="850" dirty="0">
                 <a:solidFill>
-                  <a:srgbClr val="8B949E"/>
-                </a:solidFill>
-                <a:latin typeface="Calibri" pitchFamily="34" charset="0"/>
-                <a:ea typeface="Calibri" pitchFamily="34" charset="-122"/>
-                <a:cs typeface="Calibri" pitchFamily="34" charset="-120"/>
-              </a:rPr>
-              <a:t>不要把多個應用混在同一個 repo</a:t>
+                  <a:srgbClr val="8A8078"/>
+                </a:solidFill>
+                <a:latin typeface="Calibri" pitchFamily="34" charset="0"/>
+                <a:ea typeface="Calibri" pitchFamily="34" charset="-122"/>
+                <a:cs typeface="Calibri" pitchFamily="34" charset="-120"/>
+              </a:rPr>
+              <a:t>Don't mix multiple apps in a single repo</a:t>
             </a:r>
             <a:endParaRPr lang="en-US" sz="850" dirty="0"/>
           </a:p>
@@ -3435,11 +3435,11 @@
             <a:avLst/>
           </a:prstGeom>
           <a:solidFill>
-            <a:srgbClr val="58A6FF"/>
+            <a:srgbClr val="4A7FB5"/>
           </a:solidFill>
           <a:ln w="12700">
             <a:solidFill>
-              <a:srgbClr val="58A6FF"/>
+              <a:srgbClr val="4A7FB5"/>
             </a:solidFill>
             <a:prstDash val="solid"/>
           </a:ln>
@@ -3472,13 +3472,13 @@
             <a:r>
               <a:rPr lang="en-US" sz="1050" b="1" dirty="0">
                 <a:solidFill>
-                  <a:srgbClr val="E6EDF3"/>
-                </a:solidFill>
-                <a:latin typeface="Calibri" pitchFamily="34" charset="0"/>
-                <a:ea typeface="Calibri" pitchFamily="34" charset="-122"/>
-                <a:cs typeface="Calibri" pitchFamily="34" charset="-120"/>
-              </a:rPr>
-              <a:t>多個環境 = 同一份 code</a:t>
+                  <a:srgbClr val="2D2926"/>
+                </a:solidFill>
+                <a:latin typeface="Calibri" pitchFamily="34" charset="0"/>
+                <a:ea typeface="Calibri" pitchFamily="34" charset="-122"/>
+                <a:cs typeface="Calibri" pitchFamily="34" charset="-120"/>
+              </a:rPr>
+              <a:t>Multiple environments = Same codebase</a:t>
             </a:r>
             <a:endParaRPr lang="en-US" sz="1050" dirty="0"/>
           </a:p>
@@ -3499,11 +3499,11 @@
             <a:avLst/>
           </a:prstGeom>
           <a:solidFill>
-            <a:srgbClr val="58A6FF"/>
+            <a:srgbClr val="4A7FB5"/>
           </a:solidFill>
           <a:ln w="12700">
             <a:solidFill>
-              <a:srgbClr val="58A6FF"/>
+              <a:srgbClr val="4A7FB5"/>
             </a:solidFill>
             <a:prstDash val="solid"/>
           </a:ln>
@@ -3536,13 +3536,13 @@
             <a:r>
               <a:rPr lang="en-US" sz="1050" b="1" dirty="0">
                 <a:solidFill>
-                  <a:srgbClr val="E6EDF3"/>
-                </a:solidFill>
-                <a:latin typeface="Calibri" pitchFamily="34" charset="0"/>
-                <a:ea typeface="Calibri" pitchFamily="34" charset="-122"/>
-                <a:cs typeface="Calibri" pitchFamily="34" charset="-120"/>
-              </a:rPr>
-              <a:t>分支策略：main/dev/feature</a:t>
+                  <a:srgbClr val="2D2926"/>
+                </a:solidFill>
+                <a:latin typeface="Calibri" pitchFamily="34" charset="0"/>
+                <a:ea typeface="Calibri" pitchFamily="34" charset="-122"/>
+                <a:cs typeface="Calibri" pitchFamily="34" charset="-120"/>
+              </a:rPr>
+              <a:t>Branch strategy: main/dev/feature</a:t>
             </a:r>
             <a:endParaRPr lang="en-US" sz="1050" dirty="0"/>
           </a:p>
@@ -3575,13 +3575,13 @@
             <a:r>
               <a:rPr lang="en-US" sz="850" dirty="0">
                 <a:solidFill>
-                  <a:srgbClr val="8B949E"/>
-                </a:solidFill>
-                <a:latin typeface="Calibri" pitchFamily="34" charset="0"/>
-                <a:ea typeface="Calibri" pitchFamily="34" charset="-122"/>
-                <a:cs typeface="Calibri" pitchFamily="34" charset="-120"/>
-              </a:rPr>
-              <a:t>main 永遠對應 Prod</a:t>
+                  <a:srgbClr val="8A8078"/>
+                </a:solidFill>
+                <a:latin typeface="Calibri" pitchFamily="34" charset="0"/>
+                <a:ea typeface="Calibri" pitchFamily="34" charset="-122"/>
+                <a:cs typeface="Calibri" pitchFamily="34" charset="-120"/>
+              </a:rPr>
+              <a:t>main always maps to Prod</a:t>
             </a:r>
             <a:endParaRPr lang="en-US" sz="850" dirty="0"/>
           </a:p>
@@ -3602,11 +3602,11 @@
             <a:avLst/>
           </a:prstGeom>
           <a:solidFill>
-            <a:srgbClr val="58A6FF"/>
+            <a:srgbClr val="4A7FB5"/>
           </a:solidFill>
           <a:ln w="12700">
             <a:solidFill>
-              <a:srgbClr val="58A6FF"/>
+              <a:srgbClr val="4A7FB5"/>
             </a:solidFill>
             <a:prstDash val="solid"/>
           </a:ln>
@@ -3639,13 +3639,13 @@
             <a:r>
               <a:rPr lang="en-US" sz="1050" b="1" dirty="0">
                 <a:solidFill>
-                  <a:srgbClr val="E6EDF3"/>
-                </a:solidFill>
-                <a:latin typeface="Calibri" pitchFamily="34" charset="0"/>
-                <a:ea typeface="Calibri" pitchFamily="34" charset="-122"/>
-                <a:cs typeface="Calibri" pitchFamily="34" charset="-120"/>
-              </a:rPr>
-              <a:t>❌ 每個環境不同 branch</a:t>
+                  <a:srgbClr val="2D2926"/>
+                </a:solidFill>
+                <a:latin typeface="Calibri" pitchFamily="34" charset="0"/>
+                <a:ea typeface="Calibri" pitchFamily="34" charset="-122"/>
+                <a:cs typeface="Calibri" pitchFamily="34" charset="-120"/>
+              </a:rPr>
+              <a:t>❌ Different branch per environment</a:t>
             </a:r>
             <a:endParaRPr lang="en-US" sz="1050" dirty="0"/>
           </a:p>
@@ -3668,11 +3668,11 @@
             </a:avLst>
           </a:prstGeom>
           <a:solidFill>
-            <a:srgbClr val="161B22"/>
+            <a:srgbClr val="F5F1EB"/>
           </a:solidFill>
           <a:ln w="15240">
             <a:solidFill>
-              <a:srgbClr val="6E40C9"/>
+              <a:srgbClr val="8B6AB5"/>
             </a:solidFill>
             <a:prstDash val="solid"/>
           </a:ln>
@@ -3693,11 +3693,11 @@
             <a:avLst/>
           </a:prstGeom>
           <a:solidFill>
-            <a:srgbClr val="1C2128"/>
+            <a:srgbClr val="ECE6DD"/>
           </a:solidFill>
           <a:ln w="12700">
             <a:solidFill>
-              <a:srgbClr val="30363D"/>
+              <a:srgbClr val="D6CCBF"/>
             </a:solidFill>
             <a:prstDash val="solid"/>
           </a:ln>
@@ -3766,7 +3766,7 @@
             <a:r>
               <a:rPr lang="en-US" sz="1200" b="1" dirty="0">
                 <a:solidFill>
-                  <a:srgbClr val="6E40C9"/>
+                  <a:srgbClr val="8B6AB5"/>
                 </a:solidFill>
                 <a:latin typeface="Calibri" pitchFamily="34" charset="0"/>
                 <a:ea typeface="Calibri" pitchFamily="34" charset="-122"/>
@@ -3793,11 +3793,11 @@
             <a:avLst/>
           </a:prstGeom>
           <a:solidFill>
-            <a:srgbClr val="6E40C9"/>
+            <a:srgbClr val="8B6AB5"/>
           </a:solidFill>
           <a:ln w="12700">
             <a:solidFill>
-              <a:srgbClr val="6E40C9"/>
+              <a:srgbClr val="8B6AB5"/>
             </a:solidFill>
             <a:prstDash val="solid"/>
           </a:ln>
@@ -3830,13 +3830,13 @@
             <a:r>
               <a:rPr lang="en-US" sz="1050" b="1" dirty="0">
                 <a:solidFill>
-                  <a:srgbClr val="E6EDF3"/>
-                </a:solidFill>
-                <a:latin typeface="Calibri" pitchFamily="34" charset="0"/>
-                <a:ea typeface="Calibri" pitchFamily="34" charset="-122"/>
-                <a:cs typeface="Calibri" pitchFamily="34" charset="-120"/>
-              </a:rPr>
-              <a:t>顯式宣告所有依賴</a:t>
+                  <a:srgbClr val="2D2926"/>
+                </a:solidFill>
+                <a:latin typeface="Calibri" pitchFamily="34" charset="0"/>
+                <a:ea typeface="Calibri" pitchFamily="34" charset="-122"/>
+                <a:cs typeface="Calibri" pitchFamily="34" charset="-120"/>
+              </a:rPr>
+              <a:t>Explicitly declare all dependencies</a:t>
             </a:r>
             <a:endParaRPr lang="en-US" sz="1050" dirty="0"/>
           </a:p>
@@ -3869,7 +3869,7 @@
             <a:r>
               <a:rPr lang="en-US" sz="850" dirty="0">
                 <a:solidFill>
-                  <a:srgbClr val="8B949E"/>
+                  <a:srgbClr val="8A8078"/>
                 </a:solidFill>
                 <a:latin typeface="Calibri" pitchFamily="34" charset="0"/>
                 <a:ea typeface="Calibri" pitchFamily="34" charset="-122"/>
@@ -3896,11 +3896,11 @@
             <a:avLst/>
           </a:prstGeom>
           <a:solidFill>
-            <a:srgbClr val="6E40C9"/>
+            <a:srgbClr val="8B6AB5"/>
           </a:solidFill>
           <a:ln w="12700">
             <a:solidFill>
-              <a:srgbClr val="6E40C9"/>
+              <a:srgbClr val="8B6AB5"/>
             </a:solidFill>
             <a:prstDash val="solid"/>
           </a:ln>
@@ -3933,13 +3933,13 @@
             <a:r>
               <a:rPr lang="en-US" sz="1050" b="1" dirty="0">
                 <a:solidFill>
-                  <a:srgbClr val="E6EDF3"/>
-                </a:solidFill>
-                <a:latin typeface="Calibri" pitchFamily="34" charset="0"/>
-                <a:ea typeface="Calibri" pitchFamily="34" charset="-122"/>
-                <a:cs typeface="Calibri" pitchFamily="34" charset="-120"/>
-              </a:rPr>
-              <a:t>不依賴 System-Level 套件</a:t>
+                  <a:srgbClr val="2D2926"/>
+                </a:solidFill>
+                <a:latin typeface="Calibri" pitchFamily="34" charset="0"/>
+                <a:ea typeface="Calibri" pitchFamily="34" charset="-122"/>
+                <a:cs typeface="Calibri" pitchFamily="34" charset="-120"/>
+              </a:rPr>
+              <a:t>No system-level package assumptions</a:t>
             </a:r>
             <a:endParaRPr lang="en-US" sz="1050" dirty="0"/>
           </a:p>
@@ -3972,13 +3972,13 @@
             <a:r>
               <a:rPr lang="en-US" sz="850" dirty="0">
                 <a:solidFill>
-                  <a:srgbClr val="8B949E"/>
-                </a:solidFill>
-                <a:latin typeface="Calibri" pitchFamily="34" charset="0"/>
-                <a:ea typeface="Calibri" pitchFamily="34" charset="-122"/>
-                <a:cs typeface="Calibri" pitchFamily="34" charset="-120"/>
-              </a:rPr>
-              <a:t>不能假設主機有 curl 或 zip</a:t>
+                  <a:srgbClr val="8A8078"/>
+                </a:solidFill>
+                <a:latin typeface="Calibri" pitchFamily="34" charset="0"/>
+                <a:ea typeface="Calibri" pitchFamily="34" charset="-122"/>
+                <a:cs typeface="Calibri" pitchFamily="34" charset="-120"/>
+              </a:rPr>
+              <a:t>Cannot assume host has curl or zip</a:t>
             </a:r>
             <a:endParaRPr lang="en-US" sz="850" dirty="0"/>
           </a:p>
@@ -3999,11 +3999,11 @@
             <a:avLst/>
           </a:prstGeom>
           <a:solidFill>
-            <a:srgbClr val="6E40C9"/>
+            <a:srgbClr val="8B6AB5"/>
           </a:solidFill>
           <a:ln w="12700">
             <a:solidFill>
-              <a:srgbClr val="6E40C9"/>
+              <a:srgbClr val="8B6AB5"/>
             </a:solidFill>
             <a:prstDash val="solid"/>
           </a:ln>
@@ -4036,13 +4036,13 @@
             <a:r>
               <a:rPr lang="en-US" sz="1050" b="1" dirty="0">
                 <a:solidFill>
-                  <a:srgbClr val="E6EDF3"/>
-                </a:solidFill>
-                <a:latin typeface="Calibri" pitchFamily="34" charset="0"/>
-                <a:ea typeface="Calibri" pitchFamily="34" charset="-122"/>
-                <a:cs typeface="Calibri" pitchFamily="34" charset="-120"/>
-              </a:rPr>
-              <a:t>Container 完美符合此條</a:t>
+                  <a:srgbClr val="2D2926"/>
+                </a:solidFill>
+                <a:latin typeface="Calibri" pitchFamily="34" charset="0"/>
+                <a:ea typeface="Calibri" pitchFamily="34" charset="-122"/>
+                <a:cs typeface="Calibri" pitchFamily="34" charset="-120"/>
+              </a:rPr>
+              <a:t>Containers perfectly satisfy this factor</a:t>
             </a:r>
             <a:endParaRPr lang="en-US" sz="1050" dirty="0"/>
           </a:p>
@@ -4075,13 +4075,13 @@
             <a:r>
               <a:rPr lang="en-US" sz="850" dirty="0">
                 <a:solidFill>
-                  <a:srgbClr val="8B949E"/>
-                </a:solidFill>
-                <a:latin typeface="Calibri" pitchFamily="34" charset="0"/>
-                <a:ea typeface="Calibri" pitchFamily="34" charset="-122"/>
-                <a:cs typeface="Calibri" pitchFamily="34" charset="-120"/>
-              </a:rPr>
-              <a:t>Dockerfile 即依賴清單</a:t>
+                  <a:srgbClr val="8A8078"/>
+                </a:solidFill>
+                <a:latin typeface="Calibri" pitchFamily="34" charset="0"/>
+                <a:ea typeface="Calibri" pitchFamily="34" charset="-122"/>
+                <a:cs typeface="Calibri" pitchFamily="34" charset="-120"/>
+              </a:rPr>
+              <a:t>Dockerfile is your dependency manifest</a:t>
             </a:r>
             <a:endParaRPr lang="en-US" sz="850" dirty="0"/>
           </a:p>
@@ -4102,11 +4102,11 @@
             <a:avLst/>
           </a:prstGeom>
           <a:solidFill>
-            <a:srgbClr val="6E40C9"/>
+            <a:srgbClr val="8B6AB5"/>
           </a:solidFill>
           <a:ln w="12700">
             <a:solidFill>
-              <a:srgbClr val="6E40C9"/>
+              <a:srgbClr val="8B6AB5"/>
             </a:solidFill>
             <a:prstDash val="solid"/>
           </a:ln>
@@ -4139,13 +4139,13 @@
             <a:r>
               <a:rPr lang="en-US" sz="1050" b="1" dirty="0">
                 <a:solidFill>
-                  <a:srgbClr val="E6EDF3"/>
-                </a:solidFill>
-                <a:latin typeface="Calibri" pitchFamily="34" charset="0"/>
-                <a:ea typeface="Calibri" pitchFamily="34" charset="-122"/>
-                <a:cs typeface="Calibri" pitchFamily="34" charset="-120"/>
-              </a:rPr>
-              <a:t>❌ pip install 沒有版本號</a:t>
+                  <a:srgbClr val="2D2926"/>
+                </a:solidFill>
+                <a:latin typeface="Calibri" pitchFamily="34" charset="0"/>
+                <a:ea typeface="Calibri" pitchFamily="34" charset="-122"/>
+                <a:cs typeface="Calibri" pitchFamily="34" charset="-120"/>
+              </a:rPr>
+              <a:t>❌ pip install without version pinning</a:t>
             </a:r>
             <a:endParaRPr lang="en-US" sz="1050" dirty="0"/>
           </a:p>
@@ -4168,11 +4168,11 @@
             </a:avLst>
           </a:prstGeom>
           <a:solidFill>
-            <a:srgbClr val="161B22"/>
+            <a:srgbClr val="F5F1EB"/>
           </a:solidFill>
           <a:ln w="15240">
             <a:solidFill>
-              <a:srgbClr val="D29922"/>
+              <a:srgbClr val="B8892C"/>
             </a:solidFill>
             <a:prstDash val="solid"/>
           </a:ln>
@@ -4193,11 +4193,11 @@
             <a:avLst/>
           </a:prstGeom>
           <a:solidFill>
-            <a:srgbClr val="1C2128"/>
+            <a:srgbClr val="ECE6DD"/>
           </a:solidFill>
           <a:ln w="12700">
             <a:solidFill>
-              <a:srgbClr val="30363D"/>
+              <a:srgbClr val="D6CCBF"/>
             </a:solidFill>
             <a:prstDash val="solid"/>
           </a:ln>
@@ -4266,7 +4266,7 @@
             <a:r>
               <a:rPr lang="en-US" sz="1200" b="1" dirty="0">
                 <a:solidFill>
-                  <a:srgbClr val="D29922"/>
+                  <a:srgbClr val="B8892C"/>
                 </a:solidFill>
                 <a:latin typeface="Calibri" pitchFamily="34" charset="0"/>
                 <a:ea typeface="Calibri" pitchFamily="34" charset="-122"/>
@@ -4293,11 +4293,11 @@
             <a:avLst/>
           </a:prstGeom>
           <a:solidFill>
-            <a:srgbClr val="D29922"/>
+            <a:srgbClr val="B8892C"/>
           </a:solidFill>
           <a:ln w="12700">
             <a:solidFill>
-              <a:srgbClr val="D29922"/>
+              <a:srgbClr val="B8892C"/>
             </a:solidFill>
             <a:prstDash val="solid"/>
           </a:ln>
@@ -4330,13 +4330,13 @@
             <a:r>
               <a:rPr lang="en-US" sz="1050" b="1" dirty="0">
                 <a:solidFill>
-                  <a:srgbClr val="E6EDF3"/>
-                </a:solidFill>
-                <a:latin typeface="Calibri" pitchFamily="34" charset="0"/>
-                <a:ea typeface="Calibri" pitchFamily="34" charset="-122"/>
-                <a:cs typeface="Calibri" pitchFamily="34" charset="-120"/>
-              </a:rPr>
-              <a:t>設定放在環境變數</a:t>
+                  <a:srgbClr val="2D2926"/>
+                </a:solidFill>
+                <a:latin typeface="Calibri" pitchFamily="34" charset="0"/>
+                <a:ea typeface="Calibri" pitchFamily="34" charset="-122"/>
+                <a:cs typeface="Calibri" pitchFamily="34" charset="-120"/>
+              </a:rPr>
+              <a:t>Store config in environment variables</a:t>
             </a:r>
             <a:endParaRPr lang="en-US" sz="1050" dirty="0"/>
           </a:p>
@@ -4369,7 +4369,7 @@
             <a:r>
               <a:rPr lang="en-US" sz="850" dirty="0">
                 <a:solidFill>
-                  <a:srgbClr val="8B949E"/>
+                  <a:srgbClr val="8A8078"/>
                 </a:solidFill>
                 <a:latin typeface="Calibri" pitchFamily="34" charset="0"/>
                 <a:ea typeface="Calibri" pitchFamily="34" charset="-122"/>
@@ -4396,11 +4396,11 @@
             <a:avLst/>
           </a:prstGeom>
           <a:solidFill>
-            <a:srgbClr val="D29922"/>
+            <a:srgbClr val="B8892C"/>
           </a:solidFill>
           <a:ln w="12700">
             <a:solidFill>
-              <a:srgbClr val="D29922"/>
+              <a:srgbClr val="B8892C"/>
             </a:solidFill>
             <a:prstDash val="solid"/>
           </a:ln>
@@ -4433,7 +4433,7 @@
             <a:r>
               <a:rPr lang="en-US" sz="1050" b="1" dirty="0">
                 <a:solidFill>
-                  <a:srgbClr val="E6EDF3"/>
+                  <a:srgbClr val="2D2926"/>
                 </a:solidFill>
                 <a:latin typeface="Calibri" pitchFamily="34" charset="0"/>
                 <a:ea typeface="Calibri" pitchFamily="34" charset="-122"/>
@@ -4472,7 +4472,7 @@
             <a:r>
               <a:rPr lang="en-US" sz="850" dirty="0">
                 <a:solidFill>
-                  <a:srgbClr val="8B949E"/>
+                  <a:srgbClr val="8A8078"/>
                 </a:solidFill>
                 <a:latin typeface="Calibri" pitchFamily="34" charset="0"/>
                 <a:ea typeface="Calibri" pitchFamily="34" charset="-122"/>
@@ -4499,11 +4499,11 @@
             <a:avLst/>
           </a:prstGeom>
           <a:solidFill>
-            <a:srgbClr val="D29922"/>
+            <a:srgbClr val="B8892C"/>
           </a:solidFill>
           <a:ln w="12700">
             <a:solidFill>
-              <a:srgbClr val="D29922"/>
+              <a:srgbClr val="B8892C"/>
             </a:solidFill>
             <a:prstDash val="solid"/>
           </a:ln>
@@ -4536,13 +4536,13 @@
             <a:r>
               <a:rPr lang="en-US" sz="1050" b="1" dirty="0">
                 <a:solidFill>
-                  <a:srgbClr val="E6EDF3"/>
-                </a:solidFill>
-                <a:latin typeface="Calibri" pitchFamily="34" charset="0"/>
-                <a:ea typeface="Calibri" pitchFamily="34" charset="-122"/>
-                <a:cs typeface="Calibri" pitchFamily="34" charset="-120"/>
-              </a:rPr>
-              <a:t>❌ 設定寫死在程式碼</a:t>
+                  <a:srgbClr val="2D2926"/>
+                </a:solidFill>
+                <a:latin typeface="Calibri" pitchFamily="34" charset="0"/>
+                <a:ea typeface="Calibri" pitchFamily="34" charset="-122"/>
+                <a:cs typeface="Calibri" pitchFamily="34" charset="-120"/>
+              </a:rPr>
+              <a:t>❌ Hardcoded config in source code</a:t>
             </a:r>
             <a:endParaRPr lang="en-US" sz="1050" dirty="0"/>
           </a:p>
@@ -4575,7 +4575,7 @@
             <a:r>
               <a:rPr lang="en-US" sz="850" dirty="0">
                 <a:solidFill>
-                  <a:srgbClr val="8B949E"/>
+                  <a:srgbClr val="8A8078"/>
                 </a:solidFill>
                 <a:latin typeface="Calibri" pitchFamily="34" charset="0"/>
                 <a:ea typeface="Calibri" pitchFamily="34" charset="-122"/>
@@ -4602,11 +4602,11 @@
             <a:avLst/>
           </a:prstGeom>
           <a:solidFill>
-            <a:srgbClr val="D29922"/>
+            <a:srgbClr val="B8892C"/>
           </a:solidFill>
           <a:ln w="12700">
             <a:solidFill>
-              <a:srgbClr val="D29922"/>
+              <a:srgbClr val="B8892C"/>
             </a:solidFill>
             <a:prstDash val="solid"/>
           </a:ln>
@@ -4639,13 +4639,13 @@
             <a:r>
               <a:rPr lang="en-US" sz="1050" b="1" dirty="0">
                 <a:solidFill>
-                  <a:srgbClr val="E6EDF3"/>
-                </a:solidFill>
-                <a:latin typeface="Calibri" pitchFamily="34" charset="0"/>
-                <a:ea typeface="Calibri" pitchFamily="34" charset="-122"/>
-                <a:cs typeface="Calibri" pitchFamily="34" charset="-120"/>
-              </a:rPr>
-              <a:t>Config 不進版本控管</a:t>
+                  <a:srgbClr val="2D2926"/>
+                </a:solidFill>
+                <a:latin typeface="Calibri" pitchFamily="34" charset="0"/>
+                <a:ea typeface="Calibri" pitchFamily="34" charset="-122"/>
+                <a:cs typeface="Calibri" pitchFamily="34" charset="-120"/>
+              </a:rPr>
+              <a:t>Config must not be committed to version control</a:t>
             </a:r>
             <a:endParaRPr lang="en-US" sz="1050" dirty="0"/>
           </a:p>
@@ -4668,11 +4668,11 @@
             </a:avLst>
           </a:prstGeom>
           <a:solidFill>
-            <a:srgbClr val="0A1929"/>
+            <a:srgbClr val="EAF0F7"/>
           </a:solidFill>
           <a:ln w="9525">
             <a:solidFill>
-              <a:srgbClr val="58A6FF"/>
+              <a:srgbClr val="4A7FB5"/>
             </a:solidFill>
             <a:prstDash val="solid"/>
           </a:ln>
@@ -4705,13 +4705,13 @@
             <a:r>
               <a:rPr lang="en-US" sz="1000" i="1" dirty="0">
                 <a:solidFill>
-                  <a:srgbClr val="8B949E"/>
-                </a:solidFill>
-                <a:latin typeface="Calibri" pitchFamily="34" charset="0"/>
-                <a:ea typeface="Calibri" pitchFamily="34" charset="-122"/>
-                <a:cs typeface="Calibri" pitchFamily="34" charset="-120"/>
-              </a:rPr>
-              <a:t>💡  Config 放環境變數是 12-Factor 最重要的一條 — 讓同一個 Image 在 dev/staging/prod 都能跑</a:t>
+                  <a:srgbClr val="8A8078"/>
+                </a:solidFill>
+                <a:latin typeface="Calibri" pitchFamily="34" charset="0"/>
+                <a:ea typeface="Calibri" pitchFamily="34" charset="-122"/>
+                <a:cs typeface="Calibri" pitchFamily="34" charset="-120"/>
+              </a:rPr>
+              <a:t>💡  Storing config in env vars is the most impactful 12-Factor rule — the same image runs across dev/staging/prod</a:t>
             </a:r>
             <a:endParaRPr lang="en-US" sz="1000" dirty="0"/>
           </a:p>
@@ -4731,7 +4731,7 @@
     <p:bg>
       <p:bgPr>
         <a:solidFill>
-          <a:srgbClr val="0D1117"/>
+          <a:srgbClr val="FFFDF8"/>
         </a:solidFill>
       </p:bgPr>
     </p:bg>
@@ -4764,11 +4764,11 @@
             <a:avLst/>
           </a:prstGeom>
           <a:solidFill>
-            <a:srgbClr val="161B22"/>
+            <a:srgbClr val="F5F1EB"/>
           </a:solidFill>
           <a:ln w="6350">
             <a:solidFill>
-              <a:srgbClr val="30363D"/>
+              <a:srgbClr val="D6CCBF"/>
             </a:solidFill>
             <a:prstDash val="solid"/>
           </a:ln>
@@ -4789,11 +4789,11 @@
             <a:avLst/>
           </a:prstGeom>
           <a:solidFill>
-            <a:srgbClr val="6E40C9"/>
+            <a:srgbClr val="8B6AB5"/>
           </a:solidFill>
           <a:ln w="12700">
             <a:solidFill>
-              <a:srgbClr val="6E40C9"/>
+              <a:srgbClr val="8B6AB5"/>
             </a:solidFill>
             <a:prstDash val="solid"/>
           </a:ln>
@@ -4826,13 +4826,13 @@
             <a:r>
               <a:rPr lang="en-US" sz="1600" b="1" dirty="0">
                 <a:solidFill>
-                  <a:srgbClr val="E6EDF3"/>
-                </a:solidFill>
-                <a:latin typeface="Calibri" pitchFamily="34" charset="0"/>
-                <a:ea typeface="Calibri" pitchFamily="34" charset="-122"/>
-                <a:cs typeface="Calibri" pitchFamily="34" charset="-120"/>
-              </a:rPr>
-              <a:t>Factor 4-6：Backing Services、Build/Release/Run、Processes</a:t>
+                  <a:srgbClr val="2D2926"/>
+                </a:solidFill>
+                <a:latin typeface="Calibri" pitchFamily="34" charset="0"/>
+                <a:ea typeface="Calibri" pitchFamily="34" charset="-122"/>
+                <a:cs typeface="Calibri" pitchFamily="34" charset="-120"/>
+              </a:rPr>
+              <a:t>Factor 4-6: Backing Services, Build/Release/Run, Processes</a:t>
             </a:r>
             <a:endParaRPr lang="en-US" sz="1600" dirty="0"/>
           </a:p>
@@ -4865,13 +4865,13 @@
             <a:r>
               <a:rPr lang="en-US" sz="850" dirty="0">
                 <a:solidFill>
-                  <a:srgbClr val="8B949E"/>
-                </a:solidFill>
-                <a:latin typeface="Calibri" pitchFamily="34" charset="0"/>
-                <a:ea typeface="Calibri" pitchFamily="34" charset="-122"/>
-                <a:cs typeface="Calibri" pitchFamily="34" charset="-120"/>
-              </a:rPr>
-              <a:t>PART 4  ·  29 / 50</a:t>
+                  <a:srgbClr val="8A8078"/>
+                </a:solidFill>
+                <a:latin typeface="Calibri" pitchFamily="34" charset="0"/>
+                <a:ea typeface="Calibri" pitchFamily="34" charset="-122"/>
+                <a:cs typeface="Calibri" pitchFamily="34" charset="-120"/>
+              </a:rPr>
+              <a:t>PART 4</a:t>
             </a:r>
             <a:endParaRPr lang="en-US" sz="850" dirty="0"/>
           </a:p>
@@ -4894,11 +4894,11 @@
             </a:avLst>
           </a:prstGeom>
           <a:solidFill>
-            <a:srgbClr val="161B22"/>
+            <a:srgbClr val="F5F1EB"/>
           </a:solidFill>
           <a:ln w="15240">
             <a:solidFill>
-              <a:srgbClr val="E36209"/>
+              <a:srgbClr val="C4804A"/>
             </a:solidFill>
             <a:prstDash val="solid"/>
           </a:ln>
@@ -4919,11 +4919,11 @@
             <a:avLst/>
           </a:prstGeom>
           <a:solidFill>
-            <a:srgbClr val="1C2128"/>
+            <a:srgbClr val="ECE6DD"/>
           </a:solidFill>
           <a:ln w="12700">
             <a:solidFill>
-              <a:srgbClr val="30363D"/>
+              <a:srgbClr val="D6CCBF"/>
             </a:solidFill>
             <a:prstDash val="solid"/>
           </a:ln>
@@ -4992,7 +4992,7 @@
             <a:r>
               <a:rPr lang="en-US" sz="1200" b="1" dirty="0">
                 <a:solidFill>
-                  <a:srgbClr val="E36209"/>
+                  <a:srgbClr val="C4804A"/>
                 </a:solidFill>
                 <a:latin typeface="Calibri" pitchFamily="34" charset="0"/>
                 <a:ea typeface="Calibri" pitchFamily="34" charset="-122"/>
@@ -5019,11 +5019,11 @@
             <a:avLst/>
           </a:prstGeom>
           <a:solidFill>
-            <a:srgbClr val="E36209"/>
+            <a:srgbClr val="C4804A"/>
           </a:solidFill>
           <a:ln w="12700">
             <a:solidFill>
-              <a:srgbClr val="E36209"/>
+              <a:srgbClr val="C4804A"/>
             </a:solidFill>
             <a:prstDash val="solid"/>
           </a:ln>
@@ -5056,13 +5056,13 @@
             <a:r>
               <a:rPr lang="en-US" sz="1050" b="1" dirty="0">
                 <a:solidFill>
-                  <a:srgbClr val="E6EDF3"/>
-                </a:solidFill>
-                <a:latin typeface="Calibri" pitchFamily="34" charset="0"/>
-                <a:ea typeface="Calibri" pitchFamily="34" charset="-122"/>
-                <a:cs typeface="Calibri" pitchFamily="34" charset="-120"/>
-              </a:rPr>
-              <a:t>資料庫/MQ/Cache = 附加服務</a:t>
+                  <a:srgbClr val="2D2926"/>
+                </a:solidFill>
+                <a:latin typeface="Calibri" pitchFamily="34" charset="0"/>
+                <a:ea typeface="Calibri" pitchFamily="34" charset="-122"/>
+                <a:cs typeface="Calibri" pitchFamily="34" charset="-120"/>
+              </a:rPr>
+              <a:t>DB/MQ/Cache = Attached resources</a:t>
             </a:r>
             <a:endParaRPr lang="en-US" sz="1050" dirty="0"/>
           </a:p>
@@ -5083,11 +5083,11 @@
             <a:avLst/>
           </a:prstGeom>
           <a:solidFill>
-            <a:srgbClr val="E36209"/>
+            <a:srgbClr val="C4804A"/>
           </a:solidFill>
           <a:ln w="12700">
             <a:solidFill>
-              <a:srgbClr val="E36209"/>
+              <a:srgbClr val="C4804A"/>
             </a:solidFill>
             <a:prstDash val="solid"/>
           </a:ln>
@@ -5120,13 +5120,13 @@
             <a:r>
               <a:rPr lang="en-US" sz="1050" b="1" dirty="0">
                 <a:solidFill>
-                  <a:srgbClr val="E6EDF3"/>
-                </a:solidFill>
-                <a:latin typeface="Calibri" pitchFamily="34" charset="0"/>
-                <a:ea typeface="Calibri" pitchFamily="34" charset="-122"/>
-                <a:cs typeface="Calibri" pitchFamily="34" charset="-120"/>
-              </a:rPr>
-              <a:t>本地 = 第三方服務，同等對待</a:t>
+                  <a:srgbClr val="2D2926"/>
+                </a:solidFill>
+                <a:latin typeface="Calibri" pitchFamily="34" charset="0"/>
+                <a:ea typeface="Calibri" pitchFamily="34" charset="-122"/>
+                <a:cs typeface="Calibri" pitchFamily="34" charset="-120"/>
+              </a:rPr>
+              <a:t>Local and third-party services treated equally</a:t>
             </a:r>
             <a:endParaRPr lang="en-US" sz="1050" dirty="0"/>
           </a:p>
@@ -5159,13 +5159,13 @@
             <a:r>
               <a:rPr lang="en-US" sz="850" dirty="0">
                 <a:solidFill>
-                  <a:srgbClr val="8B949E"/>
-                </a:solidFill>
-                <a:latin typeface="Calibri" pitchFamily="34" charset="0"/>
-                <a:ea typeface="Calibri" pitchFamily="34" charset="-122"/>
-                <a:cs typeface="Calibri" pitchFamily="34" charset="-120"/>
-              </a:rPr>
-              <a:t>換 DB 只需換 URL</a:t>
+                  <a:srgbClr val="8A8078"/>
+                </a:solidFill>
+                <a:latin typeface="Calibri" pitchFamily="34" charset="0"/>
+                <a:ea typeface="Calibri" pitchFamily="34" charset="-122"/>
+                <a:cs typeface="Calibri" pitchFamily="34" charset="-120"/>
+              </a:rPr>
+              <a:t>Switching DB only requires changing the URL</a:t>
             </a:r>
             <a:endParaRPr lang="en-US" sz="850" dirty="0"/>
           </a:p>
@@ -5186,11 +5186,11 @@
             <a:avLst/>
           </a:prstGeom>
           <a:solidFill>
-            <a:srgbClr val="E36209"/>
+            <a:srgbClr val="C4804A"/>
           </a:solidFill>
           <a:ln w="12700">
             <a:solidFill>
-              <a:srgbClr val="E36209"/>
+              <a:srgbClr val="C4804A"/>
             </a:solidFill>
             <a:prstDash val="solid"/>
           </a:ln>
@@ -5223,13 +5223,13 @@
             <a:r>
               <a:rPr lang="en-US" sz="1050" b="1" dirty="0">
                 <a:solidFill>
-                  <a:srgbClr val="E6EDF3"/>
-                </a:solidFill>
-                <a:latin typeface="Calibri" pitchFamily="34" charset="0"/>
-                <a:ea typeface="Calibri" pitchFamily="34" charset="-122"/>
-                <a:cs typeface="Calibri" pitchFamily="34" charset="-120"/>
-              </a:rPr>
-              <a:t>透過 URL/credential 存取</a:t>
+                  <a:srgbClr val="2D2926"/>
+                </a:solidFill>
+                <a:latin typeface="Calibri" pitchFamily="34" charset="0"/>
+                <a:ea typeface="Calibri" pitchFamily="34" charset="-122"/>
+                <a:cs typeface="Calibri" pitchFamily="34" charset="-120"/>
+              </a:rPr>
+              <a:t>Access via URL/credential</a:t>
             </a:r>
             <a:endParaRPr lang="en-US" sz="1050" dirty="0"/>
           </a:p>
@@ -5250,11 +5250,11 @@
             <a:avLst/>
           </a:prstGeom>
           <a:solidFill>
-            <a:srgbClr val="E36209"/>
+            <a:srgbClr val="C4804A"/>
           </a:solidFill>
           <a:ln w="12700">
             <a:solidFill>
-              <a:srgbClr val="E36209"/>
+              <a:srgbClr val="C4804A"/>
             </a:solidFill>
             <a:prstDash val="solid"/>
           </a:ln>
@@ -5287,13 +5287,13 @@
             <a:r>
               <a:rPr lang="en-US" sz="1050" b="1" dirty="0">
                 <a:solidFill>
-                  <a:srgbClr val="E6EDF3"/>
-                </a:solidFill>
-                <a:latin typeface="Calibri" pitchFamily="34" charset="0"/>
-                <a:ea typeface="Calibri" pitchFamily="34" charset="-122"/>
-                <a:cs typeface="Calibri" pitchFamily="34" charset="-120"/>
-              </a:rPr>
-              <a:t>❌ 直接 localhost:5432</a:t>
+                  <a:srgbClr val="2D2926"/>
+                </a:solidFill>
+                <a:latin typeface="Calibri" pitchFamily="34" charset="0"/>
+                <a:ea typeface="Calibri" pitchFamily="34" charset="-122"/>
+                <a:cs typeface="Calibri" pitchFamily="34" charset="-120"/>
+              </a:rPr>
+              <a:t>❌ Hardcoded localhost:5432</a:t>
             </a:r>
             <a:endParaRPr lang="en-US" sz="1050" dirty="0"/>
           </a:p>
@@ -5314,11 +5314,11 @@
             <a:avLst/>
           </a:prstGeom>
           <a:solidFill>
-            <a:srgbClr val="E36209"/>
+            <a:srgbClr val="C4804A"/>
           </a:solidFill>
           <a:ln w="12700">
             <a:solidFill>
-              <a:srgbClr val="E36209"/>
+              <a:srgbClr val="C4804A"/>
             </a:solidFill>
             <a:prstDash val="solid"/>
           </a:ln>
@@ -5351,7 +5351,7 @@
             <a:r>
               <a:rPr lang="en-US" sz="1050" b="1" dirty="0">
                 <a:solidFill>
-                  <a:srgbClr val="E6EDF3"/>
+                  <a:srgbClr val="2D2926"/>
                 </a:solidFill>
                 <a:latin typeface="Calibri" pitchFamily="34" charset="0"/>
                 <a:ea typeface="Calibri" pitchFamily="34" charset="-122"/>
@@ -5380,11 +5380,11 @@
             </a:avLst>
           </a:prstGeom>
           <a:solidFill>
-            <a:srgbClr val="161B22"/>
+            <a:srgbClr val="F5F1EB"/>
           </a:solidFill>
           <a:ln w="15240">
             <a:solidFill>
-              <a:srgbClr val="58A6FF"/>
+              <a:srgbClr val="4A7FB5"/>
             </a:solidFill>
             <a:prstDash val="solid"/>
           </a:ln>
@@ -5405,11 +5405,11 @@
             <a:avLst/>
           </a:prstGeom>
           <a:solidFill>
-            <a:srgbClr val="1C2128"/>
+            <a:srgbClr val="ECE6DD"/>
           </a:solidFill>
           <a:ln w="12700">
             <a:solidFill>
-              <a:srgbClr val="30363D"/>
+              <a:srgbClr val="D6CCBF"/>
             </a:solidFill>
             <a:prstDash val="solid"/>
           </a:ln>
@@ -5478,7 +5478,7 @@
             <a:r>
               <a:rPr lang="en-US" sz="1200" b="1" dirty="0">
                 <a:solidFill>
-                  <a:srgbClr val="58A6FF"/>
+                  <a:srgbClr val="4A7FB5"/>
                 </a:solidFill>
                 <a:latin typeface="Calibri" pitchFamily="34" charset="0"/>
                 <a:ea typeface="Calibri" pitchFamily="34" charset="-122"/>
@@ -5505,11 +5505,11 @@
             <a:avLst/>
           </a:prstGeom>
           <a:solidFill>
-            <a:srgbClr val="58A6FF"/>
+            <a:srgbClr val="4A7FB5"/>
           </a:solidFill>
           <a:ln w="12700">
             <a:solidFill>
-              <a:srgbClr val="58A6FF"/>
+              <a:srgbClr val="4A7FB5"/>
             </a:solidFill>
             <a:prstDash val="solid"/>
           </a:ln>
@@ -5542,13 +5542,13 @@
             <a:r>
               <a:rPr lang="en-US" sz="1050" b="1" dirty="0">
                 <a:solidFill>
-                  <a:srgbClr val="E6EDF3"/>
-                </a:solidFill>
-                <a:latin typeface="Calibri" pitchFamily="34" charset="0"/>
-                <a:ea typeface="Calibri" pitchFamily="34" charset="-122"/>
-                <a:cs typeface="Calibri" pitchFamily="34" charset="-120"/>
-              </a:rPr>
-              <a:t>Build：原始碼 → 可執行包</a:t>
+                  <a:srgbClr val="2D2926"/>
+                </a:solidFill>
+                <a:latin typeface="Calibri" pitchFamily="34" charset="0"/>
+                <a:ea typeface="Calibri" pitchFamily="34" charset="-122"/>
+                <a:cs typeface="Calibri" pitchFamily="34" charset="-120"/>
+              </a:rPr>
+              <a:t>Build: Source code → Executable artifact</a:t>
             </a:r>
             <a:endParaRPr lang="en-US" sz="1050" dirty="0"/>
           </a:p>
@@ -5569,11 +5569,11 @@
             <a:avLst/>
           </a:prstGeom>
           <a:solidFill>
-            <a:srgbClr val="58A6FF"/>
+            <a:srgbClr val="4A7FB5"/>
           </a:solidFill>
           <a:ln w="12700">
             <a:solidFill>
-              <a:srgbClr val="58A6FF"/>
+              <a:srgbClr val="4A7FB5"/>
             </a:solidFill>
             <a:prstDash val="solid"/>
           </a:ln>
@@ -5606,13 +5606,13 @@
             <a:r>
               <a:rPr lang="en-US" sz="1050" b="1" dirty="0">
                 <a:solidFill>
-                  <a:srgbClr val="E6EDF3"/>
-                </a:solidFill>
-                <a:latin typeface="Calibri" pitchFamily="34" charset="0"/>
-                <a:ea typeface="Calibri" pitchFamily="34" charset="-122"/>
-                <a:cs typeface="Calibri" pitchFamily="34" charset="-120"/>
-              </a:rPr>
-              <a:t>Release：Build + Config</a:t>
+                  <a:srgbClr val="2D2926"/>
+                </a:solidFill>
+                <a:latin typeface="Calibri" pitchFamily="34" charset="0"/>
+                <a:ea typeface="Calibri" pitchFamily="34" charset="-122"/>
+                <a:cs typeface="Calibri" pitchFamily="34" charset="-120"/>
+              </a:rPr>
+              <a:t>Release: Build + Config</a:t>
             </a:r>
             <a:endParaRPr lang="en-US" sz="1050" dirty="0"/>
           </a:p>
@@ -5645,13 +5645,13 @@
             <a:r>
               <a:rPr lang="en-US" sz="850" dirty="0">
                 <a:solidFill>
-                  <a:srgbClr val="8B949E"/>
-                </a:solidFill>
-                <a:latin typeface="Calibri" pitchFamily="34" charset="0"/>
-                <a:ea typeface="Calibri" pitchFamily="34" charset="-122"/>
-                <a:cs typeface="Calibri" pitchFamily="34" charset="-120"/>
-              </a:rPr>
-              <a:t>打上版本號，不可變</a:t>
+                  <a:srgbClr val="8A8078"/>
+                </a:solidFill>
+                <a:latin typeface="Calibri" pitchFamily="34" charset="0"/>
+                <a:ea typeface="Calibri" pitchFamily="34" charset="-122"/>
+                <a:cs typeface="Calibri" pitchFamily="34" charset="-120"/>
+              </a:rPr>
+              <a:t>Tagged with version, immutable</a:t>
             </a:r>
             <a:endParaRPr lang="en-US" sz="850" dirty="0"/>
           </a:p>
@@ -5672,11 +5672,11 @@
             <a:avLst/>
           </a:prstGeom>
           <a:solidFill>
-            <a:srgbClr val="58A6FF"/>
+            <a:srgbClr val="4A7FB5"/>
           </a:solidFill>
           <a:ln w="12700">
             <a:solidFill>
-              <a:srgbClr val="58A6FF"/>
+              <a:srgbClr val="4A7FB5"/>
             </a:solidFill>
             <a:prstDash val="solid"/>
           </a:ln>
@@ -5709,13 +5709,13 @@
             <a:r>
               <a:rPr lang="en-US" sz="1050" b="1" dirty="0">
                 <a:solidFill>
-                  <a:srgbClr val="E6EDF3"/>
-                </a:solidFill>
-                <a:latin typeface="Calibri" pitchFamily="34" charset="0"/>
-                <a:ea typeface="Calibri" pitchFamily="34" charset="-122"/>
-                <a:cs typeface="Calibri" pitchFamily="34" charset="-120"/>
-              </a:rPr>
-              <a:t>Run：執行特定 Release</a:t>
+                  <a:srgbClr val="2D2926"/>
+                </a:solidFill>
+                <a:latin typeface="Calibri" pitchFamily="34" charset="0"/>
+                <a:ea typeface="Calibri" pitchFamily="34" charset="-122"/>
+                <a:cs typeface="Calibri" pitchFamily="34" charset="-120"/>
+              </a:rPr>
+              <a:t>Run: Execute a specific Release</a:t>
             </a:r>
             <a:endParaRPr lang="en-US" sz="1050" dirty="0"/>
           </a:p>
@@ -5736,11 +5736,11 @@
             <a:avLst/>
           </a:prstGeom>
           <a:solidFill>
-            <a:srgbClr val="58A6FF"/>
+            <a:srgbClr val="4A7FB5"/>
           </a:solidFill>
           <a:ln w="12700">
             <a:solidFill>
-              <a:srgbClr val="58A6FF"/>
+              <a:srgbClr val="4A7FB5"/>
             </a:solidFill>
             <a:prstDash val="solid"/>
           </a:ln>
@@ -5773,13 +5773,13 @@
             <a:r>
               <a:rPr lang="en-US" sz="1050" b="1" dirty="0">
                 <a:solidFill>
-                  <a:srgbClr val="E6EDF3"/>
-                </a:solidFill>
-                <a:latin typeface="Calibri" pitchFamily="34" charset="0"/>
-                <a:ea typeface="Calibri" pitchFamily="34" charset="-122"/>
-                <a:cs typeface="Calibri" pitchFamily="34" charset="-120"/>
-              </a:rPr>
-              <a:t>三個階段嚴格分離</a:t>
+                  <a:srgbClr val="2D2926"/>
+                </a:solidFill>
+                <a:latin typeface="Calibri" pitchFamily="34" charset="0"/>
+                <a:ea typeface="Calibri" pitchFamily="34" charset="-122"/>
+                <a:cs typeface="Calibri" pitchFamily="34" charset="-120"/>
+              </a:rPr>
+              <a:t>Three stages strictly separated</a:t>
             </a:r>
             <a:endParaRPr lang="en-US" sz="1050" dirty="0"/>
           </a:p>
@@ -5800,11 +5800,11 @@
             <a:avLst/>
           </a:prstGeom>
           <a:solidFill>
-            <a:srgbClr val="58A6FF"/>
+            <a:srgbClr val="4A7FB5"/>
           </a:solidFill>
           <a:ln w="12700">
             <a:solidFill>
-              <a:srgbClr val="58A6FF"/>
+              <a:srgbClr val="4A7FB5"/>
             </a:solidFill>
             <a:prstDash val="solid"/>
           </a:ln>
@@ -5837,13 +5837,13 @@
             <a:r>
               <a:rPr lang="en-US" sz="1050" b="1" dirty="0">
                 <a:solidFill>
-                  <a:srgbClr val="E6EDF3"/>
-                </a:solidFill>
-                <a:latin typeface="Calibri" pitchFamily="34" charset="0"/>
-                <a:ea typeface="Calibri" pitchFamily="34" charset="-122"/>
-                <a:cs typeface="Calibri" pitchFamily="34" charset="-120"/>
-              </a:rPr>
-              <a:t>Release 不可被修改</a:t>
+                  <a:srgbClr val="2D2926"/>
+                </a:solidFill>
+                <a:latin typeface="Calibri" pitchFamily="34" charset="0"/>
+                <a:ea typeface="Calibri" pitchFamily="34" charset="-122"/>
+                <a:cs typeface="Calibri" pitchFamily="34" charset="-120"/>
+              </a:rPr>
+              <a:t>Releases are immutable</a:t>
             </a:r>
             <a:endParaRPr lang="en-US" sz="1050" dirty="0"/>
           </a:p>
@@ -5866,11 +5866,11 @@
             </a:avLst>
           </a:prstGeom>
           <a:solidFill>
-            <a:srgbClr val="161B22"/>
+            <a:srgbClr val="F5F1EB"/>
           </a:solidFill>
           <a:ln w="15240">
             <a:solidFill>
-              <a:srgbClr val="3FB950"/>
+              <a:srgbClr val="4A9968"/>
             </a:solidFill>
             <a:prstDash val="solid"/>
           </a:ln>
@@ -5891,11 +5891,11 @@
             <a:avLst/>
           </a:prstGeom>
           <a:solidFill>
-            <a:srgbClr val="1C2128"/>
+            <a:srgbClr val="ECE6DD"/>
           </a:solidFill>
           <a:ln w="12700">
             <a:solidFill>
-              <a:srgbClr val="30363D"/>
+              <a:srgbClr val="D6CCBF"/>
             </a:solidFill>
             <a:prstDash val="solid"/>
           </a:ln>
@@ -5964,7 +5964,7 @@
             <a:r>
               <a:rPr lang="en-US" sz="1200" b="1" dirty="0">
                 <a:solidFill>
-                  <a:srgbClr val="3FB950"/>
+                  <a:srgbClr val="4A9968"/>
                 </a:solidFill>
                 <a:latin typeface="Calibri" pitchFamily="34" charset="0"/>
                 <a:ea typeface="Calibri" pitchFamily="34" charset="-122"/>
@@ -5991,11 +5991,11 @@
             <a:avLst/>
           </a:prstGeom>
           <a:solidFill>
-            <a:srgbClr val="3FB950"/>
+            <a:srgbClr val="4A9968"/>
           </a:solidFill>
           <a:ln w="12700">
             <a:solidFill>
-              <a:srgbClr val="3FB950"/>
+              <a:srgbClr val="4A9968"/>
             </a:solidFill>
             <a:prstDash val="solid"/>
           </a:ln>
@@ -6028,13 +6028,13 @@
             <a:r>
               <a:rPr lang="en-US" sz="1050" b="1" dirty="0">
                 <a:solidFill>
-                  <a:srgbClr val="E6EDF3"/>
-                </a:solidFill>
-                <a:latin typeface="Calibri" pitchFamily="34" charset="0"/>
-                <a:ea typeface="Calibri" pitchFamily="34" charset="-122"/>
-                <a:cs typeface="Calibri" pitchFamily="34" charset="-120"/>
-              </a:rPr>
-              <a:t>Process 必須是 Stateless</a:t>
+                  <a:srgbClr val="2D2926"/>
+                </a:solidFill>
+                <a:latin typeface="Calibri" pitchFamily="34" charset="0"/>
+                <a:ea typeface="Calibri" pitchFamily="34" charset="-122"/>
+                <a:cs typeface="Calibri" pitchFamily="34" charset="-120"/>
+              </a:rPr>
+              <a:t>Processes must be stateless</a:t>
             </a:r>
             <a:endParaRPr lang="en-US" sz="1050" dirty="0"/>
           </a:p>
@@ -6055,11 +6055,11 @@
             <a:avLst/>
           </a:prstGeom>
           <a:solidFill>
-            <a:srgbClr val="3FB950"/>
+            <a:srgbClr val="4A9968"/>
           </a:solidFill>
           <a:ln w="12700">
             <a:solidFill>
-              <a:srgbClr val="3FB950"/>
+              <a:srgbClr val="4A9968"/>
             </a:solidFill>
             <a:prstDash val="solid"/>
           </a:ln>
@@ -6092,13 +6092,13 @@
             <a:r>
               <a:rPr lang="en-US" sz="1050" b="1" dirty="0">
                 <a:solidFill>
-                  <a:srgbClr val="E6EDF3"/>
-                </a:solidFill>
-                <a:latin typeface="Calibri" pitchFamily="34" charset="0"/>
-                <a:ea typeface="Calibri" pitchFamily="34" charset="-122"/>
-                <a:cs typeface="Calibri" pitchFamily="34" charset="-120"/>
-              </a:rPr>
-              <a:t>無狀態 = 可隨時增減</a:t>
+                  <a:srgbClr val="2D2926"/>
+                </a:solidFill>
+                <a:latin typeface="Calibri" pitchFamily="34" charset="0"/>
+                <a:ea typeface="Calibri" pitchFamily="34" charset="-122"/>
+                <a:cs typeface="Calibri" pitchFamily="34" charset="-120"/>
+              </a:rPr>
+              <a:t>Stateless = Can scale freely</a:t>
             </a:r>
             <a:endParaRPr lang="en-US" sz="1050" dirty="0"/>
           </a:p>
@@ -6131,13 +6131,13 @@
             <a:r>
               <a:rPr lang="en-US" sz="850" dirty="0">
                 <a:solidFill>
-                  <a:srgbClr val="8B949E"/>
-                </a:solidFill>
-                <a:latin typeface="Calibri" pitchFamily="34" charset="0"/>
-                <a:ea typeface="Calibri" pitchFamily="34" charset="-122"/>
-                <a:cs typeface="Calibri" pitchFamily="34" charset="-120"/>
-              </a:rPr>
-              <a:t>這就是 Scale Out 的前提！</a:t>
+                  <a:srgbClr val="8A8078"/>
+                </a:solidFill>
+                <a:latin typeface="Calibri" pitchFamily="34" charset="0"/>
+                <a:ea typeface="Calibri" pitchFamily="34" charset="-122"/>
+                <a:cs typeface="Calibri" pitchFamily="34" charset="-120"/>
+              </a:rPr>
+              <a:t>This is the prerequisite for Scale Out!</a:t>
             </a:r>
             <a:endParaRPr lang="en-US" sz="850" dirty="0"/>
           </a:p>
@@ -6158,11 +6158,11 @@
             <a:avLst/>
           </a:prstGeom>
           <a:solidFill>
-            <a:srgbClr val="3FB950"/>
+            <a:srgbClr val="4A9968"/>
           </a:solidFill>
           <a:ln w="12700">
             <a:solidFill>
-              <a:srgbClr val="3FB950"/>
+              <a:srgbClr val="4A9968"/>
             </a:solidFill>
             <a:prstDash val="solid"/>
           </a:ln>
@@ -6195,13 +6195,13 @@
             <a:r>
               <a:rPr lang="en-US" sz="1050" b="1" dirty="0">
                 <a:solidFill>
-                  <a:srgbClr val="E6EDF3"/>
-                </a:solidFill>
-                <a:latin typeface="Calibri" pitchFamily="34" charset="0"/>
-                <a:ea typeface="Calibri" pitchFamily="34" charset="-122"/>
-                <a:cs typeface="Calibri" pitchFamily="34" charset="-120"/>
-              </a:rPr>
-              <a:t>Session/State → 外部儲存</a:t>
+                  <a:srgbClr val="2D2926"/>
+                </a:solidFill>
+                <a:latin typeface="Calibri" pitchFamily="34" charset="0"/>
+                <a:ea typeface="Calibri" pitchFamily="34" charset="-122"/>
+                <a:cs typeface="Calibri" pitchFamily="34" charset="-120"/>
+              </a:rPr>
+              <a:t>Session/State → External storage</a:t>
             </a:r>
             <a:endParaRPr lang="en-US" sz="1050" dirty="0"/>
           </a:p>
@@ -6234,7 +6234,7 @@
             <a:r>
               <a:rPr lang="en-US" sz="850" dirty="0">
                 <a:solidFill>
-                  <a:srgbClr val="8B949E"/>
+                  <a:srgbClr val="8A8078"/>
                 </a:solidFill>
                 <a:latin typeface="Calibri" pitchFamily="34" charset="0"/>
                 <a:ea typeface="Calibri" pitchFamily="34" charset="-122"/>
@@ -6261,11 +6261,11 @@
             <a:avLst/>
           </a:prstGeom>
           <a:solidFill>
-            <a:srgbClr val="3FB950"/>
+            <a:srgbClr val="4A9968"/>
           </a:solidFill>
           <a:ln w="12700">
             <a:solidFill>
-              <a:srgbClr val="3FB950"/>
+              <a:srgbClr val="4A9968"/>
             </a:solidFill>
             <a:prstDash val="solid"/>
           </a:ln>
@@ -6298,13 +6298,13 @@
             <a:r>
               <a:rPr lang="en-US" sz="1050" b="1" dirty="0">
                 <a:solidFill>
-                  <a:srgbClr val="E6EDF3"/>
-                </a:solidFill>
-                <a:latin typeface="Calibri" pitchFamily="34" charset="0"/>
-                <a:ea typeface="Calibri" pitchFamily="34" charset="-122"/>
-                <a:cs typeface="Calibri" pitchFamily="34" charset="-120"/>
-              </a:rPr>
-              <a:t>❌ 本地檔案系統存 Session</a:t>
+                  <a:srgbClr val="2D2926"/>
+                </a:solidFill>
+                <a:latin typeface="Calibri" pitchFamily="34" charset="0"/>
+                <a:ea typeface="Calibri" pitchFamily="34" charset="-122"/>
+                <a:cs typeface="Calibri" pitchFamily="34" charset="-120"/>
+              </a:rPr>
+              <a:t>❌ Storing sessions on local filesystem</a:t>
             </a:r>
             <a:endParaRPr lang="en-US" sz="1050" dirty="0"/>
           </a:p>
@@ -6325,11 +6325,11 @@
             <a:avLst/>
           </a:prstGeom>
           <a:solidFill>
-            <a:srgbClr val="3FB950"/>
+            <a:srgbClr val="4A9968"/>
           </a:solidFill>
           <a:ln w="12700">
             <a:solidFill>
-              <a:srgbClr val="3FB950"/>
+              <a:srgbClr val="4A9968"/>
             </a:solidFill>
             <a:prstDash val="solid"/>
           </a:ln>
@@ -6362,7 +6362,7 @@
             <a:r>
               <a:rPr lang="en-US" sz="1050" b="1" dirty="0">
                 <a:solidFill>
-                  <a:srgbClr val="E6EDF3"/>
+                  <a:srgbClr val="2D2926"/>
                 </a:solidFill>
                 <a:latin typeface="Calibri" pitchFamily="34" charset="0"/>
                 <a:ea typeface="Calibri" pitchFamily="34" charset="-122"/>
@@ -6391,11 +6391,11 @@
             </a:avLst>
           </a:prstGeom>
           <a:solidFill>
-            <a:srgbClr val="0A1929"/>
+            <a:srgbClr val="EAF0F7"/>
           </a:solidFill>
           <a:ln w="9525">
             <a:solidFill>
-              <a:srgbClr val="58A6FF"/>
+              <a:srgbClr val="4A7FB5"/>
             </a:solidFill>
             <a:prstDash val="solid"/>
           </a:ln>
@@ -6428,13 +6428,13 @@
             <a:r>
               <a:rPr lang="en-US" sz="1000" i="1" dirty="0">
                 <a:solidFill>
-                  <a:srgbClr val="8B949E"/>
-                </a:solidFill>
-                <a:latin typeface="Calibri" pitchFamily="34" charset="0"/>
-                <a:ea typeface="Calibri" pitchFamily="34" charset="-122"/>
-                <a:cs typeface="Calibri" pitchFamily="34" charset="-120"/>
-              </a:rPr>
-              <a:t>💡  Stateless Process (Factor 6) 是 Scale Out 的基石 — 沒有這條，水平擴展就是夢</a:t>
+                  <a:srgbClr val="8A8078"/>
+                </a:solidFill>
+                <a:latin typeface="Calibri" pitchFamily="34" charset="0"/>
+                <a:ea typeface="Calibri" pitchFamily="34" charset="-122"/>
+                <a:cs typeface="Calibri" pitchFamily="34" charset="-120"/>
+              </a:rPr>
+              <a:t>💡  Stateless Process (Factor 6) is the cornerstone of Scale Out — without it, horizontal scaling is impossible</a:t>
             </a:r>
             <a:endParaRPr lang="en-US" sz="1000" dirty="0"/>
           </a:p>
@@ -6454,7 +6454,7 @@
     <p:bg>
       <p:bgPr>
         <a:solidFill>
-          <a:srgbClr val="0D1117"/>
+          <a:srgbClr val="FFFDF8"/>
         </a:solidFill>
       </p:bgPr>
     </p:bg>
@@ -6487,11 +6487,11 @@
             <a:avLst/>
           </a:prstGeom>
           <a:solidFill>
-            <a:srgbClr val="161B22"/>
+            <a:srgbClr val="F5F1EB"/>
           </a:solidFill>
           <a:ln w="6350">
             <a:solidFill>
-              <a:srgbClr val="30363D"/>
+              <a:srgbClr val="D6CCBF"/>
             </a:solidFill>
             <a:prstDash val="solid"/>
           </a:ln>
@@ -6512,11 +6512,11 @@
             <a:avLst/>
           </a:prstGeom>
           <a:solidFill>
-            <a:srgbClr val="3FB950"/>
+            <a:srgbClr val="4A9968"/>
           </a:solidFill>
           <a:ln w="12700">
             <a:solidFill>
-              <a:srgbClr val="3FB950"/>
+              <a:srgbClr val="4A9968"/>
             </a:solidFill>
             <a:prstDash val="solid"/>
           </a:ln>
@@ -6549,13 +6549,13 @@
             <a:r>
               <a:rPr lang="en-US" sz="1600" b="1" dirty="0">
                 <a:solidFill>
-                  <a:srgbClr val="E6EDF3"/>
-                </a:solidFill>
-                <a:latin typeface="Calibri" pitchFamily="34" charset="0"/>
-                <a:ea typeface="Calibri" pitchFamily="34" charset="-122"/>
-                <a:cs typeface="Calibri" pitchFamily="34" charset="-120"/>
-              </a:rPr>
-              <a:t>Factor 7-9：Port Binding、Concurrency、Disposability</a:t>
+                  <a:srgbClr val="2D2926"/>
+                </a:solidFill>
+                <a:latin typeface="Calibri" pitchFamily="34" charset="0"/>
+                <a:ea typeface="Calibri" pitchFamily="34" charset="-122"/>
+                <a:cs typeface="Calibri" pitchFamily="34" charset="-120"/>
+              </a:rPr>
+              <a:t>Factor 7-9: Port Binding, Concurrency, Disposability</a:t>
             </a:r>
             <a:endParaRPr lang="en-US" sz="1600" dirty="0"/>
           </a:p>
@@ -6588,13 +6588,13 @@
             <a:r>
               <a:rPr lang="en-US" sz="850" dirty="0">
                 <a:solidFill>
-                  <a:srgbClr val="8B949E"/>
-                </a:solidFill>
-                <a:latin typeface="Calibri" pitchFamily="34" charset="0"/>
-                <a:ea typeface="Calibri" pitchFamily="34" charset="-122"/>
-                <a:cs typeface="Calibri" pitchFamily="34" charset="-120"/>
-              </a:rPr>
-              <a:t>PART 4  ·  30 / 50</a:t>
+                  <a:srgbClr val="8A8078"/>
+                </a:solidFill>
+                <a:latin typeface="Calibri" pitchFamily="34" charset="0"/>
+                <a:ea typeface="Calibri" pitchFamily="34" charset="-122"/>
+                <a:cs typeface="Calibri" pitchFamily="34" charset="-120"/>
+              </a:rPr>
+              <a:t>PART 4</a:t>
             </a:r>
             <a:endParaRPr lang="en-US" sz="850" dirty="0"/>
           </a:p>
@@ -6617,11 +6617,11 @@
             </a:avLst>
           </a:prstGeom>
           <a:solidFill>
-            <a:srgbClr val="161B22"/>
+            <a:srgbClr val="F5F1EB"/>
           </a:solidFill>
           <a:ln w="15240">
             <a:solidFill>
-              <a:srgbClr val="1F6FEB"/>
+              <a:srgbClr val="5B8DB8"/>
             </a:solidFill>
             <a:prstDash val="solid"/>
           </a:ln>
@@ -6642,11 +6642,11 @@
             <a:avLst/>
           </a:prstGeom>
           <a:solidFill>
-            <a:srgbClr val="1C2128"/>
+            <a:srgbClr val="ECE6DD"/>
           </a:solidFill>
           <a:ln w="12700">
             <a:solidFill>
-              <a:srgbClr val="30363D"/>
+              <a:srgbClr val="D6CCBF"/>
             </a:solidFill>
             <a:prstDash val="solid"/>
           </a:ln>
@@ -6715,7 +6715,7 @@
             <a:r>
               <a:rPr lang="en-US" sz="1200" b="1" dirty="0">
                 <a:solidFill>
-                  <a:srgbClr val="1F6FEB"/>
+                  <a:srgbClr val="5B8DB8"/>
                 </a:solidFill>
                 <a:latin typeface="Calibri" pitchFamily="34" charset="0"/>
                 <a:ea typeface="Calibri" pitchFamily="34" charset="-122"/>
@@ -6742,11 +6742,11 @@
             <a:avLst/>
           </a:prstGeom>
           <a:solidFill>
-            <a:srgbClr val="1F6FEB"/>
+            <a:srgbClr val="5B8DB8"/>
           </a:solidFill>
           <a:ln w="12700">
             <a:solidFill>
-              <a:srgbClr val="1F6FEB"/>
+              <a:srgbClr val="5B8DB8"/>
             </a:solidFill>
             <a:prstDash val="solid"/>
           </a:ln>
@@ -6779,13 +6779,13 @@
             <a:r>
               <a:rPr lang="en-US" sz="1050" b="1" dirty="0">
                 <a:solidFill>
-                  <a:srgbClr val="E6EDF3"/>
-                </a:solidFill>
-                <a:latin typeface="Calibri" pitchFamily="34" charset="0"/>
-                <a:ea typeface="Calibri" pitchFamily="34" charset="-122"/>
-                <a:cs typeface="Calibri" pitchFamily="34" charset="-120"/>
-              </a:rPr>
-              <a:t>應用自帶 HTTP Server</a:t>
+                  <a:srgbClr val="2D2926"/>
+                </a:solidFill>
+                <a:latin typeface="Calibri" pitchFamily="34" charset="0"/>
+                <a:ea typeface="Calibri" pitchFamily="34" charset="-122"/>
+                <a:cs typeface="Calibri" pitchFamily="34" charset="-120"/>
+              </a:rPr>
+              <a:t>App includes its own HTTP server</a:t>
             </a:r>
             <a:endParaRPr lang="en-US" sz="1050" dirty="0"/>
           </a:p>
@@ -6806,11 +6806,11 @@
             <a:avLst/>
           </a:prstGeom>
           <a:solidFill>
-            <a:srgbClr val="1F6FEB"/>
+            <a:srgbClr val="5B8DB8"/>
           </a:solidFill>
           <a:ln w="12700">
             <a:solidFill>
-              <a:srgbClr val="1F6FEB"/>
+              <a:srgbClr val="5B8DB8"/>
             </a:solidFill>
             <a:prstDash val="solid"/>
           </a:ln>
@@ -6843,13 +6843,13 @@
             <a:r>
               <a:rPr lang="en-US" sz="1050" b="1" dirty="0">
                 <a:solidFill>
-                  <a:srgbClr val="E6EDF3"/>
-                </a:solidFill>
-                <a:latin typeface="Calibri" pitchFamily="34" charset="0"/>
-                <a:ea typeface="Calibri" pitchFamily="34" charset="-122"/>
-                <a:cs typeface="Calibri" pitchFamily="34" charset="-120"/>
-              </a:rPr>
-              <a:t>透過 Port 對外提供服務</a:t>
+                  <a:srgbClr val="2D2926"/>
+                </a:solidFill>
+                <a:latin typeface="Calibri" pitchFamily="34" charset="0"/>
+                <a:ea typeface="Calibri" pitchFamily="34" charset="-122"/>
+                <a:cs typeface="Calibri" pitchFamily="34" charset="-120"/>
+              </a:rPr>
+              <a:t>Exports services via port binding</a:t>
             </a:r>
             <a:endParaRPr lang="en-US" sz="1050" dirty="0"/>
           </a:p>
@@ -6882,13 +6882,13 @@
             <a:r>
               <a:rPr lang="en-US" sz="850" dirty="0">
                 <a:solidFill>
-                  <a:srgbClr val="8B949E"/>
-                </a:solidFill>
-                <a:latin typeface="Calibri" pitchFamily="34" charset="0"/>
-                <a:ea typeface="Calibri" pitchFamily="34" charset="-122"/>
-                <a:cs typeface="Calibri" pitchFamily="34" charset="-120"/>
-              </a:rPr>
-              <a:t>不需要外部 Apache/Nginx 才能跑</a:t>
+                  <a:srgbClr val="8A8078"/>
+                </a:solidFill>
+                <a:latin typeface="Calibri" pitchFamily="34" charset="0"/>
+                <a:ea typeface="Calibri" pitchFamily="34" charset="-122"/>
+                <a:cs typeface="Calibri" pitchFamily="34" charset="-120"/>
+              </a:rPr>
+              <a:t>No external Apache/Nginx required to run</a:t>
             </a:r>
             <a:endParaRPr lang="en-US" sz="850" dirty="0"/>
           </a:p>
@@ -6909,11 +6909,11 @@
             <a:avLst/>
           </a:prstGeom>
           <a:solidFill>
-            <a:srgbClr val="1F6FEB"/>
+            <a:srgbClr val="5B8DB8"/>
           </a:solidFill>
           <a:ln w="12700">
             <a:solidFill>
-              <a:srgbClr val="1F6FEB"/>
+              <a:srgbClr val="5B8DB8"/>
             </a:solidFill>
             <a:prstDash val="solid"/>
           </a:ln>
@@ -6946,7 +6946,7 @@
             <a:r>
               <a:rPr lang="en-US" sz="1050" b="1" dirty="0">
                 <a:solidFill>
-                  <a:srgbClr val="E6EDF3"/>
+                  <a:srgbClr val="2D2926"/>
                 </a:solidFill>
                 <a:latin typeface="Calibri" pitchFamily="34" charset="0"/>
                 <a:ea typeface="Calibri" pitchFamily="34" charset="-122"/>
@@ -6973,11 +6973,11 @@
             <a:avLst/>
           </a:prstGeom>
           <a:solidFill>
-            <a:srgbClr val="1F6FEB"/>
+            <a:srgbClr val="5B8DB8"/>
           </a:solidFill>
           <a:ln w="12700">
             <a:solidFill>
-              <a:srgbClr val="1F6FEB"/>
+              <a:srgbClr val="5B8DB8"/>
             </a:solidFill>
             <a:prstDash val="solid"/>
           </a:ln>
@@ -7010,13 +7010,13 @@
             <a:r>
               <a:rPr lang="en-US" sz="1050" b="1" dirty="0">
                 <a:solidFill>
-                  <a:srgbClr val="E6EDF3"/>
-                </a:solidFill>
-                <a:latin typeface="Calibri" pitchFamily="34" charset="0"/>
-                <a:ea typeface="Calibri" pitchFamily="34" charset="-122"/>
-                <a:cs typeface="Calibri" pitchFamily="34" charset="-120"/>
-              </a:rPr>
-              <a:t>容器化天然符合此條</a:t>
+                  <a:srgbClr val="2D2926"/>
+                </a:solidFill>
+                <a:latin typeface="Calibri" pitchFamily="34" charset="0"/>
+                <a:ea typeface="Calibri" pitchFamily="34" charset="-122"/>
+                <a:cs typeface="Calibri" pitchFamily="34" charset="-120"/>
+              </a:rPr>
+              <a:t>Containerization naturally satisfies this</a:t>
             </a:r>
             <a:endParaRPr lang="en-US" sz="1050" dirty="0"/>
           </a:p>
@@ -7037,11 +7037,11 @@
             <a:avLst/>
           </a:prstGeom>
           <a:solidFill>
-            <a:srgbClr val="1F6FEB"/>
+            <a:srgbClr val="5B8DB8"/>
           </a:solidFill>
           <a:ln w="12700">
             <a:solidFill>
-              <a:srgbClr val="1F6FEB"/>
+              <a:srgbClr val="5B8DB8"/>
             </a:solidFill>
             <a:prstDash val="solid"/>
           </a:ln>
@@ -7074,13 +7074,13 @@
             <a:r>
               <a:rPr lang="en-US" sz="1050" b="1" dirty="0">
                 <a:solidFill>
-                  <a:srgbClr val="E6EDF3"/>
-                </a:solidFill>
-                <a:latin typeface="Calibri" pitchFamily="34" charset="0"/>
-                <a:ea typeface="Calibri" pitchFamily="34" charset="-122"/>
-                <a:cs typeface="Calibri" pitchFamily="34" charset="-120"/>
-              </a:rPr>
-              <a:t>PORT=8080 環境變數控制</a:t>
+                  <a:srgbClr val="2D2926"/>
+                </a:solidFill>
+                <a:latin typeface="Calibri" pitchFamily="34" charset="0"/>
+                <a:ea typeface="Calibri" pitchFamily="34" charset="-122"/>
+                <a:cs typeface="Calibri" pitchFamily="34" charset="-120"/>
+              </a:rPr>
+              <a:t>PORT=8080 controlled via env var</a:t>
             </a:r>
             <a:endParaRPr lang="en-US" sz="1050" dirty="0"/>
           </a:p>
@@ -7103,11 +7103,11 @@
             </a:avLst>
           </a:prstGeom>
           <a:solidFill>
-            <a:srgbClr val="161B22"/>
+            <a:srgbClr val="F5F1EB"/>
           </a:solidFill>
           <a:ln w="15240">
             <a:solidFill>
-              <a:srgbClr val="58A6FF"/>
+              <a:srgbClr val="4A7FB5"/>
             </a:solidFill>
             <a:prstDash val="solid"/>
           </a:ln>
@@ -7128,11 +7128,11 @@
             <a:avLst/>
           </a:prstGeom>
           <a:solidFill>
-            <a:srgbClr val="1C2128"/>
+            <a:srgbClr val="ECE6DD"/>
           </a:solidFill>
           <a:ln w="12700">
             <a:solidFill>
-              <a:srgbClr val="30363D"/>
+              <a:srgbClr val="D6CCBF"/>
             </a:solidFill>
             <a:prstDash val="solid"/>
           </a:ln>
@@ -7201,7 +7201,7 @@
             <a:r>
               <a:rPr lang="en-US" sz="1200" b="1" dirty="0">
                 <a:solidFill>
-                  <a:srgbClr val="58A6FF"/>
+                  <a:srgbClr val="4A7FB5"/>
                 </a:solidFill>
                 <a:latin typeface="Calibri" pitchFamily="34" charset="0"/>
                 <a:ea typeface="Calibri" pitchFamily="34" charset="-122"/>
@@ -7228,11 +7228,11 @@
             <a:avLst/>
           </a:prstGeom>
           <a:solidFill>
-            <a:srgbClr val="58A6FF"/>
+            <a:srgbClr val="4A7FB5"/>
           </a:solidFill>
           <a:ln w="12700">
             <a:solidFill>
-              <a:srgbClr val="58A6FF"/>
+              <a:srgbClr val="4A7FB5"/>
             </a:solidFill>
             <a:prstDash val="solid"/>
           </a:ln>
@@ -7265,13 +7265,13 @@
             <a:r>
               <a:rPr lang="en-US" sz="1050" b="1" dirty="0">
                 <a:solidFill>
-                  <a:srgbClr val="E6EDF3"/>
-                </a:solidFill>
-                <a:latin typeface="Calibri" pitchFamily="34" charset="0"/>
-                <a:ea typeface="Calibri" pitchFamily="34" charset="-122"/>
-                <a:cs typeface="Calibri" pitchFamily="34" charset="-120"/>
-              </a:rPr>
-              <a:t>透過 Process 類型 Scale</a:t>
+                  <a:srgbClr val="2D2926"/>
+                </a:solidFill>
+                <a:latin typeface="Calibri" pitchFamily="34" charset="0"/>
+                <a:ea typeface="Calibri" pitchFamily="34" charset="-122"/>
+                <a:cs typeface="Calibri" pitchFamily="34" charset="-120"/>
+              </a:rPr>
+              <a:t>Scale via process types</a:t>
             </a:r>
             <a:endParaRPr lang="en-US" sz="1050" dirty="0"/>
           </a:p>
@@ -7292,11 +7292,11 @@
             <a:avLst/>
           </a:prstGeom>
           <a:solidFill>
-            <a:srgbClr val="58A6FF"/>
+            <a:srgbClr val="4A7FB5"/>
           </a:solidFill>
           <a:ln w="12700">
             <a:solidFill>
-              <a:srgbClr val="58A6FF"/>
+              <a:srgbClr val="4A7FB5"/>
             </a:solidFill>
             <a:prstDash val="solid"/>
           </a:ln>
@@ -7329,7 +7329,7 @@
             <a:r>
               <a:rPr lang="en-US" sz="1050" b="1" dirty="0">
                 <a:solidFill>
-                  <a:srgbClr val="E6EDF3"/>
+                  <a:srgbClr val="2D2926"/>
                 </a:solidFill>
                 <a:latin typeface="Calibri" pitchFamily="34" charset="0"/>
                 <a:ea typeface="Calibri" pitchFamily="34" charset="-122"/>
@@ -7356,11 +7356,11 @@
             <a:avLst/>
           </a:prstGeom>
           <a:solidFill>
-            <a:srgbClr val="58A6FF"/>
+            <a:srgbClr val="4A7FB5"/>
           </a:solidFill>
           <a:ln w="12700">
             <a:solidFill>
-              <a:srgbClr val="58A6FF"/>
+              <a:srgbClr val="4A7FB5"/>
             </a:solidFill>
             <a:prstDash val="solid"/>
           </a:ln>
@@ -7393,13 +7393,13 @@
             <a:r>
               <a:rPr lang="en-US" sz="1050" b="1" dirty="0">
                 <a:solidFill>
-                  <a:srgbClr val="E6EDF3"/>
-                </a:solidFill>
-                <a:latin typeface="Calibri" pitchFamily="34" charset="0"/>
-                <a:ea typeface="Calibri" pitchFamily="34" charset="-122"/>
-                <a:cs typeface="Calibri" pitchFamily="34" charset="-120"/>
-              </a:rPr>
-              <a:t>Worker Process = 非同步任務</a:t>
+                  <a:srgbClr val="2D2926"/>
+                </a:solidFill>
+                <a:latin typeface="Calibri" pitchFamily="34" charset="0"/>
+                <a:ea typeface="Calibri" pitchFamily="34" charset="-122"/>
+                <a:cs typeface="Calibri" pitchFamily="34" charset="-120"/>
+              </a:rPr>
+              <a:t>Worker Process = Async tasks</a:t>
             </a:r>
             <a:endParaRPr lang="en-US" sz="1050" dirty="0"/>
           </a:p>
@@ -7420,11 +7420,11 @@
             <a:avLst/>
           </a:prstGeom>
           <a:solidFill>
-            <a:srgbClr val="58A6FF"/>
+            <a:srgbClr val="4A7FB5"/>
           </a:solidFill>
           <a:ln w="12700">
             <a:solidFill>
-              <a:srgbClr val="58A6FF"/>
+              <a:srgbClr val="4A7FB5"/>
             </a:solidFill>
             <a:prstDash val="solid"/>
           </a:ln>
@@ -7457,13 +7457,13 @@
             <a:r>
               <a:rPr lang="en-US" sz="1050" b="1" dirty="0">
                 <a:solidFill>
-                  <a:srgbClr val="E6EDF3"/>
-                </a:solidFill>
-                <a:latin typeface="Calibri" pitchFamily="34" charset="0"/>
-                <a:ea typeface="Calibri" pitchFamily="34" charset="-122"/>
-                <a:cs typeface="Calibri" pitchFamily="34" charset="-120"/>
-              </a:rPr>
-              <a:t>不同類型可獨立 Scale</a:t>
+                  <a:srgbClr val="2D2926"/>
+                </a:solidFill>
+                <a:latin typeface="Calibri" pitchFamily="34" charset="0"/>
+                <a:ea typeface="Calibri" pitchFamily="34" charset="-122"/>
+                <a:cs typeface="Calibri" pitchFamily="34" charset="-120"/>
+              </a:rPr>
+              <a:t>Each type scales independently</a:t>
             </a:r>
             <a:endParaRPr lang="en-US" sz="1050" dirty="0"/>
           </a:p>
@@ -7496,7 +7496,7 @@
             <a:r>
               <a:rPr lang="en-US" sz="850" dirty="0">
                 <a:solidFill>
-                  <a:srgbClr val="8B949E"/>
+                  <a:srgbClr val="8A8078"/>
                 </a:solidFill>
                 <a:latin typeface="Calibri" pitchFamily="34" charset="0"/>
                 <a:ea typeface="Calibri" pitchFamily="34" charset="-122"/>
@@ -7523,11 +7523,11 @@
             <a:avLst/>
           </a:prstGeom>
           <a:solidFill>
-            <a:srgbClr val="58A6FF"/>
+            <a:srgbClr val="4A7FB5"/>
           </a:solidFill>
           <a:ln w="12700">
             <a:solidFill>
-              <a:srgbClr val="58A6FF"/>
+              <a:srgbClr val="4A7FB5"/>
             </a:solidFill>
             <a:prstDash val="solid"/>
           </a:ln>
@@ -7560,13 +7560,13 @@
             <a:r>
               <a:rPr lang="en-US" sz="1050" b="1" dirty="0">
                 <a:solidFill>
-                  <a:srgbClr val="E6EDF3"/>
-                </a:solidFill>
-                <a:latin typeface="Calibri" pitchFamily="34" charset="0"/>
-                <a:ea typeface="Calibri" pitchFamily="34" charset="-122"/>
-                <a:cs typeface="Calibri" pitchFamily="34" charset="-120"/>
-              </a:rPr>
-              <a:t>Kubernetes Deployment 完美支援</a:t>
+                  <a:srgbClr val="2D2926"/>
+                </a:solidFill>
+                <a:latin typeface="Calibri" pitchFamily="34" charset="0"/>
+                <a:ea typeface="Calibri" pitchFamily="34" charset="-122"/>
+                <a:cs typeface="Calibri" pitchFamily="34" charset="-120"/>
+              </a:rPr>
+              <a:t>Kubernetes Deployment supports this perfectly</a:t>
             </a:r>
             <a:endParaRPr lang="en-US" sz="1050" dirty="0"/>
           </a:p>
@@ -7589,11 +7589,11 @@
             </a:avLst>
           </a:prstGeom>
           <a:solidFill>
-            <a:srgbClr val="161B22"/>
+            <a:srgbClr val="F5F1EB"/>
           </a:solidFill>
           <a:ln w="15240">
             <a:solidFill>
-              <a:srgbClr val="3FB950"/>
+              <a:srgbClr val="4A9968"/>
             </a:solidFill>
             <a:prstDash val="solid"/>
           </a:ln>
@@ -7614,11 +7614,11 @@
             <a:avLst/>
           </a:prstGeom>
           <a:solidFill>
-            <a:srgbClr val="1C2128"/>
+            <a:srgbClr val="ECE6DD"/>
           </a:solidFill>
           <a:ln w="12700">
             <a:solidFill>
-              <a:srgbClr val="30363D"/>
+              <a:srgbClr val="D6CCBF"/>
             </a:solidFill>
             <a:prstDash val="solid"/>
           </a:ln>
@@ -7687,7 +7687,7 @@
             <a:r>
               <a:rPr lang="en-US" sz="1200" b="1" dirty="0">
                 <a:solidFill>
-                  <a:srgbClr val="3FB950"/>
+                  <a:srgbClr val="4A9968"/>
                 </a:solidFill>
                 <a:latin typeface="Calibri" pitchFamily="34" charset="0"/>
                 <a:ea typeface="Calibri" pitchFamily="34" charset="-122"/>
@@ -7714,11 +7714,11 @@
             <a:avLst/>
           </a:prstGeom>
           <a:solidFill>
-            <a:srgbClr val="3FB950"/>
+            <a:srgbClr val="4A9968"/>
           </a:solidFill>
           <a:ln w="12700">
             <a:solidFill>
-              <a:srgbClr val="3FB950"/>
+              <a:srgbClr val="4A9968"/>
             </a:solidFill>
             <a:prstDash val="solid"/>
           </a:ln>
@@ -7751,13 +7751,13 @@
             <a:r>
               <a:rPr lang="en-US" sz="1050" b="1" dirty="0">
                 <a:solidFill>
-                  <a:srgbClr val="E6EDF3"/>
-                </a:solidFill>
-                <a:latin typeface="Calibri" pitchFamily="34" charset="0"/>
-                <a:ea typeface="Calibri" pitchFamily="34" charset="-122"/>
-                <a:cs typeface="Calibri" pitchFamily="34" charset="-120"/>
-              </a:rPr>
-              <a:t>Process 要能快速啟動</a:t>
+                  <a:srgbClr val="2D2926"/>
+                </a:solidFill>
+                <a:latin typeface="Calibri" pitchFamily="34" charset="0"/>
+                <a:ea typeface="Calibri" pitchFamily="34" charset="-122"/>
+                <a:cs typeface="Calibri" pitchFamily="34" charset="-120"/>
+              </a:rPr>
+              <a:t>Processes must start quickly</a:t>
             </a:r>
             <a:endParaRPr lang="en-US" sz="1050" dirty="0"/>
           </a:p>
@@ -7790,13 +7790,13 @@
             <a:r>
               <a:rPr lang="en-US" sz="850" dirty="0">
                 <a:solidFill>
-                  <a:srgbClr val="8B949E"/>
-                </a:solidFill>
-                <a:latin typeface="Calibri" pitchFamily="34" charset="0"/>
-                <a:ea typeface="Calibri" pitchFamily="34" charset="-122"/>
-                <a:cs typeface="Calibri" pitchFamily="34" charset="-120"/>
-              </a:rPr>
-              <a:t>目標 &lt; 10 秒</a:t>
+                  <a:srgbClr val="8A8078"/>
+                </a:solidFill>
+                <a:latin typeface="Calibri" pitchFamily="34" charset="0"/>
+                <a:ea typeface="Calibri" pitchFamily="34" charset="-122"/>
+                <a:cs typeface="Calibri" pitchFamily="34" charset="-120"/>
+              </a:rPr>
+              <a:t>Target &lt; 10 seconds</a:t>
             </a:r>
             <a:endParaRPr lang="en-US" sz="850" dirty="0"/>
           </a:p>
@@ -7817,11 +7817,11 @@
             <a:avLst/>
           </a:prstGeom>
           <a:solidFill>
-            <a:srgbClr val="3FB950"/>
+            <a:srgbClr val="4A9968"/>
           </a:solidFill>
           <a:ln w="12700">
             <a:solidFill>
-              <a:srgbClr val="3FB950"/>
+              <a:srgbClr val="4A9968"/>
             </a:solidFill>
             <a:prstDash val="solid"/>
           </a:ln>
@@ -7854,13 +7854,13 @@
             <a:r>
               <a:rPr lang="en-US" sz="1050" b="1" dirty="0">
                 <a:solidFill>
-                  <a:srgbClr val="E6EDF3"/>
-                </a:solidFill>
-                <a:latin typeface="Calibri" pitchFamily="34" charset="0"/>
-                <a:ea typeface="Calibri" pitchFamily="34" charset="-122"/>
-                <a:cs typeface="Calibri" pitchFamily="34" charset="-120"/>
-              </a:rPr>
-              <a:t>優雅關閉 (Graceful Shutdown)</a:t>
+                  <a:srgbClr val="2D2926"/>
+                </a:solidFill>
+                <a:latin typeface="Calibri" pitchFamily="34" charset="0"/>
+                <a:ea typeface="Calibri" pitchFamily="34" charset="-122"/>
+                <a:cs typeface="Calibri" pitchFamily="34" charset="-120"/>
+              </a:rPr>
+              <a:t>Graceful Shutdown</a:t>
             </a:r>
             <a:endParaRPr lang="en-US" sz="1050" dirty="0"/>
           </a:p>
@@ -7881,11 +7881,11 @@
             <a:avLst/>
           </a:prstGeom>
           <a:solidFill>
-            <a:srgbClr val="3FB950"/>
+            <a:srgbClr val="4A9968"/>
           </a:solidFill>
           <a:ln w="12700">
             <a:solidFill>
-              <a:srgbClr val="3FB950"/>
+              <a:srgbClr val="4A9968"/>
             </a:solidFill>
             <a:prstDash val="solid"/>
           </a:ln>
@@ -7918,13 +7918,13 @@
             <a:r>
               <a:rPr lang="en-US" sz="1050" b="1" dirty="0">
                 <a:solidFill>
-                  <a:srgbClr val="E6EDF3"/>
-                </a:solidFill>
-                <a:latin typeface="Calibri" pitchFamily="34" charset="0"/>
-                <a:ea typeface="Calibri" pitchFamily="34" charset="-122"/>
-                <a:cs typeface="Calibri" pitchFamily="34" charset="-120"/>
-              </a:rPr>
-              <a:t>接到 SIGTERM → 完成當前請求再關</a:t>
+                  <a:srgbClr val="2D2926"/>
+                </a:solidFill>
+                <a:latin typeface="Calibri" pitchFamily="34" charset="0"/>
+                <a:ea typeface="Calibri" pitchFamily="34" charset="-122"/>
+                <a:cs typeface="Calibri" pitchFamily="34" charset="-120"/>
+              </a:rPr>
+              <a:t>On SIGTERM → Finish current requests, then exit</a:t>
             </a:r>
             <a:endParaRPr lang="en-US" sz="1050" dirty="0"/>
           </a:p>
@@ -7945,11 +7945,11 @@
             <a:avLst/>
           </a:prstGeom>
           <a:solidFill>
-            <a:srgbClr val="3FB950"/>
+            <a:srgbClr val="4A9968"/>
           </a:solidFill>
           <a:ln w="12700">
             <a:solidFill>
-              <a:srgbClr val="3FB950"/>
+              <a:srgbClr val="4A9968"/>
             </a:solidFill>
             <a:prstDash val="solid"/>
           </a:ln>
@@ -7982,13 +7982,13 @@
             <a:r>
               <a:rPr lang="en-US" sz="1050" b="1" dirty="0">
                 <a:solidFill>
-                  <a:srgbClr val="E6EDF3"/>
-                </a:solidFill>
-                <a:latin typeface="Calibri" pitchFamily="34" charset="0"/>
-                <a:ea typeface="Calibri" pitchFamily="34" charset="-122"/>
-                <a:cs typeface="Calibri" pitchFamily="34" charset="-120"/>
-              </a:rPr>
-              <a:t>Crash 也沒關係 — 快速重啟</a:t>
+                  <a:srgbClr val="2D2926"/>
+                </a:solidFill>
+                <a:latin typeface="Calibri" pitchFamily="34" charset="0"/>
+                <a:ea typeface="Calibri" pitchFamily="34" charset="-122"/>
+                <a:cs typeface="Calibri" pitchFamily="34" charset="-120"/>
+              </a:rPr>
+              <a:t>Crashes are fine — fast restart</a:t>
             </a:r>
             <a:endParaRPr lang="en-US" sz="1050" dirty="0"/>
           </a:p>
@@ -8009,11 +8009,11 @@
             <a:avLst/>
           </a:prstGeom>
           <a:solidFill>
-            <a:srgbClr val="3FB950"/>
+            <a:srgbClr val="4A9968"/>
           </a:solidFill>
           <a:ln w="12700">
             <a:solidFill>
-              <a:srgbClr val="3FB950"/>
+              <a:srgbClr val="4A9968"/>
             </a:solidFill>
             <a:prstDash val="solid"/>
           </a:ln>
@@ -8046,13 +8046,13 @@
             <a:r>
               <a:rPr lang="en-US" sz="1050" b="1" dirty="0">
                 <a:solidFill>
-                  <a:srgbClr val="E6EDF3"/>
-                </a:solidFill>
-                <a:latin typeface="Calibri" pitchFamily="34" charset="0"/>
-                <a:ea typeface="Calibri" pitchFamily="34" charset="-122"/>
-                <a:cs typeface="Calibri" pitchFamily="34" charset="-120"/>
-              </a:rPr>
-              <a:t>Container + K8s 完美搭配</a:t>
+                  <a:srgbClr val="2D2926"/>
+                </a:solidFill>
+                <a:latin typeface="Calibri" pitchFamily="34" charset="0"/>
+                <a:ea typeface="Calibri" pitchFamily="34" charset="-122"/>
+                <a:cs typeface="Calibri" pitchFamily="34" charset="-120"/>
+              </a:rPr>
+              <a:t>Container + K8s are a perfect match</a:t>
             </a:r>
             <a:endParaRPr lang="en-US" sz="1050" dirty="0"/>
           </a:p>
@@ -8075,11 +8075,11 @@
             </a:avLst>
           </a:prstGeom>
           <a:solidFill>
-            <a:srgbClr val="0A1929"/>
+            <a:srgbClr val="EAF0F7"/>
           </a:solidFill>
           <a:ln w="9525">
             <a:solidFill>
-              <a:srgbClr val="58A6FF"/>
+              <a:srgbClr val="4A7FB5"/>
             </a:solidFill>
             <a:prstDash val="solid"/>
           </a:ln>
@@ -8112,13 +8112,13 @@
             <a:r>
               <a:rPr lang="en-US" sz="1000" i="1" dirty="0">
                 <a:solidFill>
-                  <a:srgbClr val="8B949E"/>
-                </a:solidFill>
-                <a:latin typeface="Calibri" pitchFamily="34" charset="0"/>
-                <a:ea typeface="Calibri" pitchFamily="34" charset="-122"/>
-                <a:cs typeface="Calibri" pitchFamily="34" charset="-120"/>
-              </a:rPr>
-              <a:t>💡  Disposability 讓 Kubernetes 可以隨時 kill/restart 你的 Container — 不用怕，設計好就沒問題</a:t>
+                  <a:srgbClr val="8A8078"/>
+                </a:solidFill>
+                <a:latin typeface="Calibri" pitchFamily="34" charset="0"/>
+                <a:ea typeface="Calibri" pitchFamily="34" charset="-122"/>
+                <a:cs typeface="Calibri" pitchFamily="34" charset="-120"/>
+              </a:rPr>
+              <a:t>💡  Disposability lets Kubernetes kill/restart your containers at any time — design it right, and there's nothing to worry about</a:t>
             </a:r>
             <a:endParaRPr lang="en-US" sz="1000" dirty="0"/>
           </a:p>
@@ -8138,7 +8138,7 @@
     <p:bg>
       <p:bgPr>
         <a:solidFill>
-          <a:srgbClr val="0D1117"/>
+          <a:srgbClr val="FFFDF8"/>
         </a:solidFill>
       </p:bgPr>
     </p:bg>
@@ -8171,11 +8171,11 @@
             <a:avLst/>
           </a:prstGeom>
           <a:solidFill>
-            <a:srgbClr val="161B22"/>
+            <a:srgbClr val="F5F1EB"/>
           </a:solidFill>
           <a:ln w="6350">
             <a:solidFill>
-              <a:srgbClr val="30363D"/>
+              <a:srgbClr val="D6CCBF"/>
             </a:solidFill>
             <a:prstDash val="solid"/>
           </a:ln>
@@ -8196,11 +8196,11 @@
             <a:avLst/>
           </a:prstGeom>
           <a:solidFill>
-            <a:srgbClr val="D29922"/>
+            <a:srgbClr val="B8892C"/>
           </a:solidFill>
           <a:ln w="12700">
             <a:solidFill>
-              <a:srgbClr val="D29922"/>
+              <a:srgbClr val="B8892C"/>
             </a:solidFill>
             <a:prstDash val="solid"/>
           </a:ln>
@@ -8233,13 +8233,13 @@
             <a:r>
               <a:rPr lang="en-US" sz="1600" b="1" dirty="0">
                 <a:solidFill>
-                  <a:srgbClr val="E6EDF3"/>
-                </a:solidFill>
-                <a:latin typeface="Calibri" pitchFamily="34" charset="0"/>
-                <a:ea typeface="Calibri" pitchFamily="34" charset="-122"/>
-                <a:cs typeface="Calibri" pitchFamily="34" charset="-120"/>
-              </a:rPr>
-              <a:t>Factor 10-12：Dev/Prod Parity、Logs、Admin Processes</a:t>
+                  <a:srgbClr val="2D2926"/>
+                </a:solidFill>
+                <a:latin typeface="Calibri" pitchFamily="34" charset="0"/>
+                <a:ea typeface="Calibri" pitchFamily="34" charset="-122"/>
+                <a:cs typeface="Calibri" pitchFamily="34" charset="-120"/>
+              </a:rPr>
+              <a:t>Factor 10-12: Dev/Prod Parity, Logs, Admin Processes</a:t>
             </a:r>
             <a:endParaRPr lang="en-US" sz="1600" dirty="0"/>
           </a:p>
@@ -8272,13 +8272,13 @@
             <a:r>
               <a:rPr lang="en-US" sz="850" dirty="0">
                 <a:solidFill>
-                  <a:srgbClr val="8B949E"/>
-                </a:solidFill>
-                <a:latin typeface="Calibri" pitchFamily="34" charset="0"/>
-                <a:ea typeface="Calibri" pitchFamily="34" charset="-122"/>
-                <a:cs typeface="Calibri" pitchFamily="34" charset="-120"/>
-              </a:rPr>
-              <a:t>PART 4  ·  31 / 50</a:t>
+                  <a:srgbClr val="8A8078"/>
+                </a:solidFill>
+                <a:latin typeface="Calibri" pitchFamily="34" charset="0"/>
+                <a:ea typeface="Calibri" pitchFamily="34" charset="-122"/>
+                <a:cs typeface="Calibri" pitchFamily="34" charset="-120"/>
+              </a:rPr>
+              <a:t>PART 4</a:t>
             </a:r>
             <a:endParaRPr lang="en-US" sz="850" dirty="0"/>
           </a:p>
@@ -8301,11 +8301,11 @@
             </a:avLst>
           </a:prstGeom>
           <a:solidFill>
-            <a:srgbClr val="161B22"/>
+            <a:srgbClr val="F5F1EB"/>
           </a:solidFill>
           <a:ln w="15240">
             <a:solidFill>
-              <a:srgbClr val="D29922"/>
+              <a:srgbClr val="B8892C"/>
             </a:solidFill>
             <a:prstDash val="solid"/>
           </a:ln>
@@ -8326,11 +8326,11 @@
             <a:avLst/>
           </a:prstGeom>
           <a:solidFill>
-            <a:srgbClr val="1C2128"/>
+            <a:srgbClr val="ECE6DD"/>
           </a:solidFill>
           <a:ln w="12700">
             <a:solidFill>
-              <a:srgbClr val="30363D"/>
+              <a:srgbClr val="D6CCBF"/>
             </a:solidFill>
             <a:prstDash val="solid"/>
           </a:ln>
@@ -8399,7 +8399,7 @@
             <a:r>
               <a:rPr lang="en-US" sz="1200" b="1" dirty="0">
                 <a:solidFill>
-                  <a:srgbClr val="D29922"/>
+                  <a:srgbClr val="B8892C"/>
                 </a:solidFill>
                 <a:latin typeface="Calibri" pitchFamily="34" charset="0"/>
                 <a:ea typeface="Calibri" pitchFamily="34" charset="-122"/>
@@ -8426,11 +8426,11 @@
             <a:avLst/>
           </a:prstGeom>
           <a:solidFill>
-            <a:srgbClr val="D29922"/>
+            <a:srgbClr val="B8892C"/>
           </a:solidFill>
           <a:ln w="12700">
             <a:solidFill>
-              <a:srgbClr val="D29922"/>
+              <a:srgbClr val="B8892C"/>
             </a:solidFill>
             <a:prstDash val="solid"/>
           </a:ln>
@@ -8463,13 +8463,13 @@
             <a:r>
               <a:rPr lang="en-US" sz="1050" b="1" dirty="0">
                 <a:solidFill>
-                  <a:srgbClr val="E6EDF3"/>
-                </a:solidFill>
-                <a:latin typeface="Calibri" pitchFamily="34" charset="0"/>
-                <a:ea typeface="Calibri" pitchFamily="34" charset="-122"/>
-                <a:cs typeface="Calibri" pitchFamily="34" charset="-120"/>
-              </a:rPr>
-              <a:t>Dev 環境要盡量接近 Prod</a:t>
+                  <a:srgbClr val="2D2926"/>
+                </a:solidFill>
+                <a:latin typeface="Calibri" pitchFamily="34" charset="0"/>
+                <a:ea typeface="Calibri" pitchFamily="34" charset="-122"/>
+                <a:cs typeface="Calibri" pitchFamily="34" charset="-120"/>
+              </a:rPr>
+              <a:t>Dev environment should closely mirror Prod</a:t>
             </a:r>
             <a:endParaRPr lang="en-US" sz="1050" dirty="0"/>
           </a:p>
@@ -8490,11 +8490,11 @@
             <a:avLst/>
           </a:prstGeom>
           <a:solidFill>
-            <a:srgbClr val="D29922"/>
+            <a:srgbClr val="B8892C"/>
           </a:solidFill>
           <a:ln w="12700">
             <a:solidFill>
-              <a:srgbClr val="D29922"/>
+              <a:srgbClr val="B8892C"/>
             </a:solidFill>
             <a:prstDash val="solid"/>
           </a:ln>
@@ -8527,13 +8527,13 @@
             <a:r>
               <a:rPr lang="en-US" sz="1050" b="1" dirty="0">
                 <a:solidFill>
-                  <a:srgbClr val="E6EDF3"/>
-                </a:solidFill>
-                <a:latin typeface="Calibri" pitchFamily="34" charset="0"/>
-                <a:ea typeface="Calibri" pitchFamily="34" charset="-122"/>
-                <a:cs typeface="Calibri" pitchFamily="34" charset="-120"/>
-              </a:rPr>
-              <a:t>❌ Dev 用 SQLite, Prod 用 Postgres</a:t>
+                  <a:srgbClr val="2D2926"/>
+                </a:solidFill>
+                <a:latin typeface="Calibri" pitchFamily="34" charset="0"/>
+                <a:ea typeface="Calibri" pitchFamily="34" charset="-122"/>
+                <a:cs typeface="Calibri" pitchFamily="34" charset="-120"/>
+              </a:rPr>
+              <a:t>❌ Dev uses SQLite, Prod uses Postgres</a:t>
             </a:r>
             <a:endParaRPr lang="en-US" sz="1050" dirty="0"/>
           </a:p>
@@ -8554,11 +8554,11 @@
             <a:avLst/>
           </a:prstGeom>
           <a:solidFill>
-            <a:srgbClr val="D29922"/>
+            <a:srgbClr val="B8892C"/>
           </a:solidFill>
           <a:ln w="12700">
             <a:solidFill>
-              <a:srgbClr val="D29922"/>
+              <a:srgbClr val="B8892C"/>
             </a:solidFill>
             <a:prstDash val="solid"/>
           </a:ln>
@@ -8591,13 +8591,13 @@
             <a:r>
               <a:rPr lang="en-US" sz="1050" b="1" dirty="0">
                 <a:solidFill>
-                  <a:srgbClr val="E6EDF3"/>
-                </a:solidFill>
-                <a:latin typeface="Calibri" pitchFamily="34" charset="0"/>
-                <a:ea typeface="Calibri" pitchFamily="34" charset="-122"/>
-                <a:cs typeface="Calibri" pitchFamily="34" charset="-120"/>
-              </a:rPr>
-              <a:t>✅ Docker Compose 模擬全部服務</a:t>
+                  <a:srgbClr val="2D2926"/>
+                </a:solidFill>
+                <a:latin typeface="Calibri" pitchFamily="34" charset="0"/>
+                <a:ea typeface="Calibri" pitchFamily="34" charset="-122"/>
+                <a:cs typeface="Calibri" pitchFamily="34" charset="-120"/>
+              </a:rPr>
+              <a:t>✅ Docker Compose to replicate all services</a:t>
             </a:r>
             <a:endParaRPr lang="en-US" sz="1050" dirty="0"/>
           </a:p>
@@ -8618,11 +8618,11 @@
             <a:avLst/>
           </a:prstGeom>
           <a:solidFill>
-            <a:srgbClr val="D29922"/>
+            <a:srgbClr val="B8892C"/>
           </a:solidFill>
           <a:ln w="12700">
             <a:solidFill>
-              <a:srgbClr val="D29922"/>
+              <a:srgbClr val="B8892C"/>
             </a:solidFill>
             <a:prstDash val="solid"/>
           </a:ln>
@@ -8655,13 +8655,13 @@
             <a:r>
               <a:rPr lang="en-US" sz="1050" b="1" dirty="0">
                 <a:solidFill>
-                  <a:srgbClr val="E6EDF3"/>
-                </a:solidFill>
-                <a:latin typeface="Calibri" pitchFamily="34" charset="0"/>
-                <a:ea typeface="Calibri" pitchFamily="34" charset="-122"/>
-                <a:cs typeface="Calibri" pitchFamily="34" charset="-120"/>
-              </a:rPr>
-              <a:t>縮短 Dev → Deploy 週期</a:t>
+                  <a:srgbClr val="2D2926"/>
+                </a:solidFill>
+                <a:latin typeface="Calibri" pitchFamily="34" charset="0"/>
+                <a:ea typeface="Calibri" pitchFamily="34" charset="-122"/>
+                <a:cs typeface="Calibri" pitchFamily="34" charset="-120"/>
+              </a:rPr>
+              <a:t>Shorten the Dev → Deploy cycle</a:t>
             </a:r>
             <a:endParaRPr lang="en-US" sz="1050" dirty="0"/>
           </a:p>
@@ -8682,11 +8682,11 @@
             <a:avLst/>
           </a:prstGeom>
           <a:solidFill>
-            <a:srgbClr val="D29922"/>
+            <a:srgbClr val="B8892C"/>
           </a:solidFill>
           <a:ln w="12700">
             <a:solidFill>
-              <a:srgbClr val="D29922"/>
+              <a:srgbClr val="B8892C"/>
             </a:solidFill>
             <a:prstDash val="solid"/>
           </a:ln>
@@ -8719,13 +8719,13 @@
             <a:r>
               <a:rPr lang="en-US" sz="1050" b="1" dirty="0">
                 <a:solidFill>
-                  <a:srgbClr val="E6EDF3"/>
-                </a:solidFill>
-                <a:latin typeface="Calibri" pitchFamily="34" charset="0"/>
-                <a:ea typeface="Calibri" pitchFamily="34" charset="-122"/>
-                <a:cs typeface="Calibri" pitchFamily="34" charset="-120"/>
-              </a:rPr>
-              <a:t>Container 讓 Parity 變容易</a:t>
+                  <a:srgbClr val="2D2926"/>
+                </a:solidFill>
+                <a:latin typeface="Calibri" pitchFamily="34" charset="0"/>
+                <a:ea typeface="Calibri" pitchFamily="34" charset="-122"/>
+                <a:cs typeface="Calibri" pitchFamily="34" charset="-120"/>
+              </a:rPr>
+              <a:t>Containers make parity easy</a:t>
             </a:r>
             <a:endParaRPr lang="en-US" sz="1050" dirty="0"/>
           </a:p>
@@ -8748,11 +8748,11 @@
             </a:avLst>
           </a:prstGeom>
           <a:solidFill>
-            <a:srgbClr val="161B22"/>
+            <a:srgbClr val="F5F1EB"/>
           </a:solidFill>
           <a:ln w="15240">
             <a:solidFill>
-              <a:srgbClr val="6E40C9"/>
+              <a:srgbClr val="8B6AB5"/>
             </a:solidFill>
             <a:prstDash val="solid"/>
           </a:ln>
@@ -8773,11 +8773,11 @@
             <a:avLst/>
           </a:prstGeom>
           <a:solidFill>
-            <a:srgbClr val="1C2128"/>
+            <a:srgbClr val="ECE6DD"/>
           </a:solidFill>
           <a:ln w="12700">
             <a:solidFill>
-              <a:srgbClr val="30363D"/>
+              <a:srgbClr val="D6CCBF"/>
             </a:solidFill>
             <a:prstDash val="solid"/>
           </a:ln>
@@ -8846,7 +8846,7 @@
             <a:r>
               <a:rPr lang="en-US" sz="1200" b="1" dirty="0">
                 <a:solidFill>
-                  <a:srgbClr val="6E40C9"/>
+                  <a:srgbClr val="8B6AB5"/>
                 </a:solidFill>
                 <a:latin typeface="Calibri" pitchFamily="34" charset="0"/>
                 <a:ea typeface="Calibri" pitchFamily="34" charset="-122"/>
@@ -8873,11 +8873,11 @@
             <a:avLst/>
           </a:prstGeom>
           <a:solidFill>
-            <a:srgbClr val="6E40C9"/>
+            <a:srgbClr val="8B6AB5"/>
           </a:solidFill>
           <a:ln w="12700">
             <a:solidFill>
-              <a:srgbClr val="6E40C9"/>
+              <a:srgbClr val="8B6AB5"/>
             </a:solidFill>
             <a:prstDash val="solid"/>
           </a:ln>
@@ -8910,13 +8910,13 @@
             <a:r>
               <a:rPr lang="en-US" sz="1050" b="1" dirty="0">
                 <a:solidFill>
-                  <a:srgbClr val="E6EDF3"/>
-                </a:solidFill>
-                <a:latin typeface="Calibri" pitchFamily="34" charset="0"/>
-                <a:ea typeface="Calibri" pitchFamily="34" charset="-122"/>
-                <a:cs typeface="Calibri" pitchFamily="34" charset="-120"/>
-              </a:rPr>
-              <a:t>Log 輸出到 stdout/stderr</a:t>
+                  <a:srgbClr val="2D2926"/>
+                </a:solidFill>
+                <a:latin typeface="Calibri" pitchFamily="34" charset="0"/>
+                <a:ea typeface="Calibri" pitchFamily="34" charset="-122"/>
+                <a:cs typeface="Calibri" pitchFamily="34" charset="-120"/>
+              </a:rPr>
+              <a:t>Output logs to stdout/stderr</a:t>
             </a:r>
             <a:endParaRPr lang="en-US" sz="1050" dirty="0"/>
           </a:p>
@@ -8937,11 +8937,11 @@
             <a:avLst/>
           </a:prstGeom>
           <a:solidFill>
-            <a:srgbClr val="6E40C9"/>
+            <a:srgbClr val="8B6AB5"/>
           </a:solidFill>
           <a:ln w="12700">
             <a:solidFill>
-              <a:srgbClr val="6E40C9"/>
+              <a:srgbClr val="8B6AB5"/>
             </a:solidFill>
             <a:prstDash val="solid"/>
           </a:ln>
@@ -8974,13 +8974,13 @@
             <a:r>
               <a:rPr lang="en-US" sz="1050" b="1" dirty="0">
                 <a:solidFill>
-                  <a:srgbClr val="E6EDF3"/>
-                </a:solidFill>
-                <a:latin typeface="Calibri" pitchFamily="34" charset="0"/>
-                <a:ea typeface="Calibri" pitchFamily="34" charset="-122"/>
-                <a:cs typeface="Calibri" pitchFamily="34" charset="-120"/>
-              </a:rPr>
-              <a:t>不要自己處理 Log 檔案</a:t>
+                  <a:srgbClr val="2D2926"/>
+                </a:solidFill>
+                <a:latin typeface="Calibri" pitchFamily="34" charset="0"/>
+                <a:ea typeface="Calibri" pitchFamily="34" charset="-122"/>
+                <a:cs typeface="Calibri" pitchFamily="34" charset="-120"/>
+              </a:rPr>
+              <a:t>Don't manage log files yourself</a:t>
             </a:r>
             <a:endParaRPr lang="en-US" sz="1050" dirty="0"/>
           </a:p>
@@ -9001,11 +9001,11 @@
             <a:avLst/>
           </a:prstGeom>
           <a:solidFill>
-            <a:srgbClr val="6E40C9"/>
+            <a:srgbClr val="8B6AB5"/>
           </a:solidFill>
           <a:ln w="12700">
             <a:solidFill>
-              <a:srgbClr val="6E40C9"/>
+              <a:srgbClr val="8B6AB5"/>
             </a:solidFill>
             <a:prstDash val="solid"/>
           </a:ln>
@@ -9038,13 +9038,13 @@
             <a:r>
               <a:rPr lang="en-US" sz="1050" b="1" dirty="0">
                 <a:solidFill>
-                  <a:srgbClr val="E6EDF3"/>
-                </a:solidFill>
-                <a:latin typeface="Calibri" pitchFamily="34" charset="0"/>
-                <a:ea typeface="Calibri" pitchFamily="34" charset="-122"/>
-                <a:cs typeface="Calibri" pitchFamily="34" charset="-120"/>
-              </a:rPr>
-              <a:t>由平台收集 (FluentD, CloudWatch)</a:t>
+                  <a:srgbClr val="2D2926"/>
+                </a:solidFill>
+                <a:latin typeface="Calibri" pitchFamily="34" charset="0"/>
+                <a:ea typeface="Calibri" pitchFamily="34" charset="-122"/>
+                <a:cs typeface="Calibri" pitchFamily="34" charset="-120"/>
+              </a:rPr>
+              <a:t>Let the platform collect them (FluentD, CloudWatch)</a:t>
             </a:r>
             <a:endParaRPr lang="en-US" sz="1050" dirty="0"/>
           </a:p>
@@ -9065,11 +9065,11 @@
             <a:avLst/>
           </a:prstGeom>
           <a:solidFill>
-            <a:srgbClr val="6E40C9"/>
+            <a:srgbClr val="8B6AB5"/>
           </a:solidFill>
           <a:ln w="12700">
             <a:solidFill>
-              <a:srgbClr val="6E40C9"/>
+              <a:srgbClr val="8B6AB5"/>
             </a:solidFill>
             <a:prstDash val="solid"/>
           </a:ln>
@@ -9102,13 +9102,13 @@
             <a:r>
               <a:rPr lang="en-US" sz="1050" b="1" dirty="0">
                 <a:solidFill>
-                  <a:srgbClr val="E6EDF3"/>
-                </a:solidFill>
-                <a:latin typeface="Calibri" pitchFamily="34" charset="0"/>
-                <a:ea typeface="Calibri" pitchFamily="34" charset="-122"/>
-                <a:cs typeface="Calibri" pitchFamily="34" charset="-120"/>
-              </a:rPr>
-              <a:t>結構化 Log (JSON)</a:t>
+                  <a:srgbClr val="2D2926"/>
+                </a:solidFill>
+                <a:latin typeface="Calibri" pitchFamily="34" charset="0"/>
+                <a:ea typeface="Calibri" pitchFamily="34" charset="-122"/>
+                <a:cs typeface="Calibri" pitchFamily="34" charset="-120"/>
+              </a:rPr>
+              <a:t>Structured logs (JSON)</a:t>
             </a:r>
             <a:endParaRPr lang="en-US" sz="1050" dirty="0"/>
           </a:p>
@@ -9141,13 +9141,13 @@
             <a:r>
               <a:rPr lang="en-US" sz="850" dirty="0">
                 <a:solidFill>
-                  <a:srgbClr val="8B949E"/>
-                </a:solidFill>
-                <a:latin typeface="Calibri" pitchFamily="34" charset="0"/>
-                <a:ea typeface="Calibri" pitchFamily="34" charset="-122"/>
-                <a:cs typeface="Calibri" pitchFamily="34" charset="-120"/>
-              </a:rPr>
-              <a:t>方便搜尋與分析</a:t>
+                  <a:srgbClr val="8A8078"/>
+                </a:solidFill>
+                <a:latin typeface="Calibri" pitchFamily="34" charset="0"/>
+                <a:ea typeface="Calibri" pitchFamily="34" charset="-122"/>
+                <a:cs typeface="Calibri" pitchFamily="34" charset="-120"/>
+              </a:rPr>
+              <a:t>Easy to search and analyze</a:t>
             </a:r>
             <a:endParaRPr lang="en-US" sz="850" dirty="0"/>
           </a:p>
@@ -9168,11 +9168,11 @@
             <a:avLst/>
           </a:prstGeom>
           <a:solidFill>
-            <a:srgbClr val="6E40C9"/>
+            <a:srgbClr val="8B6AB5"/>
           </a:solidFill>
           <a:ln w="12700">
             <a:solidFill>
-              <a:srgbClr val="6E40C9"/>
+              <a:srgbClr val="8B6AB5"/>
             </a:solidFill>
             <a:prstDash val="solid"/>
           </a:ln>
@@ -9205,7 +9205,7 @@
             <a:r>
               <a:rPr lang="en-US" sz="1050" b="1" dirty="0">
                 <a:solidFill>
-                  <a:srgbClr val="E6EDF3"/>
+                  <a:srgbClr val="2D2926"/>
                 </a:solidFill>
                 <a:latin typeface="Calibri" pitchFamily="34" charset="0"/>
                 <a:ea typeface="Calibri" pitchFamily="34" charset="-122"/>
@@ -9234,11 +9234,11 @@
             </a:avLst>
           </a:prstGeom>
           <a:solidFill>
-            <a:srgbClr val="161B22"/>
+            <a:srgbClr val="F5F1EB"/>
           </a:solidFill>
           <a:ln w="15240">
             <a:solidFill>
-              <a:srgbClr val="58A6FF"/>
+              <a:srgbClr val="4A7FB5"/>
             </a:solidFill>
             <a:prstDash val="solid"/>
           </a:ln>
@@ -9259,11 +9259,11 @@
             <a:avLst/>
           </a:prstGeom>
           <a:solidFill>
-            <a:srgbClr val="1C2128"/>
+            <a:srgbClr val="ECE6DD"/>
           </a:solidFill>
           <a:ln w="12700">
             <a:solidFill>
-              <a:srgbClr val="30363D"/>
+              <a:srgbClr val="D6CCBF"/>
             </a:solidFill>
             <a:prstDash val="solid"/>
           </a:ln>
@@ -9332,7 +9332,7 @@
             <a:r>
               <a:rPr lang="en-US" sz="1200" b="1" dirty="0">
                 <a:solidFill>
-                  <a:srgbClr val="58A6FF"/>
+                  <a:srgbClr val="4A7FB5"/>
                 </a:solidFill>
                 <a:latin typeface="Calibri" pitchFamily="34" charset="0"/>
                 <a:ea typeface="Calibri" pitchFamily="34" charset="-122"/>
@@ -9359,11 +9359,11 @@
             <a:avLst/>
           </a:prstGeom>
           <a:solidFill>
-            <a:srgbClr val="58A6FF"/>
+            <a:srgbClr val="4A7FB5"/>
           </a:solidFill>
           <a:ln w="12700">
             <a:solidFill>
-              <a:srgbClr val="58A6FF"/>
+              <a:srgbClr val="4A7FB5"/>
             </a:solidFill>
             <a:prstDash val="solid"/>
           </a:ln>
@@ -9396,13 +9396,13 @@
             <a:r>
               <a:rPr lang="en-US" sz="1050" b="1" dirty="0">
                 <a:solidFill>
-                  <a:srgbClr val="E6EDF3"/>
-                </a:solidFill>
-                <a:latin typeface="Calibri" pitchFamily="34" charset="0"/>
-                <a:ea typeface="Calibri" pitchFamily="34" charset="-122"/>
-                <a:cs typeface="Calibri" pitchFamily="34" charset="-120"/>
-              </a:rPr>
-              <a:t>一次性管理任務 = 獨立 Process</a:t>
+                  <a:srgbClr val="2D2926"/>
+                </a:solidFill>
+                <a:latin typeface="Calibri" pitchFamily="34" charset="0"/>
+                <a:ea typeface="Calibri" pitchFamily="34" charset="-122"/>
+                <a:cs typeface="Calibri" pitchFamily="34" charset="-120"/>
+              </a:rPr>
+              <a:t>One-off admin tasks = Separate process</a:t>
             </a:r>
             <a:endParaRPr lang="en-US" sz="1050" dirty="0"/>
           </a:p>
@@ -9423,11 +9423,11 @@
             <a:avLst/>
           </a:prstGeom>
           <a:solidFill>
-            <a:srgbClr val="58A6FF"/>
+            <a:srgbClr val="4A7FB5"/>
           </a:solidFill>
           <a:ln w="12700">
             <a:solidFill>
-              <a:srgbClr val="58A6FF"/>
+              <a:srgbClr val="4A7FB5"/>
             </a:solidFill>
             <a:prstDash val="solid"/>
           </a:ln>
@@ -9460,7 +9460,7 @@
             <a:r>
               <a:rPr lang="en-US" sz="1050" b="1" dirty="0">
                 <a:solidFill>
-                  <a:srgbClr val="E6EDF3"/>
+                  <a:srgbClr val="2D2926"/>
                 </a:solidFill>
                 <a:latin typeface="Calibri" pitchFamily="34" charset="0"/>
                 <a:ea typeface="Calibri" pitchFamily="34" charset="-122"/>
@@ -9487,11 +9487,11 @@
             <a:avLst/>
           </a:prstGeom>
           <a:solidFill>
-            <a:srgbClr val="58A6FF"/>
+            <a:srgbClr val="4A7FB5"/>
           </a:solidFill>
           <a:ln w="12700">
             <a:solidFill>
-              <a:srgbClr val="58A6FF"/>
+              <a:srgbClr val="4A7FB5"/>
             </a:solidFill>
             <a:prstDash val="solid"/>
           </a:ln>
@@ -9524,13 +9524,13 @@
             <a:r>
               <a:rPr lang="en-US" sz="1050" b="1" dirty="0">
                 <a:solidFill>
-                  <a:srgbClr val="E6EDF3"/>
-                </a:solidFill>
-                <a:latin typeface="Calibri" pitchFamily="34" charset="0"/>
-                <a:ea typeface="Calibri" pitchFamily="34" charset="-122"/>
-                <a:cs typeface="Calibri" pitchFamily="34" charset="-120"/>
-              </a:rPr>
-              <a:t>Data Cleanup: 獨立 Job</a:t>
+                  <a:srgbClr val="2D2926"/>
+                </a:solidFill>
+                <a:latin typeface="Calibri" pitchFamily="34" charset="0"/>
+                <a:ea typeface="Calibri" pitchFamily="34" charset="-122"/>
+                <a:cs typeface="Calibri" pitchFamily="34" charset="-120"/>
+              </a:rPr>
+              <a:t>Data Cleanup: Dedicated Job</a:t>
             </a:r>
             <a:endParaRPr lang="en-US" sz="1050" dirty="0"/>
           </a:p>
@@ -9551,11 +9551,11 @@
             <a:avLst/>
           </a:prstGeom>
           <a:solidFill>
-            <a:srgbClr val="58A6FF"/>
+            <a:srgbClr val="4A7FB5"/>
           </a:solidFill>
           <a:ln w="12700">
             <a:solidFill>
-              <a:srgbClr val="58A6FF"/>
+              <a:srgbClr val="4A7FB5"/>
             </a:solidFill>
             <a:prstDash val="solid"/>
           </a:ln>
@@ -9588,13 +9588,13 @@
             <a:r>
               <a:rPr lang="en-US" sz="1050" b="1" dirty="0">
                 <a:solidFill>
-                  <a:srgbClr val="E6EDF3"/>
-                </a:solidFill>
-                <a:latin typeface="Calibri" pitchFamily="34" charset="0"/>
-                <a:ea typeface="Calibri" pitchFamily="34" charset="-122"/>
-                <a:cs typeface="Calibri" pitchFamily="34" charset="-120"/>
-              </a:rPr>
-              <a:t>與 App 一起打包進 Image</a:t>
+                  <a:srgbClr val="2D2926"/>
+                </a:solidFill>
+                <a:latin typeface="Calibri" pitchFamily="34" charset="0"/>
+                <a:ea typeface="Calibri" pitchFamily="34" charset="-122"/>
+                <a:cs typeface="Calibri" pitchFamily="34" charset="-120"/>
+              </a:rPr>
+              <a:t>Package admin scripts into the same Image</a:t>
             </a:r>
             <a:endParaRPr lang="en-US" sz="1050" dirty="0"/>
           </a:p>
@@ -9615,11 +9615,11 @@
             <a:avLst/>
           </a:prstGeom>
           <a:solidFill>
-            <a:srgbClr val="58A6FF"/>
+            <a:srgbClr val="4A7FB5"/>
           </a:solidFill>
           <a:ln w="12700">
             <a:solidFill>
-              <a:srgbClr val="58A6FF"/>
+              <a:srgbClr val="4A7FB5"/>
             </a:solidFill>
             <a:prstDash val="solid"/>
           </a:ln>
@@ -9652,13 +9652,13 @@
             <a:r>
               <a:rPr lang="en-US" sz="1050" b="1" dirty="0">
                 <a:solidFill>
-                  <a:srgbClr val="E6EDF3"/>
-                </a:solidFill>
-                <a:latin typeface="Calibri" pitchFamily="34" charset="0"/>
-                <a:ea typeface="Calibri" pitchFamily="34" charset="-122"/>
-                <a:cs typeface="Calibri" pitchFamily="34" charset="-120"/>
-              </a:rPr>
-              <a:t>❌ 直接 SSH 進 Prod 機器跑</a:t>
+                  <a:srgbClr val="2D2926"/>
+                </a:solidFill>
+                <a:latin typeface="Calibri" pitchFamily="34" charset="0"/>
+                <a:ea typeface="Calibri" pitchFamily="34" charset="-122"/>
+                <a:cs typeface="Calibri" pitchFamily="34" charset="-120"/>
+              </a:rPr>
+              <a:t>❌ SSH into production machines directly</a:t>
             </a:r>
             <a:endParaRPr lang="en-US" sz="1050" dirty="0"/>
           </a:p>
@@ -9681,11 +9681,11 @@
             </a:avLst>
           </a:prstGeom>
           <a:solidFill>
-            <a:srgbClr val="0A1929"/>
+            <a:srgbClr val="EAF0F7"/>
           </a:solidFill>
           <a:ln w="9525">
             <a:solidFill>
-              <a:srgbClr val="58A6FF"/>
+              <a:srgbClr val="4A7FB5"/>
             </a:solidFill>
             <a:prstDash val="solid"/>
           </a:ln>
@@ -9718,13 +9718,13 @@
             <a:r>
               <a:rPr lang="en-US" sz="1000" i="1" dirty="0">
                 <a:solidFill>
-                  <a:srgbClr val="8B949E"/>
-                </a:solidFill>
-                <a:latin typeface="Calibri" pitchFamily="34" charset="0"/>
-                <a:ea typeface="Calibri" pitchFamily="34" charset="-122"/>
-                <a:cs typeface="Calibri" pitchFamily="34" charset="-120"/>
-              </a:rPr>
-              <a:t>💡  Logs as streams (Factor 11) 讓 ELK Stack / CloudWatch 可以集中管理所有 Container 的 log</a:t>
+                  <a:srgbClr val="8A8078"/>
+                </a:solidFill>
+                <a:latin typeface="Calibri" pitchFamily="34" charset="0"/>
+                <a:ea typeface="Calibri" pitchFamily="34" charset="-122"/>
+                <a:cs typeface="Calibri" pitchFamily="34" charset="-120"/>
+              </a:rPr>
+              <a:t>💡  Logs as streams (Factor 11) enables ELK Stack / CloudWatch to centrally manage all container logs</a:t>
             </a:r>
             <a:endParaRPr lang="en-US" sz="1000" dirty="0"/>
           </a:p>
@@ -9744,7 +9744,7 @@
     <p:bg>
       <p:bgPr>
         <a:solidFill>
-          <a:srgbClr val="0D1117"/>
+          <a:srgbClr val="FFFDF8"/>
         </a:solidFill>
       </p:bgPr>
     </p:bg>
@@ -9777,11 +9777,11 @@
             <a:avLst/>
           </a:prstGeom>
           <a:solidFill>
-            <a:srgbClr val="161B22"/>
+            <a:srgbClr val="F5F1EB"/>
           </a:solidFill>
           <a:ln w="6350">
             <a:solidFill>
-              <a:srgbClr val="30363D"/>
+              <a:srgbClr val="D6CCBF"/>
             </a:solidFill>
             <a:prstDash val="solid"/>
           </a:ln>
@@ -9802,11 +9802,11 @@
             <a:avLst/>
           </a:prstGeom>
           <a:solidFill>
-            <a:srgbClr val="0D8A6C"/>
+            <a:srgbClr val="4A9B8E"/>
           </a:solidFill>
           <a:ln w="12700">
             <a:solidFill>
-              <a:srgbClr val="0D8A6C"/>
+              <a:srgbClr val="4A9B8E"/>
             </a:solidFill>
             <a:prstDash val="solid"/>
           </a:ln>
@@ -9839,13 +9839,13 @@
             <a:r>
               <a:rPr lang="en-US" sz="1600" b="1" dirty="0">
                 <a:solidFill>
-                  <a:srgbClr val="E6EDF3"/>
-                </a:solidFill>
-                <a:latin typeface="Calibri" pitchFamily="34" charset="0"/>
-                <a:ea typeface="Calibri" pitchFamily="34" charset="-122"/>
-                <a:cs typeface="Calibri" pitchFamily="34" charset="-120"/>
-              </a:rPr>
-              <a:t>Container 天然符合 12-Factor App 原則</a:t>
+                  <a:srgbClr val="2D2926"/>
+                </a:solidFill>
+                <a:latin typeface="Calibri" pitchFamily="34" charset="0"/>
+                <a:ea typeface="Calibri" pitchFamily="34" charset="-122"/>
+                <a:cs typeface="Calibri" pitchFamily="34" charset="-120"/>
+              </a:rPr>
+              <a:t>Containers Naturally Align with 12-Factor App Principles</a:t>
             </a:r>
             <a:endParaRPr lang="en-US" sz="1600" dirty="0"/>
           </a:p>
@@ -9878,13 +9878,13 @@
             <a:r>
               <a:rPr lang="en-US" sz="850" dirty="0">
                 <a:solidFill>
-                  <a:srgbClr val="8B949E"/>
-                </a:solidFill>
-                <a:latin typeface="Calibri" pitchFamily="34" charset="0"/>
-                <a:ea typeface="Calibri" pitchFamily="34" charset="-122"/>
-                <a:cs typeface="Calibri" pitchFamily="34" charset="-120"/>
-              </a:rPr>
-              <a:t>PART 4  ·  32 / 50</a:t>
+                  <a:srgbClr val="8A8078"/>
+                </a:solidFill>
+                <a:latin typeface="Calibri" pitchFamily="34" charset="0"/>
+                <a:ea typeface="Calibri" pitchFamily="34" charset="-122"/>
+                <a:cs typeface="Calibri" pitchFamily="34" charset="-120"/>
+              </a:rPr>
+              <a:t>PART 4</a:t>
             </a:r>
             <a:endParaRPr lang="en-US" sz="850" dirty="0"/>
           </a:p>
@@ -9907,11 +9907,11 @@
             </a:avLst>
           </a:prstGeom>
           <a:solidFill>
-            <a:srgbClr val="1C2128"/>
+            <a:srgbClr val="ECE6DD"/>
           </a:solidFill>
           <a:ln w="10160">
             <a:solidFill>
-              <a:srgbClr val="30363D"/>
+              <a:srgbClr val="D6CCBF"/>
             </a:solidFill>
             <a:prstDash val="solid"/>
           </a:ln>
@@ -9944,7 +9944,7 @@
             <a:r>
               <a:rPr lang="en-US" sz="950" b="1" dirty="0">
                 <a:solidFill>
-                  <a:srgbClr val="8B949E"/>
+                  <a:srgbClr val="8A8078"/>
                 </a:solidFill>
                 <a:latin typeface="Calibri" pitchFamily="34" charset="0"/>
                 <a:ea typeface="Calibri" pitchFamily="34" charset="-122"/>
@@ -9983,13 +9983,13 @@
             <a:r>
               <a:rPr lang="en-US" sz="950" b="1" dirty="0">
                 <a:solidFill>
-                  <a:srgbClr val="8B949E"/>
-                </a:solidFill>
-                <a:latin typeface="Calibri" pitchFamily="34" charset="0"/>
-                <a:ea typeface="Calibri" pitchFamily="34" charset="-122"/>
-                <a:cs typeface="Calibri" pitchFamily="34" charset="-120"/>
-              </a:rPr>
-              <a:t>Container / Docker 的支援</a:t>
+                  <a:srgbClr val="8A8078"/>
+                </a:solidFill>
+                <a:latin typeface="Calibri" pitchFamily="34" charset="0"/>
+                <a:ea typeface="Calibri" pitchFamily="34" charset="-122"/>
+                <a:cs typeface="Calibri" pitchFamily="34" charset="-120"/>
+              </a:rPr>
+              <a:t>Container / Docker Support</a:t>
             </a:r>
             <a:endParaRPr lang="en-US" sz="950" dirty="0"/>
           </a:p>
@@ -10022,13 +10022,13 @@
             <a:r>
               <a:rPr lang="en-US" sz="950" b="1" dirty="0">
                 <a:solidFill>
-                  <a:srgbClr val="8B949E"/>
-                </a:solidFill>
-                <a:latin typeface="Calibri" pitchFamily="34" charset="0"/>
-                <a:ea typeface="Calibri" pitchFamily="34" charset="-122"/>
-                <a:cs typeface="Calibri" pitchFamily="34" charset="-120"/>
-              </a:rPr>
-              <a:t>程度</a:t>
+                  <a:srgbClr val="8A8078"/>
+                </a:solidFill>
+                <a:latin typeface="Calibri" pitchFamily="34" charset="0"/>
+                <a:ea typeface="Calibri" pitchFamily="34" charset="-122"/>
+                <a:cs typeface="Calibri" pitchFamily="34" charset="-120"/>
+              </a:rPr>
+              <a:t>Level</a:t>
             </a:r>
             <a:endParaRPr lang="en-US" sz="950" dirty="0"/>
           </a:p>
@@ -10051,11 +10051,11 @@
             </a:avLst>
           </a:prstGeom>
           <a:solidFill>
-            <a:srgbClr val="161B22"/>
+            <a:srgbClr val="F5F1EB"/>
           </a:solidFill>
           <a:ln w="5080">
             <a:solidFill>
-              <a:srgbClr val="30363D"/>
+              <a:srgbClr val="D6CCBF"/>
             </a:solidFill>
             <a:prstDash val="solid"/>
           </a:ln>
@@ -10088,7 +10088,7 @@
             <a:r>
               <a:rPr lang="en-US" sz="950" b="1" dirty="0">
                 <a:solidFill>
-                  <a:srgbClr val="58A6FF"/>
+                  <a:srgbClr val="4A7FB5"/>
                 </a:solidFill>
                 <a:latin typeface="Calibri" pitchFamily="34" charset="0"/>
                 <a:ea typeface="Calibri" pitchFamily="34" charset="-122"/>
@@ -10127,7 +10127,7 @@
             <a:r>
               <a:rPr lang="en-US" sz="900" dirty="0">
                 <a:solidFill>
-                  <a:srgbClr val="E6EDF3"/>
+                  <a:srgbClr val="2D2926"/>
                 </a:solidFill>
                 <a:latin typeface="Calibri" pitchFamily="34" charset="0"/>
                 <a:ea typeface="Calibri" pitchFamily="34" charset="-122"/>
@@ -10166,7 +10166,7 @@
             <a:r>
               <a:rPr lang="en-US" sz="1200" dirty="0">
                 <a:solidFill>
-                  <a:srgbClr val="3FB950"/>
+                  <a:srgbClr val="4A9968"/>
                 </a:solidFill>
                 <a:latin typeface="Calibri" pitchFamily="34" charset="0"/>
                 <a:ea typeface="Calibri" pitchFamily="34" charset="-122"/>
@@ -10195,11 +10195,11 @@
             </a:avLst>
           </a:prstGeom>
           <a:solidFill>
-            <a:srgbClr val="0D1117"/>
+            <a:srgbClr val="FFFDF8"/>
           </a:solidFill>
           <a:ln w="5080">
             <a:solidFill>
-              <a:srgbClr val="30363D"/>
+              <a:srgbClr val="D6CCBF"/>
             </a:solidFill>
             <a:prstDash val="solid"/>
           </a:ln>
@@ -10232,7 +10232,7 @@
             <a:r>
               <a:rPr lang="en-US" sz="950" b="1" dirty="0">
                 <a:solidFill>
-                  <a:srgbClr val="58A6FF"/>
+                  <a:srgbClr val="4A7FB5"/>
                 </a:solidFill>
                 <a:latin typeface="Calibri" pitchFamily="34" charset="0"/>
                 <a:ea typeface="Calibri" pitchFamily="34" charset="-122"/>
@@ -10271,7 +10271,7 @@
             <a:r>
               <a:rPr lang="en-US" sz="900" dirty="0">
                 <a:solidFill>
-                  <a:srgbClr val="E6EDF3"/>
+                  <a:srgbClr val="2D2926"/>
                 </a:solidFill>
                 <a:latin typeface="Calibri" pitchFamily="34" charset="0"/>
                 <a:ea typeface="Calibri" pitchFamily="34" charset="-122"/>
@@ -10310,7 +10310,7 @@
             <a:r>
               <a:rPr lang="en-US" sz="1200" dirty="0">
                 <a:solidFill>
-                  <a:srgbClr val="3FB950"/>
+                  <a:srgbClr val="4A9968"/>
                 </a:solidFill>
                 <a:latin typeface="Calibri" pitchFamily="34" charset="0"/>
                 <a:ea typeface="Calibri" pitchFamily="34" charset="-122"/>
@@ -10339,11 +10339,11 @@
             </a:avLst>
           </a:prstGeom>
           <a:solidFill>
-            <a:srgbClr val="161B22"/>
+            <a:srgbClr val="F5F1EB"/>
           </a:solidFill>
           <a:ln w="5080">
             <a:solidFill>
-              <a:srgbClr val="30363D"/>
+              <a:srgbClr val="D6CCBF"/>
             </a:solidFill>
             <a:prstDash val="solid"/>
           </a:ln>
@@ -10376,7 +10376,7 @@
             <a:r>
               <a:rPr lang="en-US" sz="950" b="1" dirty="0">
                 <a:solidFill>
-                  <a:srgbClr val="58A6FF"/>
+                  <a:srgbClr val="4A7FB5"/>
                 </a:solidFill>
                 <a:latin typeface="Calibri" pitchFamily="34" charset="0"/>
                 <a:ea typeface="Calibri" pitchFamily="34" charset="-122"/>
@@ -10415,7 +10415,7 @@
             <a:r>
               <a:rPr lang="en-US" sz="900" dirty="0">
                 <a:solidFill>
-                  <a:srgbClr val="E6EDF3"/>
+                  <a:srgbClr val="2D2926"/>
                 </a:solidFill>
                 <a:latin typeface="Calibri" pitchFamily="34" charset="0"/>
                 <a:ea typeface="Calibri" pitchFamily="34" charset="-122"/>
@@ -10454,7 +10454,7 @@
             <a:r>
               <a:rPr lang="en-US" sz="1200" dirty="0">
                 <a:solidFill>
-                  <a:srgbClr val="3FB950"/>
+                  <a:srgbClr val="4A9968"/>
                 </a:solidFill>
                 <a:latin typeface="Calibri" pitchFamily="34" charset="0"/>
                 <a:ea typeface="Calibri" pitchFamily="34" charset="-122"/>
@@ -10483,11 +10483,11 @@
             </a:avLst>
           </a:prstGeom>
           <a:solidFill>
-            <a:srgbClr val="0D1117"/>
+            <a:srgbClr val="FFFDF8"/>
           </a:solidFill>
           <a:ln w="5080">
             <a:solidFill>
-              <a:srgbClr val="30363D"/>
+              <a:srgbClr val="D6CCBF"/>
             </a:solidFill>
             <a:prstDash val="solid"/>
           </a:ln>
@@ -10520,7 +10520,7 @@
             <a:r>
               <a:rPr lang="en-US" sz="950" b="1" dirty="0">
                 <a:solidFill>
-                  <a:srgbClr val="E36209"/>
+                  <a:srgbClr val="C4804A"/>
                 </a:solidFill>
                 <a:latin typeface="Calibri" pitchFamily="34" charset="0"/>
                 <a:ea typeface="Calibri" pitchFamily="34" charset="-122"/>
@@ -10559,7 +10559,7 @@
             <a:r>
               <a:rPr lang="en-US" sz="900" dirty="0">
                 <a:solidFill>
-                  <a:srgbClr val="E6EDF3"/>
+                  <a:srgbClr val="2D2926"/>
                 </a:solidFill>
                 <a:latin typeface="Calibri" pitchFamily="34" charset="0"/>
                 <a:ea typeface="Calibri" pitchFamily="34" charset="-122"/>
@@ -10598,7 +10598,7 @@
             <a:r>
               <a:rPr lang="en-US" sz="1200" dirty="0">
                 <a:solidFill>
-                  <a:srgbClr val="3FB950"/>
+                  <a:srgbClr val="4A9968"/>
                 </a:solidFill>
                 <a:latin typeface="Calibri" pitchFamily="34" charset="0"/>
                 <a:ea typeface="Calibri" pitchFamily="34" charset="-122"/>
@@ -10627,11 +10627,11 @@
             </a:avLst>
           </a:prstGeom>
           <a:solidFill>
-            <a:srgbClr val="161B22"/>
+            <a:srgbClr val="F5F1EB"/>
           </a:solidFill>
           <a:ln w="5080">
             <a:solidFill>
-              <a:srgbClr val="30363D"/>
+              <a:srgbClr val="D6CCBF"/>
             </a:solidFill>
             <a:prstDash val="solid"/>
           </a:ln>
@@ -10664,7 +10664,7 @@
             <a:r>
               <a:rPr lang="en-US" sz="950" b="1" dirty="0">
                 <a:solidFill>
-                  <a:srgbClr val="6E40C9"/>
+                  <a:srgbClr val="8B6AB5"/>
                 </a:solidFill>
                 <a:latin typeface="Calibri" pitchFamily="34" charset="0"/>
                 <a:ea typeface="Calibri" pitchFamily="34" charset="-122"/>
@@ -10703,7 +10703,7 @@
             <a:r>
               <a:rPr lang="en-US" sz="900" dirty="0">
                 <a:solidFill>
-                  <a:srgbClr val="E6EDF3"/>
+                  <a:srgbClr val="2D2926"/>
                 </a:solidFill>
                 <a:latin typeface="Calibri" pitchFamily="34" charset="0"/>
                 <a:ea typeface="Calibri" pitchFamily="34" charset="-122"/>
@@ -10742,7 +10742,7 @@
             <a:r>
               <a:rPr lang="en-US" sz="1200" dirty="0">
                 <a:solidFill>
-                  <a:srgbClr val="3FB950"/>
+                  <a:srgbClr val="4A9968"/>
                 </a:solidFill>
                 <a:latin typeface="Calibri" pitchFamily="34" charset="0"/>
                 <a:ea typeface="Calibri" pitchFamily="34" charset="-122"/>
@@ -10771,11 +10771,11 @@
             </a:avLst>
           </a:prstGeom>
           <a:solidFill>
-            <a:srgbClr val="0D1117"/>
+            <a:srgbClr val="FFFDF8"/>
           </a:solidFill>
           <a:ln w="5080">
             <a:solidFill>
-              <a:srgbClr val="30363D"/>
+              <a:srgbClr val="D6CCBF"/>
             </a:solidFill>
             <a:prstDash val="solid"/>
           </a:ln>
@@ -10808,7 +10808,7 @@
             <a:r>
               <a:rPr lang="en-US" sz="950" b="1" dirty="0">
                 <a:solidFill>
-                  <a:srgbClr val="6E40C9"/>
+                  <a:srgbClr val="8B6AB5"/>
                 </a:solidFill>
                 <a:latin typeface="Calibri" pitchFamily="34" charset="0"/>
                 <a:ea typeface="Calibri" pitchFamily="34" charset="-122"/>
@@ -10847,7 +10847,7 @@
             <a:r>
               <a:rPr lang="en-US" sz="900" dirty="0">
                 <a:solidFill>
-                  <a:srgbClr val="E6EDF3"/>
+                  <a:srgbClr val="2D2926"/>
                 </a:solidFill>
                 <a:latin typeface="Calibri" pitchFamily="34" charset="0"/>
                 <a:ea typeface="Calibri" pitchFamily="34" charset="-122"/>
@@ -10886,7 +10886,7 @@
             <a:r>
               <a:rPr lang="en-US" sz="1200" dirty="0">
                 <a:solidFill>
-                  <a:srgbClr val="3FB950"/>
+                  <a:srgbClr val="4A9968"/>
                 </a:solidFill>
                 <a:latin typeface="Calibri" pitchFamily="34" charset="0"/>
                 <a:ea typeface="Calibri" pitchFamily="34" charset="-122"/>
@@ -10915,11 +10915,11 @@
             </a:avLst>
           </a:prstGeom>
           <a:solidFill>
-            <a:srgbClr val="161B22"/>
+            <a:srgbClr val="F5F1EB"/>
           </a:solidFill>
           <a:ln w="5080">
             <a:solidFill>
-              <a:srgbClr val="30363D"/>
+              <a:srgbClr val="D6CCBF"/>
             </a:solidFill>
             <a:prstDash val="solid"/>
           </a:ln>
@@ -10952,7 +10952,7 @@
             <a:r>
               <a:rPr lang="en-US" sz="950" b="1" dirty="0">
                 <a:solidFill>
-                  <a:srgbClr val="1F6FEB"/>
+                  <a:srgbClr val="5B8DB8"/>
                 </a:solidFill>
                 <a:latin typeface="Calibri" pitchFamily="34" charset="0"/>
                 <a:ea typeface="Calibri" pitchFamily="34" charset="-122"/>
@@ -10991,7 +10991,7 @@
             <a:r>
               <a:rPr lang="en-US" sz="900" dirty="0">
                 <a:solidFill>
-                  <a:srgbClr val="E6EDF3"/>
+                  <a:srgbClr val="2D2926"/>
                 </a:solidFill>
                 <a:latin typeface="Calibri" pitchFamily="34" charset="0"/>
                 <a:ea typeface="Calibri" pitchFamily="34" charset="-122"/>
@@ -11030,7 +11030,7 @@
             <a:r>
               <a:rPr lang="en-US" sz="1200" dirty="0">
                 <a:solidFill>
-                  <a:srgbClr val="3FB950"/>
+                  <a:srgbClr val="4A9968"/>
                 </a:solidFill>
                 <a:latin typeface="Calibri" pitchFamily="34" charset="0"/>
                 <a:ea typeface="Calibri" pitchFamily="34" charset="-122"/>
@@ -11059,11 +11059,11 @@
             </a:avLst>
           </a:prstGeom>
           <a:solidFill>
-            <a:srgbClr val="0D1117"/>
+            <a:srgbClr val="FFFDF8"/>
           </a:solidFill>
           <a:ln w="5080">
             <a:solidFill>
-              <a:srgbClr val="30363D"/>
+              <a:srgbClr val="D6CCBF"/>
             </a:solidFill>
             <a:prstDash val="solid"/>
           </a:ln>
@@ -11096,7 +11096,7 @@
             <a:r>
               <a:rPr lang="en-US" sz="950" b="1" dirty="0">
                 <a:solidFill>
-                  <a:srgbClr val="58A6FF"/>
+                  <a:srgbClr val="4A7FB5"/>
                 </a:solidFill>
                 <a:latin typeface="Calibri" pitchFamily="34" charset="0"/>
                 <a:ea typeface="Calibri" pitchFamily="34" charset="-122"/>
@@ -11135,7 +11135,7 @@
             <a:r>
               <a:rPr lang="en-US" sz="900" dirty="0">
                 <a:solidFill>
-                  <a:srgbClr val="E6EDF3"/>
+                  <a:srgbClr val="2D2926"/>
                 </a:solidFill>
                 <a:latin typeface="Calibri" pitchFamily="34" charset="0"/>
                 <a:ea typeface="Calibri" pitchFamily="34" charset="-122"/>
@@ -11174,7 +11174,7 @@
             <a:r>
               <a:rPr lang="en-US" sz="1200" dirty="0">
                 <a:solidFill>
-                  <a:srgbClr val="3FB950"/>
+                  <a:srgbClr val="4A9968"/>
                 </a:solidFill>
                 <a:latin typeface="Calibri" pitchFamily="34" charset="0"/>
                 <a:ea typeface="Calibri" pitchFamily="34" charset="-122"/>
@@ -11203,11 +11203,11 @@
             </a:avLst>
           </a:prstGeom>
           <a:solidFill>
-            <a:srgbClr val="161B22"/>
+            <a:srgbClr val="F5F1EB"/>
           </a:solidFill>
           <a:ln w="5080">
             <a:solidFill>
-              <a:srgbClr val="30363D"/>
+              <a:srgbClr val="D6CCBF"/>
             </a:solidFill>
             <a:prstDash val="solid"/>
           </a:ln>
@@ -11240,7 +11240,7 @@
             <a:r>
               <a:rPr lang="en-US" sz="950" b="1" dirty="0">
                 <a:solidFill>
-                  <a:srgbClr val="3FB950"/>
+                  <a:srgbClr val="4A9968"/>
                 </a:solidFill>
                 <a:latin typeface="Calibri" pitchFamily="34" charset="0"/>
                 <a:ea typeface="Calibri" pitchFamily="34" charset="-122"/>
@@ -11279,13 +11279,13 @@
             <a:r>
               <a:rPr lang="en-US" sz="900" dirty="0">
                 <a:solidFill>
-                  <a:srgbClr val="E6EDF3"/>
-                </a:solidFill>
-                <a:latin typeface="Calibri" pitchFamily="34" charset="0"/>
-                <a:ea typeface="Calibri" pitchFamily="34" charset="-122"/>
-                <a:cs typeface="Calibri" pitchFamily="34" charset="-120"/>
-              </a:rPr>
-              <a:t>Container 快速啟動/關閉</a:t>
+                  <a:srgbClr val="2D2926"/>
+                </a:solidFill>
+                <a:latin typeface="Calibri" pitchFamily="34" charset="0"/>
+                <a:ea typeface="Calibri" pitchFamily="34" charset="-122"/>
+                <a:cs typeface="Calibri" pitchFamily="34" charset="-120"/>
+              </a:rPr>
+              <a:t>Containers start/stop quickly</a:t>
             </a:r>
             <a:endParaRPr lang="en-US" sz="900" dirty="0"/>
           </a:p>
@@ -11318,7 +11318,7 @@
             <a:r>
               <a:rPr lang="en-US" sz="1200" dirty="0">
                 <a:solidFill>
-                  <a:srgbClr val="3FB950"/>
+                  <a:srgbClr val="4A9968"/>
                 </a:solidFill>
                 <a:latin typeface="Calibri" pitchFamily="34" charset="0"/>
                 <a:ea typeface="Calibri" pitchFamily="34" charset="-122"/>
@@ -11347,11 +11347,11 @@
             </a:avLst>
           </a:prstGeom>
           <a:solidFill>
-            <a:srgbClr val="0D1117"/>
+            <a:srgbClr val="FFFDF8"/>
           </a:solidFill>
           <a:ln w="5080">
             <a:solidFill>
-              <a:srgbClr val="30363D"/>
+              <a:srgbClr val="D6CCBF"/>
             </a:solidFill>
             <a:prstDash val="solid"/>
           </a:ln>
@@ -11384,7 +11384,7 @@
             <a:r>
               <a:rPr lang="en-US" sz="950" b="1" dirty="0">
                 <a:solidFill>
-                  <a:srgbClr val="D29922"/>
+                  <a:srgbClr val="B8892C"/>
                 </a:solidFill>
                 <a:latin typeface="Calibri" pitchFamily="34" charset="0"/>
                 <a:ea typeface="Calibri" pitchFamily="34" charset="-122"/>
@@ -11423,13 +11423,13 @@
             <a:r>
               <a:rPr lang="en-US" sz="900" dirty="0">
                 <a:solidFill>
-                  <a:srgbClr val="E6EDF3"/>
-                </a:solidFill>
-                <a:latin typeface="Calibri" pitchFamily="34" charset="0"/>
-                <a:ea typeface="Calibri" pitchFamily="34" charset="-122"/>
-                <a:cs typeface="Calibri" pitchFamily="34" charset="-120"/>
-              </a:rPr>
-              <a:t>同一個 Image，環境一致</a:t>
+                  <a:srgbClr val="2D2926"/>
+                </a:solidFill>
+                <a:latin typeface="Calibri" pitchFamily="34" charset="0"/>
+                <a:ea typeface="Calibri" pitchFamily="34" charset="-122"/>
+                <a:cs typeface="Calibri" pitchFamily="34" charset="-120"/>
+              </a:rPr>
+              <a:t>Same image, consistent environments</a:t>
             </a:r>
             <a:endParaRPr lang="en-US" sz="900" dirty="0"/>
           </a:p>
@@ -11462,7 +11462,7 @@
             <a:r>
               <a:rPr lang="en-US" sz="1200" dirty="0">
                 <a:solidFill>
-                  <a:srgbClr val="3FB950"/>
+                  <a:srgbClr val="4A9968"/>
                 </a:solidFill>
                 <a:latin typeface="Calibri" pitchFamily="34" charset="0"/>
                 <a:ea typeface="Calibri" pitchFamily="34" charset="-122"/>
@@ -11491,11 +11491,11 @@
             </a:avLst>
           </a:prstGeom>
           <a:solidFill>
-            <a:srgbClr val="161B22"/>
+            <a:srgbClr val="F5F1EB"/>
           </a:solidFill>
           <a:ln w="5080">
             <a:solidFill>
-              <a:srgbClr val="30363D"/>
+              <a:srgbClr val="D6CCBF"/>
             </a:solidFill>
             <a:prstDash val="solid"/>
           </a:ln>
@@ -11528,7 +11528,7 @@
             <a:r>
               <a:rPr lang="en-US" sz="950" b="1" dirty="0">
                 <a:solidFill>
-                  <a:srgbClr val="D29922"/>
+                  <a:srgbClr val="B8892C"/>
                 </a:solidFill>
                 <a:latin typeface="Calibri" pitchFamily="34" charset="0"/>
                 <a:ea typeface="Calibri" pitchFamily="34" charset="-122"/>
@@ -11567,7 +11567,7 @@
             <a:r>
               <a:rPr lang="en-US" sz="900" dirty="0">
                 <a:solidFill>
-                  <a:srgbClr val="E6EDF3"/>
+                  <a:srgbClr val="2D2926"/>
                 </a:solidFill>
                 <a:latin typeface="Calibri" pitchFamily="34" charset="0"/>
                 <a:ea typeface="Calibri" pitchFamily="34" charset="-122"/>
@@ -11606,7 +11606,7 @@
             <a:r>
               <a:rPr lang="en-US" sz="1200" dirty="0">
                 <a:solidFill>
-                  <a:srgbClr val="3FB950"/>
+                  <a:srgbClr val="4A9968"/>
                 </a:solidFill>
                 <a:latin typeface="Calibri" pitchFamily="34" charset="0"/>
                 <a:ea typeface="Calibri" pitchFamily="34" charset="-122"/>
@@ -11635,11 +11635,11 @@
             </a:avLst>
           </a:prstGeom>
           <a:solidFill>
-            <a:srgbClr val="0D1117"/>
+            <a:srgbClr val="FFFDF8"/>
           </a:solidFill>
           <a:ln w="5080">
             <a:solidFill>
-              <a:srgbClr val="30363D"/>
+              <a:srgbClr val="D6CCBF"/>
             </a:solidFill>
             <a:prstDash val="solid"/>
           </a:ln>
@@ -11672,7 +11672,7 @@
             <a:r>
               <a:rPr lang="en-US" sz="950" b="1" dirty="0">
                 <a:solidFill>
-                  <a:srgbClr val="58A6FF"/>
+                  <a:srgbClr val="4A7FB5"/>
                 </a:solidFill>
                 <a:latin typeface="Calibri" pitchFamily="34" charset="0"/>
                 <a:ea typeface="Calibri" pitchFamily="34" charset="-122"/>
@@ -11711,7 +11711,7 @@
             <a:r>
               <a:rPr lang="en-US" sz="900" dirty="0">
                 <a:solidFill>
-                  <a:srgbClr val="E6EDF3"/>
+                  <a:srgbClr val="2D2926"/>
                 </a:solidFill>
                 <a:latin typeface="Calibri" pitchFamily="34" charset="0"/>
                 <a:ea typeface="Calibri" pitchFamily="34" charset="-122"/>
@@ -11750,7 +11750,7 @@
             <a:r>
               <a:rPr lang="en-US" sz="1200" dirty="0">
                 <a:solidFill>
-                  <a:srgbClr val="3FB950"/>
+                  <a:srgbClr val="4A9968"/>
                 </a:solidFill>
                 <a:latin typeface="Calibri" pitchFamily="34" charset="0"/>
                 <a:ea typeface="Calibri" pitchFamily="34" charset="-122"/>
@@ -11779,11 +11779,11 @@
             </a:avLst>
           </a:prstGeom>
           <a:solidFill>
-            <a:srgbClr val="0A1929"/>
+            <a:srgbClr val="EAF0F7"/>
           </a:solidFill>
           <a:ln w="9525">
             <a:solidFill>
-              <a:srgbClr val="58A6FF"/>
+              <a:srgbClr val="4A7FB5"/>
             </a:solidFill>
             <a:prstDash val="solid"/>
           </a:ln>
@@ -11816,13 +11816,13 @@
             <a:r>
               <a:rPr lang="en-US" sz="1000" i="1" dirty="0">
                 <a:solidFill>
-                  <a:srgbClr val="8B949E"/>
-                </a:solidFill>
-                <a:latin typeface="Calibri" pitchFamily="34" charset="0"/>
-                <a:ea typeface="Calibri" pitchFamily="34" charset="-122"/>
-                <a:cs typeface="Calibri" pitchFamily="34" charset="-120"/>
-              </a:rPr>
-              <a:t>💡  Container 不只解決了環境一致問題 — 它幾乎完美地支援了所有 12-Factor App 的原則</a:t>
+                  <a:srgbClr val="8A8078"/>
+                </a:solidFill>
+                <a:latin typeface="Calibri" pitchFamily="34" charset="0"/>
+                <a:ea typeface="Calibri" pitchFamily="34" charset="-122"/>
+                <a:cs typeface="Calibri" pitchFamily="34" charset="-120"/>
+              </a:rPr>
+              <a:t>💡  Containers don't just solve environment consistency — they nearly perfectly support all 12-Factor App principles</a:t>
             </a:r>
             <a:endParaRPr lang="en-US" sz="1000" dirty="0"/>
           </a:p>
@@ -11842,7 +11842,7 @@
     <p:bg>
       <p:bgPr>
         <a:solidFill>
-          <a:srgbClr val="0D1117"/>
+          <a:srgbClr val="FFFDF8"/>
         </a:solidFill>
       </p:bgPr>
     </p:bg>
@@ -11875,11 +11875,11 @@
             <a:avLst/>
           </a:prstGeom>
           <a:solidFill>
-            <a:srgbClr val="161B22"/>
+            <a:srgbClr val="F5F1EB"/>
           </a:solidFill>
           <a:ln w="6350">
             <a:solidFill>
-              <a:srgbClr val="30363D"/>
+              <a:srgbClr val="D6CCBF"/>
             </a:solidFill>
             <a:prstDash val="solid"/>
           </a:ln>
@@ -11900,11 +11900,11 @@
             <a:avLst/>
           </a:prstGeom>
           <a:solidFill>
-            <a:srgbClr val="0D8A6C"/>
+            <a:srgbClr val="4A9B8E"/>
           </a:solidFill>
           <a:ln w="12700">
             <a:solidFill>
-              <a:srgbClr val="0D8A6C"/>
+              <a:srgbClr val="4A9B8E"/>
             </a:solidFill>
             <a:prstDash val="solid"/>
           </a:ln>
@@ -11937,13 +11937,13 @@
             <a:r>
               <a:rPr lang="en-US" sz="1600" b="1" dirty="0">
                 <a:solidFill>
-                  <a:srgbClr val="E6EDF3"/>
-                </a:solidFill>
-                <a:latin typeface="Calibri" pitchFamily="34" charset="0"/>
-                <a:ea typeface="Calibri" pitchFamily="34" charset="-122"/>
-                <a:cs typeface="Calibri" pitchFamily="34" charset="-120"/>
-              </a:rPr>
-              <a:t>12-Factor 實戰：一個符合規範的 FastAPI Service</a:t>
+                  <a:srgbClr val="2D2926"/>
+                </a:solidFill>
+                <a:latin typeface="Calibri" pitchFamily="34" charset="0"/>
+                <a:ea typeface="Calibri" pitchFamily="34" charset="-122"/>
+                <a:cs typeface="Calibri" pitchFamily="34" charset="-120"/>
+              </a:rPr>
+              <a:t>12-Factor in Practice: A Compliant FastAPI Service</a:t>
             </a:r>
             <a:endParaRPr lang="en-US" sz="1600" dirty="0"/>
           </a:p>
@@ -11976,13 +11976,13 @@
             <a:r>
               <a:rPr lang="en-US" sz="850" dirty="0">
                 <a:solidFill>
-                  <a:srgbClr val="8B949E"/>
-                </a:solidFill>
-                <a:latin typeface="Calibri" pitchFamily="34" charset="0"/>
-                <a:ea typeface="Calibri" pitchFamily="34" charset="-122"/>
-                <a:cs typeface="Calibri" pitchFamily="34" charset="-120"/>
-              </a:rPr>
-              <a:t>PART 4  ·  33 / 50</a:t>
+                  <a:srgbClr val="8A8078"/>
+                </a:solidFill>
+                <a:latin typeface="Calibri" pitchFamily="34" charset="0"/>
+                <a:ea typeface="Calibri" pitchFamily="34" charset="-122"/>
+                <a:cs typeface="Calibri" pitchFamily="34" charset="-120"/>
+              </a:rPr>
+              <a:t>PART 4</a:t>
             </a:r>
             <a:endParaRPr lang="en-US" sz="850" dirty="0"/>
           </a:p>
@@ -12005,18 +12005,18 @@
             </a:avLst>
           </a:prstGeom>
           <a:solidFill>
-            <a:srgbClr val="0D1117"/>
+            <a:srgbClr val="2D2926"/>
           </a:solidFill>
           <a:ln w="12700">
             <a:solidFill>
-              <a:srgbClr val="30363D"/>
+              <a:srgbClr val="D6CCBF"/>
             </a:solidFill>
             <a:prstDash val="solid"/>
           </a:ln>
           <a:effectLst>
             <a:outerShdw sx="100000" sy="100000" kx="0" ky="0" algn="bl" rotWithShape="0" blurRad="127000" dist="50800" dir="2700000">
-              <a:srgbClr val="000000">
-                <a:alpha val="50000"/>
+              <a:srgbClr val="9E9488">
+                <a:alpha val="15000"/>
               </a:srgbClr>
             </a:outerShdw>
           </a:effectLst>
@@ -12039,11 +12039,11 @@
             </a:avLst>
           </a:prstGeom>
           <a:solidFill>
-            <a:srgbClr val="1C2128"/>
+            <a:srgbClr val="ECE6DD"/>
           </a:solidFill>
           <a:ln w="6350">
             <a:solidFill>
-              <a:srgbClr val="30363D"/>
+              <a:srgbClr val="D6CCBF"/>
             </a:solidFill>
             <a:prstDash val="solid"/>
           </a:ln>
@@ -12076,7 +12076,7 @@
             <a:r>
               <a:rPr lang="en-US" sz="800" b="1" dirty="0">
                 <a:solidFill>
-                  <a:srgbClr val="8B949E"/>
+                  <a:srgbClr val="8A8078"/>
                 </a:solidFill>
                 <a:latin typeface="Consolas" pitchFamily="34" charset="0"/>
                 <a:ea typeface="Consolas" pitchFamily="34" charset="-122"/>
@@ -12118,7 +12118,7 @@
             <a:r>
               <a:rPr lang="en-US" sz="950" dirty="0">
                 <a:solidFill>
-                  <a:srgbClr val="E6EDF3"/>
+                  <a:srgbClr val="2D2926"/>
                 </a:solidFill>
                 <a:latin typeface="Consolas" pitchFamily="34" charset="0"/>
                 <a:ea typeface="Consolas" pitchFamily="34" charset="-122"/>
@@ -12138,7 +12138,7 @@
             <a:r>
               <a:rPr lang="en-US" sz="950" dirty="0">
                 <a:solidFill>
-                  <a:srgbClr val="E6EDF3"/>
+                  <a:srgbClr val="2D2926"/>
                 </a:solidFill>
                 <a:latin typeface="Consolas" pitchFamily="34" charset="0"/>
                 <a:ea typeface="Consolas" pitchFamily="34" charset="-122"/>
@@ -12167,7 +12167,7 @@
             <a:r>
               <a:rPr lang="en-US" sz="950" dirty="0">
                 <a:solidFill>
-                  <a:srgbClr val="E6EDF3"/>
+                  <a:srgbClr val="2D2926"/>
                 </a:solidFill>
                 <a:latin typeface="Consolas" pitchFamily="34" charset="0"/>
                 <a:ea typeface="Consolas" pitchFamily="34" charset="-122"/>
@@ -12187,7 +12187,7 @@
             <a:r>
               <a:rPr lang="en-US" sz="950" dirty="0">
                 <a:solidFill>
-                  <a:srgbClr val="E6EDF3"/>
+                  <a:srgbClr val="2D2926"/>
                 </a:solidFill>
                 <a:latin typeface="Consolas" pitchFamily="34" charset="0"/>
                 <a:ea typeface="Consolas" pitchFamily="34" charset="-122"/>
@@ -12216,7 +12216,7 @@
             <a:r>
               <a:rPr lang="en-US" sz="950" dirty="0">
                 <a:solidFill>
-                  <a:srgbClr val="E6EDF3"/>
+                  <a:srgbClr val="2D2926"/>
                 </a:solidFill>
                 <a:latin typeface="Consolas" pitchFamily="34" charset="0"/>
                 <a:ea typeface="Consolas" pitchFamily="34" charset="-122"/>
@@ -12236,7 +12236,7 @@
             <a:r>
               <a:rPr lang="en-US" sz="950" dirty="0">
                 <a:solidFill>
-                  <a:srgbClr val="E6EDF3"/>
+                  <a:srgbClr val="2D2926"/>
                 </a:solidFill>
                 <a:latin typeface="Consolas" pitchFamily="34" charset="0"/>
                 <a:ea typeface="Consolas" pitchFamily="34" charset="-122"/>
@@ -12256,7 +12256,7 @@
             <a:r>
               <a:rPr lang="en-US" sz="950" dirty="0">
                 <a:solidFill>
-                  <a:srgbClr val="E6EDF3"/>
+                  <a:srgbClr val="2D2926"/>
                 </a:solidFill>
                 <a:latin typeface="Consolas" pitchFamily="34" charset="0"/>
                 <a:ea typeface="Consolas" pitchFamily="34" charset="-122"/>
@@ -12285,18 +12285,18 @@
             </a:avLst>
           </a:prstGeom>
           <a:solidFill>
-            <a:srgbClr val="0D1117"/>
+            <a:srgbClr val="2D2926"/>
           </a:solidFill>
           <a:ln w="12700">
             <a:solidFill>
-              <a:srgbClr val="30363D"/>
+              <a:srgbClr val="D6CCBF"/>
             </a:solidFill>
             <a:prstDash val="solid"/>
           </a:ln>
           <a:effectLst>
             <a:outerShdw sx="100000" sy="100000" kx="0" ky="0" algn="bl" rotWithShape="0" blurRad="127000" dist="50800" dir="2700000">
-              <a:srgbClr val="000000">
-                <a:alpha val="50000"/>
+              <a:srgbClr val="9E9488">
+                <a:alpha val="15000"/>
               </a:srgbClr>
             </a:outerShdw>
           </a:effectLst>
@@ -12319,11 +12319,11 @@
             </a:avLst>
           </a:prstGeom>
           <a:solidFill>
-            <a:srgbClr val="1C2128"/>
+            <a:srgbClr val="ECE6DD"/>
           </a:solidFill>
           <a:ln w="6350">
             <a:solidFill>
-              <a:srgbClr val="30363D"/>
+              <a:srgbClr val="D6CCBF"/>
             </a:solidFill>
             <a:prstDash val="solid"/>
           </a:ln>
@@ -12356,7 +12356,7 @@
             <a:r>
               <a:rPr lang="en-US" sz="800" b="1" dirty="0">
                 <a:solidFill>
-                  <a:srgbClr val="8B949E"/>
+                  <a:srgbClr val="8A8078"/>
                 </a:solidFill>
                 <a:latin typeface="Consolas" pitchFamily="34" charset="0"/>
                 <a:ea typeface="Consolas" pitchFamily="34" charset="-122"/>
@@ -12398,7 +12398,7 @@
             <a:r>
               <a:rPr lang="en-US" sz="950" dirty="0">
                 <a:solidFill>
-                  <a:srgbClr val="E6EDF3"/>
+                  <a:srgbClr val="2D2926"/>
                 </a:solidFill>
                 <a:latin typeface="Consolas" pitchFamily="34" charset="0"/>
                 <a:ea typeface="Consolas" pitchFamily="34" charset="-122"/>
@@ -12418,7 +12418,7 @@
             <a:r>
               <a:rPr lang="en-US" sz="950" dirty="0">
                 <a:solidFill>
-                  <a:srgbClr val="E6EDF3"/>
+                  <a:srgbClr val="2D2926"/>
                 </a:solidFill>
                 <a:latin typeface="Consolas" pitchFamily="34" charset="0"/>
                 <a:ea typeface="Consolas" pitchFamily="34" charset="-122"/>
@@ -12438,7 +12438,7 @@
             <a:r>
               <a:rPr lang="en-US" sz="950" dirty="0">
                 <a:solidFill>
-                  <a:srgbClr val="E6EDF3"/>
+                  <a:srgbClr val="2D2926"/>
                 </a:solidFill>
                 <a:latin typeface="Consolas" pitchFamily="34" charset="0"/>
                 <a:ea typeface="Consolas" pitchFamily="34" charset="-122"/>
@@ -12458,7 +12458,7 @@
             <a:r>
               <a:rPr lang="en-US" sz="950" dirty="0">
                 <a:solidFill>
-                  <a:srgbClr val="E6EDF3"/>
+                  <a:srgbClr val="2D2926"/>
                 </a:solidFill>
                 <a:latin typeface="Consolas" pitchFamily="34" charset="0"/>
                 <a:ea typeface="Consolas" pitchFamily="34" charset="-122"/>
@@ -12478,7 +12478,7 @@
             <a:r>
               <a:rPr lang="en-US" sz="950" dirty="0">
                 <a:solidFill>
-                  <a:srgbClr val="E6EDF3"/>
+                  <a:srgbClr val="2D2926"/>
                 </a:solidFill>
                 <a:latin typeface="Consolas" pitchFamily="34" charset="0"/>
                 <a:ea typeface="Consolas" pitchFamily="34" charset="-122"/>
@@ -12498,7 +12498,7 @@
             <a:r>
               <a:rPr lang="en-US" sz="950" dirty="0">
                 <a:solidFill>
-                  <a:srgbClr val="E6EDF3"/>
+                  <a:srgbClr val="2D2926"/>
                 </a:solidFill>
                 <a:latin typeface="Consolas" pitchFamily="34" charset="0"/>
                 <a:ea typeface="Consolas" pitchFamily="34" charset="-122"/>
@@ -12518,7 +12518,7 @@
             <a:r>
               <a:rPr lang="en-US" sz="950" dirty="0">
                 <a:solidFill>
-                  <a:srgbClr val="E6EDF3"/>
+                  <a:srgbClr val="2D2926"/>
                 </a:solidFill>
                 <a:latin typeface="Consolas" pitchFamily="34" charset="0"/>
                 <a:ea typeface="Consolas" pitchFamily="34" charset="-122"/>
@@ -12547,18 +12547,18 @@
             </a:avLst>
           </a:prstGeom>
           <a:solidFill>
-            <a:srgbClr val="0D1117"/>
+            <a:srgbClr val="2D2926"/>
           </a:solidFill>
           <a:ln w="12700">
             <a:solidFill>
-              <a:srgbClr val="30363D"/>
+              <a:srgbClr val="D6CCBF"/>
             </a:solidFill>
             <a:prstDash val="solid"/>
           </a:ln>
           <a:effectLst>
             <a:outerShdw sx="100000" sy="100000" kx="0" ky="0" algn="bl" rotWithShape="0" blurRad="127000" dist="50800" dir="2700000">
-              <a:srgbClr val="000000">
-                <a:alpha val="50000"/>
+              <a:srgbClr val="9E9488">
+                <a:alpha val="15000"/>
               </a:srgbClr>
             </a:outerShdw>
           </a:effectLst>
@@ -12581,11 +12581,11 @@
             </a:avLst>
           </a:prstGeom>
           <a:solidFill>
-            <a:srgbClr val="1C2128"/>
+            <a:srgbClr val="ECE6DD"/>
           </a:solidFill>
           <a:ln w="6350">
             <a:solidFill>
-              <a:srgbClr val="30363D"/>
+              <a:srgbClr val="D6CCBF"/>
             </a:solidFill>
             <a:prstDash val="solid"/>
           </a:ln>
@@ -12618,7 +12618,7 @@
             <a:r>
               <a:rPr lang="en-US" sz="800" b="1" dirty="0">
                 <a:solidFill>
-                  <a:srgbClr val="8B949E"/>
+                  <a:srgbClr val="8A8078"/>
                 </a:solidFill>
                 <a:latin typeface="Consolas" pitchFamily="34" charset="0"/>
                 <a:ea typeface="Consolas" pitchFamily="34" charset="-122"/>
@@ -12660,7 +12660,7 @@
             <a:r>
               <a:rPr lang="en-US" sz="950" dirty="0">
                 <a:solidFill>
-                  <a:srgbClr val="E6EDF3"/>
+                  <a:srgbClr val="2D2926"/>
                 </a:solidFill>
                 <a:latin typeface="Consolas" pitchFamily="34" charset="0"/>
                 <a:ea typeface="Consolas" pitchFamily="34" charset="-122"/>
@@ -12680,7 +12680,7 @@
             <a:r>
               <a:rPr lang="en-US" sz="950" dirty="0">
                 <a:solidFill>
-                  <a:srgbClr val="E6EDF3"/>
+                  <a:srgbClr val="2D2926"/>
                 </a:solidFill>
                 <a:latin typeface="Consolas" pitchFamily="34" charset="0"/>
                 <a:ea typeface="Consolas" pitchFamily="34" charset="-122"/>
@@ -12700,7 +12700,7 @@
             <a:r>
               <a:rPr lang="en-US" sz="950" dirty="0">
                 <a:solidFill>
-                  <a:srgbClr val="E6EDF3"/>
+                  <a:srgbClr val="2D2926"/>
                 </a:solidFill>
                 <a:latin typeface="Consolas" pitchFamily="34" charset="0"/>
                 <a:ea typeface="Consolas" pitchFamily="34" charset="-122"/>
@@ -12720,7 +12720,7 @@
             <a:r>
               <a:rPr lang="en-US" sz="950" dirty="0">
                 <a:solidFill>
-                  <a:srgbClr val="E6EDF3"/>
+                  <a:srgbClr val="2D2926"/>
                 </a:solidFill>
                 <a:latin typeface="Consolas" pitchFamily="34" charset="0"/>
                 <a:ea typeface="Consolas" pitchFamily="34" charset="-122"/>
@@ -12740,7 +12740,7 @@
             <a:r>
               <a:rPr lang="en-US" sz="950" dirty="0">
                 <a:solidFill>
-                  <a:srgbClr val="E6EDF3"/>
+                  <a:srgbClr val="2D2926"/>
                 </a:solidFill>
                 <a:latin typeface="Consolas" pitchFamily="34" charset="0"/>
                 <a:ea typeface="Consolas" pitchFamily="34" charset="-122"/>
@@ -12760,7 +12760,7 @@
             <a:r>
               <a:rPr lang="en-US" sz="950" dirty="0">
                 <a:solidFill>
-                  <a:srgbClr val="E6EDF3"/>
+                  <a:srgbClr val="2D2926"/>
                 </a:solidFill>
                 <a:latin typeface="Consolas" pitchFamily="34" charset="0"/>
                 <a:ea typeface="Consolas" pitchFamily="34" charset="-122"/>
@@ -12780,7 +12780,7 @@
             <a:r>
               <a:rPr lang="en-US" sz="950" dirty="0">
                 <a:solidFill>
-                  <a:srgbClr val="E6EDF3"/>
+                  <a:srgbClr val="2D2926"/>
                 </a:solidFill>
                 <a:latin typeface="Consolas" pitchFamily="34" charset="0"/>
                 <a:ea typeface="Consolas" pitchFamily="34" charset="-122"/>
@@ -12800,7 +12800,7 @@
             <a:r>
               <a:rPr lang="en-US" sz="950" dirty="0">
                 <a:solidFill>
-                  <a:srgbClr val="E6EDF3"/>
+                  <a:srgbClr val="2D2926"/>
                 </a:solidFill>
                 <a:latin typeface="Consolas" pitchFamily="34" charset="0"/>
                 <a:ea typeface="Consolas" pitchFamily="34" charset="-122"/>
@@ -12820,7 +12820,7 @@
             <a:r>
               <a:rPr lang="en-US" sz="950" dirty="0">
                 <a:solidFill>
-                  <a:srgbClr val="E6EDF3"/>
+                  <a:srgbClr val="2D2926"/>
                 </a:solidFill>
                 <a:latin typeface="Consolas" pitchFamily="34" charset="0"/>
                 <a:ea typeface="Consolas" pitchFamily="34" charset="-122"/>
@@ -12859,13 +12859,13 @@
             <a:r>
               <a:rPr lang="en-US" sz="1300" b="1" dirty="0">
                 <a:solidFill>
-                  <a:srgbClr val="58A6FF"/>
-                </a:solidFill>
-                <a:latin typeface="Calibri" pitchFamily="34" charset="0"/>
-                <a:ea typeface="Calibri" pitchFamily="34" charset="-122"/>
-                <a:cs typeface="Calibri" pitchFamily="34" charset="-120"/>
-              </a:rPr>
-              <a:t>遵循了哪些 Factor？</a:t>
+                  <a:srgbClr val="4A7FB5"/>
+                </a:solidFill>
+                <a:latin typeface="Calibri" pitchFamily="34" charset="0"/>
+                <a:ea typeface="Calibri" pitchFamily="34" charset="-122"/>
+                <a:cs typeface="Calibri" pitchFamily="34" charset="-120"/>
+              </a:rPr>
+              <a:t>Which Factors are covered?</a:t>
             </a:r>
             <a:endParaRPr lang="en-US" sz="1300" dirty="0"/>
           </a:p>
@@ -12888,11 +12888,11 @@
             </a:avLst>
           </a:prstGeom>
           <a:solidFill>
-            <a:srgbClr val="0F2A1A"/>
+            <a:srgbClr val="E5F0E9"/>
           </a:solidFill>
           <a:ln w="12700">
             <a:solidFill>
-              <a:srgbClr val="3FB950"/>
+              <a:srgbClr val="4A9968"/>
             </a:solidFill>
             <a:prstDash val="solid"/>
           </a:ln>
@@ -12925,13 +12925,13 @@
             <a:r>
               <a:rPr lang="en-US" sz="900" b="1" dirty="0">
                 <a:solidFill>
-                  <a:srgbClr val="3FB950"/>
-                </a:solidFill>
-                <a:latin typeface="Calibri" pitchFamily="34" charset="0"/>
-                <a:ea typeface="Calibri" pitchFamily="34" charset="-122"/>
-                <a:cs typeface="Calibri" pitchFamily="34" charset="-120"/>
-              </a:rPr>
-              <a:t>✅ Factor 2 — 依賴宣告</a:t>
+                  <a:srgbClr val="4A9968"/>
+                </a:solidFill>
+                <a:latin typeface="Calibri" pitchFamily="34" charset="0"/>
+                <a:ea typeface="Calibri" pitchFamily="34" charset="-122"/>
+                <a:cs typeface="Calibri" pitchFamily="34" charset="-120"/>
+              </a:rPr>
+              <a:t>✅ Factor 2 — Dep Declaration</a:t>
             </a:r>
             <a:endParaRPr lang="en-US" sz="900" dirty="0"/>
           </a:p>
@@ -12954,11 +12954,11 @@
             </a:avLst>
           </a:prstGeom>
           <a:solidFill>
-            <a:srgbClr val="0F2A1A"/>
+            <a:srgbClr val="E5F0E9"/>
           </a:solidFill>
           <a:ln w="12700">
             <a:solidFill>
-              <a:srgbClr val="3FB950"/>
+              <a:srgbClr val="4A9968"/>
             </a:solidFill>
             <a:prstDash val="solid"/>
           </a:ln>
@@ -12991,13 +12991,13 @@
             <a:r>
               <a:rPr lang="en-US" sz="900" b="1" dirty="0">
                 <a:solidFill>
-                  <a:srgbClr val="3FB950"/>
-                </a:solidFill>
-                <a:latin typeface="Calibri" pitchFamily="34" charset="0"/>
-                <a:ea typeface="Calibri" pitchFamily="34" charset="-122"/>
-                <a:cs typeface="Calibri" pitchFamily="34" charset="-120"/>
-              </a:rPr>
-              <a:t>✅ Factor 3 — Config 環境變數</a:t>
+                  <a:srgbClr val="4A9968"/>
+                </a:solidFill>
+                <a:latin typeface="Calibri" pitchFamily="34" charset="0"/>
+                <a:ea typeface="Calibri" pitchFamily="34" charset="-122"/>
+                <a:cs typeface="Calibri" pitchFamily="34" charset="-120"/>
+              </a:rPr>
+              <a:t>✅ Factor 3 — Config via Env Vars</a:t>
             </a:r>
             <a:endParaRPr lang="en-US" sz="900" dirty="0"/>
           </a:p>
@@ -13020,11 +13020,11 @@
             </a:avLst>
           </a:prstGeom>
           <a:solidFill>
-            <a:srgbClr val="0F2A1A"/>
+            <a:srgbClr val="E5F0E9"/>
           </a:solidFill>
           <a:ln w="12700">
             <a:solidFill>
-              <a:srgbClr val="3FB950"/>
+              <a:srgbClr val="4A9968"/>
             </a:solidFill>
             <a:prstDash val="solid"/>
           </a:ln>
@@ -13057,7 +13057,7 @@
             <a:r>
               <a:rPr lang="en-US" sz="900" b="1" dirty="0">
                 <a:solidFill>
-                  <a:srgbClr val="3FB950"/>
+                  <a:srgbClr val="4A9968"/>
                 </a:solidFill>
                 <a:latin typeface="Calibri" pitchFamily="34" charset="0"/>
                 <a:ea typeface="Calibri" pitchFamily="34" charset="-122"/>
@@ -13086,11 +13086,11 @@
             </a:avLst>
           </a:prstGeom>
           <a:solidFill>
-            <a:srgbClr val="0F2A1A"/>
+            <a:srgbClr val="E5F0E9"/>
           </a:solidFill>
           <a:ln w="12700">
             <a:solidFill>
-              <a:srgbClr val="3FB950"/>
+              <a:srgbClr val="4A9968"/>
             </a:solidFill>
             <a:prstDash val="solid"/>
           </a:ln>
@@ -13123,13 +13123,13 @@
             <a:r>
               <a:rPr lang="en-US" sz="900" b="1" dirty="0">
                 <a:solidFill>
-                  <a:srgbClr val="3FB950"/>
-                </a:solidFill>
-                <a:latin typeface="Calibri" pitchFamily="34" charset="0"/>
-                <a:ea typeface="Calibri" pitchFamily="34" charset="-122"/>
-                <a:cs typeface="Calibri" pitchFamily="34" charset="-120"/>
-              </a:rPr>
-              <a:t>✅ Factor 9 — 快速啟動</a:t>
+                  <a:srgbClr val="4A9968"/>
+                </a:solidFill>
+                <a:latin typeface="Calibri" pitchFamily="34" charset="0"/>
+                <a:ea typeface="Calibri" pitchFamily="34" charset="-122"/>
+                <a:cs typeface="Calibri" pitchFamily="34" charset="-120"/>
+              </a:rPr>
+              <a:t>✅ Factor 9 — Fast Startup</a:t>
             </a:r>
             <a:endParaRPr lang="en-US" sz="900" dirty="0"/>
           </a:p>
@@ -13152,11 +13152,11 @@
             </a:avLst>
           </a:prstGeom>
           <a:solidFill>
-            <a:srgbClr val="0F2A1A"/>
+            <a:srgbClr val="E5F0E9"/>
           </a:solidFill>
           <a:ln w="12700">
             <a:solidFill>
-              <a:srgbClr val="3FB950"/>
+              <a:srgbClr val="4A9968"/>
             </a:solidFill>
             <a:prstDash val="solid"/>
           </a:ln>
@@ -13189,7 +13189,7 @@
             <a:r>
               <a:rPr lang="en-US" sz="900" b="1" dirty="0">
                 <a:solidFill>
-                  <a:srgbClr val="3FB950"/>
+                  <a:srgbClr val="4A9968"/>
                 </a:solidFill>
                 <a:latin typeface="Calibri" pitchFamily="34" charset="0"/>
                 <a:ea typeface="Calibri" pitchFamily="34" charset="-122"/>
@@ -13218,11 +13218,11 @@
             </a:avLst>
           </a:prstGeom>
           <a:solidFill>
-            <a:srgbClr val="0F2A1A"/>
+            <a:srgbClr val="E5F0E9"/>
           </a:solidFill>
           <a:ln w="12700">
             <a:solidFill>
-              <a:srgbClr val="3FB950"/>
+              <a:srgbClr val="4A9968"/>
             </a:solidFill>
             <a:prstDash val="solid"/>
           </a:ln>
@@ -13255,7 +13255,7 @@
             <a:r>
               <a:rPr lang="en-US" sz="900" b="1" dirty="0">
                 <a:solidFill>
-                  <a:srgbClr val="3FB950"/>
+                  <a:srgbClr val="4A9968"/>
                 </a:solidFill>
                 <a:latin typeface="Calibri" pitchFamily="34" charset="0"/>
                 <a:ea typeface="Calibri" pitchFamily="34" charset="-122"/>
@@ -13284,11 +13284,11 @@
             </a:avLst>
           </a:prstGeom>
           <a:solidFill>
-            <a:srgbClr val="0F2A1A"/>
+            <a:srgbClr val="E5F0E9"/>
           </a:solidFill>
           <a:ln w="12700">
             <a:solidFill>
-              <a:srgbClr val="3FB950"/>
+              <a:srgbClr val="4A9968"/>
             </a:solidFill>
             <a:prstDash val="solid"/>
           </a:ln>
@@ -13321,7 +13321,7 @@
             <a:r>
               <a:rPr lang="en-US" sz="900" b="1" dirty="0">
                 <a:solidFill>
-                  <a:srgbClr val="3FB950"/>
+                  <a:srgbClr val="4A9968"/>
                 </a:solidFill>
                 <a:latin typeface="Calibri" pitchFamily="34" charset="0"/>
                 <a:ea typeface="Calibri" pitchFamily="34" charset="-122"/>
@@ -13350,11 +13350,11 @@
             </a:avLst>
           </a:prstGeom>
           <a:solidFill>
-            <a:srgbClr val="0F2A1A"/>
+            <a:srgbClr val="E5F0E9"/>
           </a:solidFill>
           <a:ln w="12700">
             <a:solidFill>
-              <a:srgbClr val="3FB950"/>
+              <a:srgbClr val="4A9968"/>
             </a:solidFill>
             <a:prstDash val="solid"/>
           </a:ln>
@@ -13387,7 +13387,7 @@
             <a:r>
               <a:rPr lang="en-US" sz="900" b="1" dirty="0">
                 <a:solidFill>
-                  <a:srgbClr val="3FB950"/>
+                  <a:srgbClr val="4A9968"/>
                 </a:solidFill>
                 <a:latin typeface="Calibri" pitchFamily="34" charset="0"/>
                 <a:ea typeface="Calibri" pitchFamily="34" charset="-122"/>
@@ -13416,11 +13416,11 @@
             </a:avLst>
           </a:prstGeom>
           <a:solidFill>
-            <a:srgbClr val="0A1929"/>
+            <a:srgbClr val="EAF0F7"/>
           </a:solidFill>
           <a:ln w="9525">
             <a:solidFill>
-              <a:srgbClr val="58A6FF"/>
+              <a:srgbClr val="4A7FB5"/>
             </a:solidFill>
             <a:prstDash val="solid"/>
           </a:ln>
@@ -13453,13 +13453,13 @@
             <a:r>
               <a:rPr lang="en-US" sz="1000" i="1" dirty="0">
                 <a:solidFill>
-                  <a:srgbClr val="8B949E"/>
-                </a:solidFill>
-                <a:latin typeface="Calibri" pitchFamily="34" charset="0"/>
-                <a:ea typeface="Calibri" pitchFamily="34" charset="-122"/>
-                <a:cs typeface="Calibri" pitchFamily="34" charset="-120"/>
-              </a:rPr>
-              <a:t>💡  一個符合 12-Factor 的 App 天然就是 Container-ready — 這就是現代 Cloud Native 應用的標配</a:t>
+                  <a:srgbClr val="8A8078"/>
+                </a:solidFill>
+                <a:latin typeface="Calibri" pitchFamily="34" charset="0"/>
+                <a:ea typeface="Calibri" pitchFamily="34" charset="-122"/>
+                <a:cs typeface="Calibri" pitchFamily="34" charset="-120"/>
+              </a:rPr>
+              <a:t>💡  A 12-Factor compliant app is inherently container-ready — this is the standard for modern Cloud Native applications</a:t>
             </a:r>
             <a:endParaRPr lang="en-US" sz="1000" dirty="0"/>
           </a:p>
@@ -13479,7 +13479,7 @@
     <p:bg>
       <p:bgPr>
         <a:solidFill>
-          <a:srgbClr val="0D1117"/>
+          <a:srgbClr val="FFFDF8"/>
         </a:solidFill>
       </p:bgPr>
     </p:bg>
@@ -13512,11 +13512,11 @@
             <a:avLst/>
           </a:prstGeom>
           <a:solidFill>
-            <a:srgbClr val="161B22"/>
+            <a:srgbClr val="F5F1EB"/>
           </a:solidFill>
           <a:ln w="6350">
             <a:solidFill>
-              <a:srgbClr val="30363D"/>
+              <a:srgbClr val="D6CCBF"/>
             </a:solidFill>
             <a:prstDash val="solid"/>
           </a:ln>
@@ -13537,11 +13537,11 @@
             <a:avLst/>
           </a:prstGeom>
           <a:solidFill>
-            <a:srgbClr val="58A6FF"/>
+            <a:srgbClr val="4A7FB5"/>
           </a:solidFill>
           <a:ln w="12700">
             <a:solidFill>
-              <a:srgbClr val="58A6FF"/>
+              <a:srgbClr val="4A7FB5"/>
             </a:solidFill>
             <a:prstDash val="solid"/>
           </a:ln>
@@ -13574,13 +13574,13 @@
             <a:r>
               <a:rPr lang="en-US" sz="1600" b="1" dirty="0">
                 <a:solidFill>
-                  <a:srgbClr val="E6EDF3"/>
-                </a:solidFill>
-                <a:latin typeface="Calibri" pitchFamily="34" charset="0"/>
-                <a:ea typeface="Calibri" pitchFamily="34" charset="-122"/>
-                <a:cs typeface="Calibri" pitchFamily="34" charset="-120"/>
-              </a:rPr>
-              <a:t>Part 4 小結：設計優良的 Cloud Native 應用</a:t>
+                  <a:srgbClr val="2D2926"/>
+                </a:solidFill>
+                <a:latin typeface="Calibri" pitchFamily="34" charset="0"/>
+                <a:ea typeface="Calibri" pitchFamily="34" charset="-122"/>
+                <a:cs typeface="Calibri" pitchFamily="34" charset="-120"/>
+              </a:rPr>
+              <a:t>Part 4 Summary: Well-Designed Cloud Native Applications</a:t>
             </a:r>
             <a:endParaRPr lang="en-US" sz="1600" dirty="0"/>
           </a:p>
@@ -13613,13 +13613,13 @@
             <a:r>
               <a:rPr lang="en-US" sz="850" dirty="0">
                 <a:solidFill>
-                  <a:srgbClr val="8B949E"/>
-                </a:solidFill>
-                <a:latin typeface="Calibri" pitchFamily="34" charset="0"/>
-                <a:ea typeface="Calibri" pitchFamily="34" charset="-122"/>
-                <a:cs typeface="Calibri" pitchFamily="34" charset="-120"/>
-              </a:rPr>
-              <a:t>PART 4  ·  34 / 50</a:t>
+                  <a:srgbClr val="8A8078"/>
+                </a:solidFill>
+                <a:latin typeface="Calibri" pitchFamily="34" charset="0"/>
+                <a:ea typeface="Calibri" pitchFamily="34" charset="-122"/>
+                <a:cs typeface="Calibri" pitchFamily="34" charset="-120"/>
+              </a:rPr>
+              <a:t>PART 4</a:t>
             </a:r>
             <a:endParaRPr lang="en-US" sz="850" dirty="0"/>
           </a:p>
@@ -13642,18 +13642,18 @@
             </a:avLst>
           </a:prstGeom>
           <a:solidFill>
-            <a:srgbClr val="161B22"/>
+            <a:srgbClr val="F5F1EB"/>
           </a:solidFill>
           <a:ln w="15240">
             <a:solidFill>
-              <a:srgbClr val="58A6FF"/>
+              <a:srgbClr val="4A7FB5"/>
             </a:solidFill>
             <a:prstDash val="solid"/>
           </a:ln>
           <a:effectLst>
             <a:outerShdw sx="100000" sy="100000" kx="0" ky="0" algn="bl" rotWithShape="0" blurRad="76200" dist="25400" dir="2700000">
-              <a:srgbClr val="000000">
-                <a:alpha val="30000"/>
+              <a:srgbClr val="9E9488">
+                <a:alpha val="15000"/>
               </a:srgbClr>
             </a:outerShdw>
           </a:effectLst>
@@ -13722,13 +13722,13 @@
             <a:r>
               <a:rPr lang="en-US" sz="1100" b="1" dirty="0">
                 <a:solidFill>
-                  <a:srgbClr val="58A6FF"/>
-                </a:solidFill>
-                <a:latin typeface="Calibri" pitchFamily="34" charset="0"/>
-                <a:ea typeface="Calibri" pitchFamily="34" charset="-122"/>
-                <a:cs typeface="Calibri" pitchFamily="34" charset="-120"/>
-              </a:rPr>
-              <a:t>12-Factor App 不是規定，是智慧結晶</a:t>
+                  <a:srgbClr val="4A7FB5"/>
+                </a:solidFill>
+                <a:latin typeface="Calibri" pitchFamily="34" charset="0"/>
+                <a:ea typeface="Calibri" pitchFamily="34" charset="-122"/>
+                <a:cs typeface="Calibri" pitchFamily="34" charset="-120"/>
+              </a:rPr>
+              <a:t>12-Factor App: Not Rules, but Distilled Wisdom</a:t>
             </a:r>
             <a:endParaRPr lang="en-US" sz="1100" dirty="0"/>
           </a:p>
@@ -13761,13 +13761,13 @@
             <a:r>
               <a:rPr lang="en-US" sz="900" dirty="0">
                 <a:solidFill>
-                  <a:srgbClr val="8B949E"/>
-                </a:solidFill>
-                <a:latin typeface="Calibri" pitchFamily="34" charset="0"/>
-                <a:ea typeface="Calibri" pitchFamily="34" charset="-122"/>
-                <a:cs typeface="Calibri" pitchFamily="34" charset="-120"/>
-              </a:rPr>
-              <a:t>• Heroku 從數百個應用中提煉的最佳實踐</a:t>
+                  <a:srgbClr val="8A8078"/>
+                </a:solidFill>
+                <a:latin typeface="Calibri" pitchFamily="34" charset="0"/>
+                <a:ea typeface="Calibri" pitchFamily="34" charset="-122"/>
+                <a:cs typeface="Calibri" pitchFamily="34" charset="-120"/>
+              </a:rPr>
+              <a:t>• Best practices distilled from hundreds of apps by Heroku</a:t>
             </a:r>
             <a:endParaRPr lang="en-US" sz="900" dirty="0"/>
           </a:p>
@@ -13800,13 +13800,13 @@
             <a:r>
               <a:rPr lang="en-US" sz="900" dirty="0">
                 <a:solidFill>
-                  <a:srgbClr val="8B949E"/>
-                </a:solidFill>
-                <a:latin typeface="Calibri" pitchFamily="34" charset="0"/>
-                <a:ea typeface="Calibri" pitchFamily="34" charset="-122"/>
-                <a:cs typeface="Calibri" pitchFamily="34" charset="-120"/>
-              </a:rPr>
-              <a:t>• 每一條都解決了真實的工程痛點</a:t>
+                  <a:srgbClr val="8A8078"/>
+                </a:solidFill>
+                <a:latin typeface="Calibri" pitchFamily="34" charset="0"/>
+                <a:ea typeface="Calibri" pitchFamily="34" charset="-122"/>
+                <a:cs typeface="Calibri" pitchFamily="34" charset="-120"/>
+              </a:rPr>
+              <a:t>• Each factor addresses a real-world engineering pain point</a:t>
             </a:r>
             <a:endParaRPr lang="en-US" sz="900" dirty="0"/>
           </a:p>
@@ -13839,13 +13839,13 @@
             <a:r>
               <a:rPr lang="en-US" sz="1200" dirty="0">
                 <a:solidFill>
-                  <a:srgbClr val="F85149"/>
-                </a:solidFill>
-                <a:latin typeface="Calibri" pitchFamily="34" charset="0"/>
-                <a:ea typeface="Calibri" pitchFamily="34" charset="-122"/>
-                <a:cs typeface="Calibri" pitchFamily="34" charset="-120"/>
-              </a:rPr>
-              <a:t>學習重點</a:t>
+                  <a:srgbClr val="C4605B"/>
+                </a:solidFill>
+                <a:latin typeface="Calibri" pitchFamily="34" charset="0"/>
+                <a:ea typeface="Calibri" pitchFamily="34" charset="-122"/>
+                <a:cs typeface="Calibri" pitchFamily="34" charset="-120"/>
+              </a:rPr>
+              <a:t>Key Takeaway</a:t>
             </a:r>
             <a:endParaRPr lang="en-US" sz="1200" dirty="0"/>
           </a:p>
@@ -13868,18 +13868,18 @@
             </a:avLst>
           </a:prstGeom>
           <a:solidFill>
-            <a:srgbClr val="161B22"/>
+            <a:srgbClr val="F5F1EB"/>
           </a:solidFill>
           <a:ln w="15240">
             <a:solidFill>
-              <a:srgbClr val="0D8A6C"/>
+              <a:srgbClr val="4A9B8E"/>
             </a:solidFill>
             <a:prstDash val="solid"/>
           </a:ln>
           <a:effectLst>
             <a:outerShdw sx="100000" sy="100000" kx="0" ky="0" algn="bl" rotWithShape="0" blurRad="76200" dist="25400" dir="2700000">
-              <a:srgbClr val="000000">
-                <a:alpha val="30000"/>
+              <a:srgbClr val="9E9488">
+                <a:alpha val="15000"/>
               </a:srgbClr>
             </a:outerShdw>
           </a:effectLst>
@@ -13948,13 +13948,13 @@
             <a:r>
               <a:rPr lang="en-US" sz="1100" b="1" dirty="0">
                 <a:solidFill>
-                  <a:srgbClr val="0D8A6C"/>
-                </a:solidFill>
-                <a:latin typeface="Calibri" pitchFamily="34" charset="0"/>
-                <a:ea typeface="Calibri" pitchFamily="34" charset="-122"/>
-                <a:cs typeface="Calibri" pitchFamily="34" charset="-120"/>
-              </a:rPr>
-              <a:t>Container 天然符合 12-Factor — 它們互相強化</a:t>
+                  <a:srgbClr val="4A9B8E"/>
+                </a:solidFill>
+                <a:latin typeface="Calibri" pitchFamily="34" charset="0"/>
+                <a:ea typeface="Calibri" pitchFamily="34" charset="-122"/>
+                <a:cs typeface="Calibri" pitchFamily="34" charset="-120"/>
+              </a:rPr>
+              <a:t>Containers Naturally Align with 12-Factor — They Reinforce Each Other</a:t>
             </a:r>
             <a:endParaRPr lang="en-US" sz="1100" dirty="0"/>
           </a:p>
@@ -13987,13 +13987,13 @@
             <a:r>
               <a:rPr lang="en-US" sz="900" dirty="0">
                 <a:solidFill>
-                  <a:srgbClr val="8B949E"/>
-                </a:solidFill>
-                <a:latin typeface="Calibri" pitchFamily="34" charset="0"/>
-                <a:ea typeface="Calibri" pitchFamily="34" charset="-122"/>
-                <a:cs typeface="Calibri" pitchFamily="34" charset="-120"/>
-              </a:rPr>
-              <a:t>• 用 Dockerfile 管理依賴 (Factor 2)</a:t>
+                  <a:srgbClr val="8A8078"/>
+                </a:solidFill>
+                <a:latin typeface="Calibri" pitchFamily="34" charset="0"/>
+                <a:ea typeface="Calibri" pitchFamily="34" charset="-122"/>
+                <a:cs typeface="Calibri" pitchFamily="34" charset="-120"/>
+              </a:rPr>
+              <a:t>• Manage dependencies with Dockerfile (Factor 2)</a:t>
             </a:r>
             <a:endParaRPr lang="en-US" sz="900" dirty="0"/>
           </a:p>
@@ -14026,13 +14026,13 @@
             <a:r>
               <a:rPr lang="en-US" sz="900" dirty="0">
                 <a:solidFill>
-                  <a:srgbClr val="8B949E"/>
-                </a:solidFill>
-                <a:latin typeface="Calibri" pitchFamily="34" charset="0"/>
-                <a:ea typeface="Calibri" pitchFamily="34" charset="-122"/>
-                <a:cs typeface="Calibri" pitchFamily="34" charset="-120"/>
-              </a:rPr>
-              <a:t>• 用環境變數設定 (Factor 3)</a:t>
+                  <a:srgbClr val="8A8078"/>
+                </a:solidFill>
+                <a:latin typeface="Calibri" pitchFamily="34" charset="0"/>
+                <a:ea typeface="Calibri" pitchFamily="34" charset="-122"/>
+                <a:cs typeface="Calibri" pitchFamily="34" charset="-120"/>
+              </a:rPr>
+              <a:t>• Configure via environment variables (Factor 3)</a:t>
             </a:r>
             <a:endParaRPr lang="en-US" sz="900" dirty="0"/>
           </a:p>
@@ -14065,7 +14065,7 @@
             <a:r>
               <a:rPr lang="en-US" sz="900" dirty="0">
                 <a:solidFill>
-                  <a:srgbClr val="8B949E"/>
+                  <a:srgbClr val="8A8078"/>
                 </a:solidFill>
                 <a:latin typeface="Calibri" pitchFamily="34" charset="0"/>
                 <a:ea typeface="Calibri" pitchFamily="34" charset="-122"/>
@@ -14104,13 +14104,13 @@
             <a:r>
               <a:rPr lang="en-US" sz="1200" dirty="0">
                 <a:solidFill>
-                  <a:srgbClr val="F85149"/>
-                </a:solidFill>
-                <a:latin typeface="Calibri" pitchFamily="34" charset="0"/>
-                <a:ea typeface="Calibri" pitchFamily="34" charset="-122"/>
-                <a:cs typeface="Calibri" pitchFamily="34" charset="-120"/>
-              </a:rPr>
-              <a:t>核心洞察</a:t>
+                  <a:srgbClr val="C4605B"/>
+                </a:solidFill>
+                <a:latin typeface="Calibri" pitchFamily="34" charset="0"/>
+                <a:ea typeface="Calibri" pitchFamily="34" charset="-122"/>
+                <a:cs typeface="Calibri" pitchFamily="34" charset="-120"/>
+              </a:rPr>
+              <a:t>Core Insight</a:t>
             </a:r>
             <a:endParaRPr lang="en-US" sz="1200" dirty="0"/>
           </a:p>
@@ -14133,18 +14133,18 @@
             </a:avLst>
           </a:prstGeom>
           <a:solidFill>
-            <a:srgbClr val="161B22"/>
+            <a:srgbClr val="F5F1EB"/>
           </a:solidFill>
           <a:ln w="15240">
             <a:solidFill>
-              <a:srgbClr val="3FB950"/>
+              <a:srgbClr val="4A9968"/>
             </a:solidFill>
             <a:prstDash val="solid"/>
           </a:ln>
           <a:effectLst>
             <a:outerShdw sx="100000" sy="100000" kx="0" ky="0" algn="bl" rotWithShape="0" blurRad="76200" dist="25400" dir="2700000">
-              <a:srgbClr val="000000">
-                <a:alpha val="30000"/>
+              <a:srgbClr val="9E9488">
+                <a:alpha val="15000"/>
               </a:srgbClr>
             </a:outerShdw>
           </a:effectLst>
@@ -14213,13 +14213,13 @@
             <a:r>
               <a:rPr lang="en-US" sz="1100" b="1" dirty="0">
                 <a:solidFill>
-                  <a:srgbClr val="3FB950"/>
-                </a:solidFill>
-                <a:latin typeface="Calibri" pitchFamily="34" charset="0"/>
-                <a:ea typeface="Calibri" pitchFamily="34" charset="-122"/>
-                <a:cs typeface="Calibri" pitchFamily="34" charset="-120"/>
-              </a:rPr>
-              <a:t>下一步：自動化這一切</a:t>
+                  <a:srgbClr val="4A9968"/>
+                </a:solidFill>
+                <a:latin typeface="Calibri" pitchFamily="34" charset="0"/>
+                <a:ea typeface="Calibri" pitchFamily="34" charset="-122"/>
+                <a:cs typeface="Calibri" pitchFamily="34" charset="-120"/>
+              </a:rPr>
+              <a:t>Next Step: Automate Everything</a:t>
             </a:r>
             <a:endParaRPr lang="en-US" sz="1100" dirty="0"/>
           </a:p>
@@ -14252,13 +14252,13 @@
             <a:r>
               <a:rPr lang="en-US" sz="900" dirty="0">
                 <a:solidFill>
-                  <a:srgbClr val="8B949E"/>
-                </a:solidFill>
-                <a:latin typeface="Calibri" pitchFamily="34" charset="0"/>
-                <a:ea typeface="Calibri" pitchFamily="34" charset="-122"/>
-                <a:cs typeface="Calibri" pitchFamily="34" charset="-120"/>
-              </a:rPr>
-              <a:t>• 手動 docker build/push 只是起點</a:t>
+                  <a:srgbClr val="8A8078"/>
+                </a:solidFill>
+                <a:latin typeface="Calibri" pitchFamily="34" charset="0"/>
+                <a:ea typeface="Calibri" pitchFamily="34" charset="-122"/>
+                <a:cs typeface="Calibri" pitchFamily="34" charset="-120"/>
+              </a:rPr>
+              <a:t>• Manual docker build/push is just the beginning</a:t>
             </a:r>
             <a:endParaRPr lang="en-US" sz="900" dirty="0"/>
           </a:p>
@@ -14291,13 +14291,13 @@
             <a:r>
               <a:rPr lang="en-US" sz="900" dirty="0">
                 <a:solidFill>
-                  <a:srgbClr val="8B949E"/>
-                </a:solidFill>
-                <a:latin typeface="Calibri" pitchFamily="34" charset="0"/>
-                <a:ea typeface="Calibri" pitchFamily="34" charset="-122"/>
-                <a:cs typeface="Calibri" pitchFamily="34" charset="-120"/>
-              </a:rPr>
-              <a:t>• CI/CD Pipeline 讓每次 commit 自動部署</a:t>
+                  <a:srgbClr val="8A8078"/>
+                </a:solidFill>
+                <a:latin typeface="Calibri" pitchFamily="34" charset="0"/>
+                <a:ea typeface="Calibri" pitchFamily="34" charset="-122"/>
+                <a:cs typeface="Calibri" pitchFamily="34" charset="-120"/>
+              </a:rPr>
+              <a:t>• CI/CD Pipelines automate deployment on every commit</a:t>
             </a:r>
             <a:endParaRPr lang="en-US" sz="900" dirty="0"/>
           </a:p>
@@ -14330,13 +14330,13 @@
             <a:r>
               <a:rPr lang="en-US" sz="900" dirty="0">
                 <a:solidFill>
-                  <a:srgbClr val="8B949E"/>
-                </a:solidFill>
-                <a:latin typeface="Calibri" pitchFamily="34" charset="0"/>
-                <a:ea typeface="Calibri" pitchFamily="34" charset="-122"/>
-                <a:cs typeface="Calibri" pitchFamily="34" charset="-120"/>
-              </a:rPr>
-              <a:t>• → Part 5: DevOps 與 CI/CD Pipeline</a:t>
+                  <a:srgbClr val="8A8078"/>
+                </a:solidFill>
+                <a:latin typeface="Calibri" pitchFamily="34" charset="0"/>
+                <a:ea typeface="Calibri" pitchFamily="34" charset="-122"/>
+                <a:cs typeface="Calibri" pitchFamily="34" charset="-120"/>
+              </a:rPr>
+              <a:t>• → Part 5: DevOps and CI/CD Pipelines</a:t>
             </a:r>
             <a:endParaRPr lang="en-US" sz="900" dirty="0"/>
           </a:p>
@@ -14369,13 +14369,13 @@
             <a:r>
               <a:rPr lang="en-US" sz="1200" dirty="0">
                 <a:solidFill>
-                  <a:srgbClr val="F85149"/>
-                </a:solidFill>
-                <a:latin typeface="Calibri" pitchFamily="34" charset="0"/>
-                <a:ea typeface="Calibri" pitchFamily="34" charset="-122"/>
-                <a:cs typeface="Calibri" pitchFamily="34" charset="-120"/>
-              </a:rPr>
-              <a:t>預告 Part 5</a:t>
+                  <a:srgbClr val="C4605B"/>
+                </a:solidFill>
+                <a:latin typeface="Calibri" pitchFamily="34" charset="0"/>
+                <a:ea typeface="Calibri" pitchFamily="34" charset="-122"/>
+                <a:cs typeface="Calibri" pitchFamily="34" charset="-120"/>
+              </a:rPr>
+              <a:t>Part 5 Preview</a:t>
             </a:r>
             <a:endParaRPr lang="en-US" sz="1200" dirty="0"/>
           </a:p>
